--- a/EngineeredMonitoringPlatform/docs/EMP_PresentationSlides.pptx
+++ b/EngineeredMonitoringPlatform/docs/EMP_PresentationSlides.pptx
@@ -7,30 +7,41 @@
   <p:sldIdLst>
     <p:sldId id="256" r:id="rId2"/>
     <p:sldId id="257" r:id="rId3"/>
-    <p:sldId id="269" r:id="rId4"/>
-    <p:sldId id="268" r:id="rId5"/>
-    <p:sldId id="270" r:id="rId6"/>
-    <p:sldId id="258" r:id="rId7"/>
-    <p:sldId id="266" r:id="rId8"/>
-    <p:sldId id="282" r:id="rId9"/>
-    <p:sldId id="265" r:id="rId10"/>
-    <p:sldId id="259" r:id="rId11"/>
-    <p:sldId id="260" r:id="rId12"/>
-    <p:sldId id="261" r:id="rId13"/>
-    <p:sldId id="267" r:id="rId14"/>
-    <p:sldId id="262" r:id="rId15"/>
-    <p:sldId id="263" r:id="rId16"/>
-    <p:sldId id="264" r:id="rId17"/>
-    <p:sldId id="271" r:id="rId18"/>
-    <p:sldId id="276" r:id="rId19"/>
-    <p:sldId id="273" r:id="rId20"/>
-    <p:sldId id="272" r:id="rId21"/>
-    <p:sldId id="275" r:id="rId22"/>
-    <p:sldId id="277" r:id="rId23"/>
-    <p:sldId id="279" r:id="rId24"/>
-    <p:sldId id="280" r:id="rId25"/>
-    <p:sldId id="278" r:id="rId26"/>
-    <p:sldId id="281" r:id="rId27"/>
+    <p:sldId id="283" r:id="rId4"/>
+    <p:sldId id="269" r:id="rId5"/>
+    <p:sldId id="268" r:id="rId6"/>
+    <p:sldId id="270" r:id="rId7"/>
+    <p:sldId id="271" r:id="rId8"/>
+    <p:sldId id="284" r:id="rId9"/>
+    <p:sldId id="258" r:id="rId10"/>
+    <p:sldId id="266" r:id="rId11"/>
+    <p:sldId id="282" r:id="rId12"/>
+    <p:sldId id="265" r:id="rId13"/>
+    <p:sldId id="259" r:id="rId14"/>
+    <p:sldId id="261" r:id="rId15"/>
+    <p:sldId id="267" r:id="rId16"/>
+    <p:sldId id="263" r:id="rId17"/>
+    <p:sldId id="264" r:id="rId18"/>
+    <p:sldId id="285" r:id="rId19"/>
+    <p:sldId id="276" r:id="rId20"/>
+    <p:sldId id="273" r:id="rId21"/>
+    <p:sldId id="272" r:id="rId22"/>
+    <p:sldId id="275" r:id="rId23"/>
+    <p:sldId id="286" r:id="rId24"/>
+    <p:sldId id="277" r:id="rId25"/>
+    <p:sldId id="279" r:id="rId26"/>
+    <p:sldId id="280" r:id="rId27"/>
+    <p:sldId id="278" r:id="rId28"/>
+    <p:sldId id="281" r:id="rId29"/>
+    <p:sldId id="287" r:id="rId30"/>
+    <p:sldId id="288" r:id="rId31"/>
+    <p:sldId id="291" r:id="rId32"/>
+    <p:sldId id="292" r:id="rId33"/>
+    <p:sldId id="290" r:id="rId34"/>
+    <p:sldId id="294" r:id="rId35"/>
+    <p:sldId id="293" r:id="rId36"/>
+    <p:sldId id="295" r:id="rId37"/>
+    <p:sldId id="289" r:id="rId38"/>
   </p:sldIdLst>
   <p:sldSz cx="12192000" cy="6858000"/>
   <p:notesSz cx="6858000" cy="9144000"/>
@@ -286,7 +297,7 @@
           <a:p>
             <a:fld id="{CAE04C65-539E-4AD4-859E-8B7412D78289}" type="datetimeFigureOut">
               <a:rPr lang="LID4096" smtClean="0"/>
-              <a:t>06/09/2022</a:t>
+              <a:t>03/07/2026</a:t>
             </a:fld>
             <a:endParaRPr lang="LID4096"/>
           </a:p>
@@ -575,7 +586,7 @@
           <a:p>
             <a:fld id="{CAE04C65-539E-4AD4-859E-8B7412D78289}" type="datetimeFigureOut">
               <a:rPr lang="LID4096" smtClean="0"/>
-              <a:t>06/09/2022</a:t>
+              <a:t>03/07/2026</a:t>
             </a:fld>
             <a:endParaRPr lang="LID4096"/>
           </a:p>
@@ -784,7 +795,7 @@
           <a:p>
             <a:fld id="{CAE04C65-539E-4AD4-859E-8B7412D78289}" type="datetimeFigureOut">
               <a:rPr lang="LID4096" smtClean="0"/>
-              <a:t>06/09/2022</a:t>
+              <a:t>03/07/2026</a:t>
             </a:fld>
             <a:endParaRPr lang="LID4096"/>
           </a:p>
@@ -994,7 +1005,7 @@
           <a:p>
             <a:fld id="{CAE04C65-539E-4AD4-859E-8B7412D78289}" type="datetimeFigureOut">
               <a:rPr lang="LID4096" smtClean="0"/>
-              <a:t>06/09/2022</a:t>
+              <a:t>03/07/2026</a:t>
             </a:fld>
             <a:endParaRPr lang="LID4096"/>
           </a:p>
@@ -1208,7 +1219,7 @@
           <a:p>
             <a:fld id="{CAE04C65-539E-4AD4-859E-8B7412D78289}" type="datetimeFigureOut">
               <a:rPr lang="LID4096" smtClean="0"/>
-              <a:t>06/09/2022</a:t>
+              <a:t>03/07/2026</a:t>
             </a:fld>
             <a:endParaRPr lang="LID4096"/>
           </a:p>
@@ -1398,7 +1409,7 @@
           <a:p>
             <a:fld id="{CAE04C65-539E-4AD4-859E-8B7412D78289}" type="datetimeFigureOut">
               <a:rPr lang="LID4096" smtClean="0"/>
-              <a:t>06/09/2022</a:t>
+              <a:t>03/07/2026</a:t>
             </a:fld>
             <a:endParaRPr lang="LID4096"/>
           </a:p>
@@ -1674,7 +1685,7 @@
           <a:p>
             <a:fld id="{CAE04C65-539E-4AD4-859E-8B7412D78289}" type="datetimeFigureOut">
               <a:rPr lang="LID4096" smtClean="0"/>
-              <a:t>06/09/2022</a:t>
+              <a:t>03/07/2026</a:t>
             </a:fld>
             <a:endParaRPr lang="LID4096"/>
           </a:p>
@@ -1951,7 +1962,7 @@
           <a:p>
             <a:fld id="{CAE04C65-539E-4AD4-859E-8B7412D78289}" type="datetimeFigureOut">
               <a:rPr lang="LID4096" smtClean="0"/>
-              <a:t>06/09/2022</a:t>
+              <a:t>03/07/2026</a:t>
             </a:fld>
             <a:endParaRPr lang="LID4096"/>
           </a:p>
@@ -2370,7 +2381,7 @@
           <a:p>
             <a:fld id="{CAE04C65-539E-4AD4-859E-8B7412D78289}" type="datetimeFigureOut">
               <a:rPr lang="LID4096" smtClean="0"/>
-              <a:t>06/09/2022</a:t>
+              <a:t>03/07/2026</a:t>
             </a:fld>
             <a:endParaRPr lang="LID4096"/>
           </a:p>
@@ -2521,7 +2532,7 @@
           <a:p>
             <a:fld id="{CAE04C65-539E-4AD4-859E-8B7412D78289}" type="datetimeFigureOut">
               <a:rPr lang="LID4096" smtClean="0"/>
-              <a:t>06/09/2022</a:t>
+              <a:t>03/07/2026</a:t>
             </a:fld>
             <a:endParaRPr lang="LID4096"/>
           </a:p>
@@ -2634,7 +2645,7 @@
           <a:p>
             <a:fld id="{CAE04C65-539E-4AD4-859E-8B7412D78289}" type="datetimeFigureOut">
               <a:rPr lang="LID4096" smtClean="0"/>
-              <a:t>06/09/2022</a:t>
+              <a:t>03/07/2026</a:t>
             </a:fld>
             <a:endParaRPr lang="LID4096"/>
           </a:p>
@@ -2947,7 +2958,7 @@
           <a:p>
             <a:fld id="{CAE04C65-539E-4AD4-859E-8B7412D78289}" type="datetimeFigureOut">
               <a:rPr lang="LID4096" smtClean="0"/>
-              <a:t>06/09/2022</a:t>
+              <a:t>03/07/2026</a:t>
             </a:fld>
             <a:endParaRPr lang="LID4096"/>
           </a:p>
@@ -3193,7 +3204,7 @@
           <a:p>
             <a:fld id="{CAE04C65-539E-4AD4-859E-8B7412D78289}" type="datetimeFigureOut">
               <a:rPr lang="LID4096" smtClean="0"/>
-              <a:t>06/09/2022</a:t>
+              <a:t>03/07/2026</a:t>
             </a:fld>
             <a:endParaRPr lang="LID4096"/>
           </a:p>
@@ -3709,10 +3720,10 @@
       </p:grpSpPr>
       <p:sp>
         <p:nvSpPr>
-          <p:cNvPr id="11" name="Title 10">
-            <a:extLst>
-              <a:ext uri="{FF2B5EF4-FFF2-40B4-BE49-F238E27FC236}">
-                <a16:creationId xmlns:a16="http://schemas.microsoft.com/office/drawing/2014/main" id="{30F7E243-F54D-4F7C-845C-0C2C1DBA9D28}"/>
+          <p:cNvPr id="2" name="Title 1">
+            <a:extLst>
+              <a:ext uri="{FF2B5EF4-FFF2-40B4-BE49-F238E27FC236}">
+                <a16:creationId xmlns:a16="http://schemas.microsoft.com/office/drawing/2014/main" id="{62118670-9D33-4A23-AC4C-183474388AAF}"/>
               </a:ext>
             </a:extLst>
           </p:cNvPr>
@@ -3730,7 +3741,51 @@
           <a:p>
             <a:r>
               <a:rPr lang="en-US" dirty="0"/>
-              <a:t>Overview of Standard Widgets</a:t>
+              <a:t>Monitoring Widgets – Displays</a:t>
+            </a:r>
+            <a:endParaRPr lang="LID4096" dirty="0"/>
+          </a:p>
+        </p:txBody>
+      </p:sp>
+      <p:sp>
+        <p:nvSpPr>
+          <p:cNvPr id="3" name="Content Placeholder 2">
+            <a:extLst>
+              <a:ext uri="{FF2B5EF4-FFF2-40B4-BE49-F238E27FC236}">
+                <a16:creationId xmlns:a16="http://schemas.microsoft.com/office/drawing/2014/main" id="{DB6FEBE8-F4AB-4F0A-A9FA-DFC07580C120}"/>
+              </a:ext>
+            </a:extLst>
+          </p:cNvPr>
+          <p:cNvSpPr>
+            <a:spLocks noGrp="1"/>
+          </p:cNvSpPr>
+          <p:nvPr>
+            <p:ph idx="1"/>
+          </p:nvPr>
+        </p:nvSpPr>
+        <p:spPr>
+          <a:xfrm>
+            <a:off x="838200" y="1239521"/>
+            <a:ext cx="10515600" cy="752475"/>
+          </a:xfrm>
+        </p:spPr>
+        <p:txBody>
+          <a:bodyPr>
+            <a:normAutofit fontScale="92500" lnSpcReduction="10000"/>
+          </a:bodyPr>
+          <a:lstStyle/>
+          <a:p>
+            <a:pPr algn="ctr"/>
+            <a:r>
+              <a:rPr lang="en-US" dirty="0"/>
+              <a:t>Many Monitoring widgets use a default approach to show data, </a:t>
+            </a:r>
+            <a:br>
+              <a:rPr lang="en-US" dirty="0"/>
+            </a:br>
+            <a:r>
+              <a:rPr lang="en-US" dirty="0"/>
+              <a:t>and can be displayed as: Tiles, Table, Panels, Cards, Bar, Map, List, CSV, JSON, </a:t>
             </a:r>
             <a:endParaRPr lang="LID4096" dirty="0"/>
           </a:p>
@@ -3738,10 +3793,10 @@
       </p:sp>
       <p:pic>
         <p:nvPicPr>
-          <p:cNvPr id="15" name="Picture 14">
-            <a:extLst>
-              <a:ext uri="{FF2B5EF4-FFF2-40B4-BE49-F238E27FC236}">
-                <a16:creationId xmlns:a16="http://schemas.microsoft.com/office/drawing/2014/main" id="{6C615B85-DB7E-490F-BF09-363517CDBB58}"/>
+          <p:cNvPr id="5" name="Picture 4">
+            <a:extLst>
+              <a:ext uri="{FF2B5EF4-FFF2-40B4-BE49-F238E27FC236}">
+                <a16:creationId xmlns:a16="http://schemas.microsoft.com/office/drawing/2014/main" id="{45AD0FA3-F6CA-4F38-81D6-5DF2B4E9C2F1}"/>
               </a:ext>
             </a:extLst>
           </p:cNvPr>
@@ -3751,21 +3806,15 @@
           <p:nvPr/>
         </p:nvPicPr>
         <p:blipFill>
-          <a:blip r:embed="rId2">
-            <a:extLst>
-              <a:ext uri="{28A0092B-C50C-407E-A947-70E740481C1C}">
-                <a14:useLocalDpi xmlns:a14="http://schemas.microsoft.com/office/drawing/2010/main" val="0"/>
-              </a:ext>
-            </a:extLst>
-          </a:blip>
+          <a:blip r:embed="rId2"/>
           <a:stretch>
             <a:fillRect/>
           </a:stretch>
         </p:blipFill>
         <p:spPr>
           <a:xfrm>
-            <a:off x="1193801" y="1140312"/>
-            <a:ext cx="9230958" cy="5290100"/>
+            <a:off x="2271791" y="2158367"/>
+            <a:ext cx="7648418" cy="4384093"/>
           </a:xfrm>
           <a:prstGeom prst="rect">
             <a:avLst/>
@@ -3775,7 +3824,7 @@
     </p:spTree>
     <p:extLst>
       <p:ext uri="{BB962C8B-B14F-4D97-AF65-F5344CB8AC3E}">
-        <p14:creationId xmlns:p14="http://schemas.microsoft.com/office/powerpoint/2010/main" val="3057281813"/>
+        <p14:creationId xmlns:p14="http://schemas.microsoft.com/office/powerpoint/2010/main" val="78368369"/>
       </p:ext>
     </p:extLst>
   </p:cSld>
@@ -3807,7 +3856,7 @@
           <p:cNvPr id="2" name="Title 1">
             <a:extLst>
               <a:ext uri="{FF2B5EF4-FFF2-40B4-BE49-F238E27FC236}">
-                <a16:creationId xmlns:a16="http://schemas.microsoft.com/office/drawing/2014/main" id="{C50EDBA1-64F0-4C5D-97F3-8CA2EF1B03D6}"/>
+                <a16:creationId xmlns:a16="http://schemas.microsoft.com/office/drawing/2014/main" id="{62118670-9D33-4A23-AC4C-183474388AAF}"/>
               </a:ext>
             </a:extLst>
           </p:cNvPr>
@@ -3825,7 +3874,7 @@
           <a:p>
             <a:r>
               <a:rPr lang="en-US" dirty="0"/>
-              <a:t>Monitoring Widgets – Common and AWA</a:t>
+              <a:t>Monitoring Widgets – Displays</a:t>
             </a:r>
             <a:endParaRPr lang="LID4096" dirty="0"/>
           </a:p>
@@ -3836,7 +3885,7 @@
           <p:cNvPr id="6" name="Picture 5">
             <a:extLst>
               <a:ext uri="{FF2B5EF4-FFF2-40B4-BE49-F238E27FC236}">
-                <a16:creationId xmlns:a16="http://schemas.microsoft.com/office/drawing/2014/main" id="{F6389D20-35C8-4A4D-91C5-C84C2DFF6D3C}"/>
+                <a16:creationId xmlns:a16="http://schemas.microsoft.com/office/drawing/2014/main" id="{DC7BF7BF-BA0B-4410-A826-DE5724E882F0}"/>
               </a:ext>
             </a:extLst>
           </p:cNvPr>
@@ -3853,18 +3902,55 @@
         </p:blipFill>
         <p:spPr>
           <a:xfrm>
-            <a:off x="1066800" y="1544218"/>
-            <a:ext cx="10058400" cy="4758654"/>
+            <a:off x="1641908" y="1828167"/>
+            <a:ext cx="8908184" cy="4335043"/>
           </a:xfrm>
           <a:prstGeom prst="rect">
             <a:avLst/>
           </a:prstGeom>
         </p:spPr>
       </p:pic>
+      <p:sp>
+        <p:nvSpPr>
+          <p:cNvPr id="7" name="Content Placeholder 2">
+            <a:extLst>
+              <a:ext uri="{FF2B5EF4-FFF2-40B4-BE49-F238E27FC236}">
+                <a16:creationId xmlns:a16="http://schemas.microsoft.com/office/drawing/2014/main" id="{E4DA3F9C-F9DB-4F20-8762-A4E630955EE6}"/>
+              </a:ext>
+            </a:extLst>
+          </p:cNvPr>
+          <p:cNvSpPr>
+            <a:spLocks noGrp="1"/>
+          </p:cNvSpPr>
+          <p:nvPr>
+            <p:ph idx="1"/>
+          </p:nvPr>
+        </p:nvSpPr>
+        <p:spPr>
+          <a:xfrm>
+            <a:off x="838200" y="1239521"/>
+            <a:ext cx="10515600" cy="752475"/>
+          </a:xfrm>
+        </p:spPr>
+        <p:txBody>
+          <a:bodyPr>
+            <a:normAutofit/>
+          </a:bodyPr>
+          <a:lstStyle/>
+          <a:p>
+            <a:pPr algn="ctr"/>
+            <a:r>
+              <a:rPr lang="en-US" dirty="0"/>
+              <a:t>Examples for Status Bar, Map and List:</a:t>
+            </a:r>
+            <a:endParaRPr lang="LID4096" dirty="0"/>
+          </a:p>
+        </p:txBody>
+      </p:sp>
     </p:spTree>
     <p:extLst>
       <p:ext uri="{BB962C8B-B14F-4D97-AF65-F5344CB8AC3E}">
-        <p14:creationId xmlns:p14="http://schemas.microsoft.com/office/powerpoint/2010/main" val="881396366"/>
+        <p14:creationId xmlns:p14="http://schemas.microsoft.com/office/powerpoint/2010/main" val="3124610342"/>
       </p:ext>
     </p:extLst>
   </p:cSld>
@@ -3893,10 +3979,10 @@
       </p:grpSpPr>
       <p:sp>
         <p:nvSpPr>
-          <p:cNvPr id="2" name="Title 1">
-            <a:extLst>
-              <a:ext uri="{FF2B5EF4-FFF2-40B4-BE49-F238E27FC236}">
-                <a16:creationId xmlns:a16="http://schemas.microsoft.com/office/drawing/2014/main" id="{C50EDBA1-64F0-4C5D-97F3-8CA2EF1B03D6}"/>
+          <p:cNvPr id="7" name="Title 6">
+            <a:extLst>
+              <a:ext uri="{FF2B5EF4-FFF2-40B4-BE49-F238E27FC236}">
+                <a16:creationId xmlns:a16="http://schemas.microsoft.com/office/drawing/2014/main" id="{73B810CF-8B65-40F1-A50C-4AEABE85B5E5}"/>
               </a:ext>
             </a:extLst>
           </p:cNvPr>
@@ -3909,12 +3995,43 @@
         </p:nvSpPr>
         <p:spPr/>
         <p:txBody>
-          <a:bodyPr/>
-          <a:lstStyle/>
-          <a:p>
-            <a:r>
-              <a:rPr lang="en-US" dirty="0"/>
-              <a:t>Monitoring Widgets – Dynatrace</a:t>
+          <a:bodyPr>
+            <a:normAutofit/>
+          </a:bodyPr>
+          <a:lstStyle/>
+          <a:p>
+            <a:r>
+              <a:rPr lang="en-US" dirty="0"/>
+              <a:t>Dashboard Widgets – Colors</a:t>
+            </a:r>
+            <a:endParaRPr lang="LID4096" dirty="0"/>
+          </a:p>
+        </p:txBody>
+      </p:sp>
+      <p:sp>
+        <p:nvSpPr>
+          <p:cNvPr id="12" name="Content Placeholder 11">
+            <a:extLst>
+              <a:ext uri="{FF2B5EF4-FFF2-40B4-BE49-F238E27FC236}">
+                <a16:creationId xmlns:a16="http://schemas.microsoft.com/office/drawing/2014/main" id="{46AFF02A-4A3F-46A9-AA85-C205489ED0A3}"/>
+              </a:ext>
+            </a:extLst>
+          </p:cNvPr>
+          <p:cNvSpPr>
+            <a:spLocks noGrp="1"/>
+          </p:cNvSpPr>
+          <p:nvPr>
+            <p:ph idx="1"/>
+          </p:nvPr>
+        </p:nvSpPr>
+        <p:spPr/>
+        <p:txBody>
+          <a:bodyPr/>
+          <a:lstStyle/>
+          <a:p>
+            <a:r>
+              <a:rPr lang="en-US" dirty="0"/>
+              <a:t>Widgets can be colored to highlight or create visual grouping.</a:t>
             </a:r>
             <a:endParaRPr lang="LID4096" dirty="0"/>
           </a:p>
@@ -3922,10 +4039,10 @@
       </p:sp>
       <p:pic>
         <p:nvPicPr>
-          <p:cNvPr id="4" name="Picture 3">
-            <a:extLst>
-              <a:ext uri="{FF2B5EF4-FFF2-40B4-BE49-F238E27FC236}">
-                <a16:creationId xmlns:a16="http://schemas.microsoft.com/office/drawing/2014/main" id="{A61A1BAD-BCFE-4D10-84E9-B04B9588280E}"/>
+          <p:cNvPr id="18" name="Picture 17">
+            <a:extLst>
+              <a:ext uri="{FF2B5EF4-FFF2-40B4-BE49-F238E27FC236}">
+                <a16:creationId xmlns:a16="http://schemas.microsoft.com/office/drawing/2014/main" id="{E84A51B2-4D91-4021-8309-6E3EBF6BC3AF}"/>
               </a:ext>
             </a:extLst>
           </p:cNvPr>
@@ -3935,15 +4052,21 @@
           <p:nvPr/>
         </p:nvPicPr>
         <p:blipFill>
-          <a:blip r:embed="rId2"/>
+          <a:blip r:embed="rId2">
+            <a:extLst>
+              <a:ext uri="{28A0092B-C50C-407E-A947-70E740481C1C}">
+                <a14:useLocalDpi xmlns:a14="http://schemas.microsoft.com/office/drawing/2010/main" val="0"/>
+              </a:ext>
+            </a:extLst>
+          </a:blip>
           <a:stretch>
             <a:fillRect/>
           </a:stretch>
         </p:blipFill>
         <p:spPr>
           <a:xfrm>
-            <a:off x="838200" y="1939320"/>
-            <a:ext cx="10353040" cy="3499328"/>
+            <a:off x="1046480" y="2498161"/>
+            <a:ext cx="9580880" cy="3229510"/>
           </a:xfrm>
           <a:prstGeom prst="rect">
             <a:avLst/>
@@ -3953,7 +4076,7 @@
     </p:spTree>
     <p:extLst>
       <p:ext uri="{BB962C8B-B14F-4D97-AF65-F5344CB8AC3E}">
-        <p14:creationId xmlns:p14="http://schemas.microsoft.com/office/powerpoint/2010/main" val="1369882625"/>
+        <p14:creationId xmlns:p14="http://schemas.microsoft.com/office/powerpoint/2010/main" val="87834105"/>
       </p:ext>
     </p:extLst>
   </p:cSld>
@@ -3982,10 +4105,10 @@
       </p:grpSpPr>
       <p:sp>
         <p:nvSpPr>
-          <p:cNvPr id="2" name="Title 1">
-            <a:extLst>
-              <a:ext uri="{FF2B5EF4-FFF2-40B4-BE49-F238E27FC236}">
-                <a16:creationId xmlns:a16="http://schemas.microsoft.com/office/drawing/2014/main" id="{C50EDBA1-64F0-4C5D-97F3-8CA2EF1B03D6}"/>
+          <p:cNvPr id="11" name="Title 10">
+            <a:extLst>
+              <a:ext uri="{FF2B5EF4-FFF2-40B4-BE49-F238E27FC236}">
+                <a16:creationId xmlns:a16="http://schemas.microsoft.com/office/drawing/2014/main" id="{30F7E243-F54D-4F7C-845C-0C2C1DBA9D28}"/>
               </a:ext>
             </a:extLst>
           </p:cNvPr>
@@ -4003,7 +4126,7 @@
           <a:p>
             <a:r>
               <a:rPr lang="en-US" dirty="0"/>
-              <a:t>Monitoring Widgets – Prometheus</a:t>
+              <a:t>Overview of Standard Widgets</a:t>
             </a:r>
             <a:endParaRPr lang="LID4096" dirty="0"/>
           </a:p>
@@ -4011,10 +4134,10 @@
       </p:sp>
       <p:pic>
         <p:nvPicPr>
-          <p:cNvPr id="7" name="Picture 6">
-            <a:extLst>
-              <a:ext uri="{FF2B5EF4-FFF2-40B4-BE49-F238E27FC236}">
-                <a16:creationId xmlns:a16="http://schemas.microsoft.com/office/drawing/2014/main" id="{72CFC904-D962-42B2-B94B-C83D8823DD20}"/>
+          <p:cNvPr id="15" name="Picture 14">
+            <a:extLst>
+              <a:ext uri="{FF2B5EF4-FFF2-40B4-BE49-F238E27FC236}">
+                <a16:creationId xmlns:a16="http://schemas.microsoft.com/office/drawing/2014/main" id="{6C615B85-DB7E-490F-BF09-363517CDBB58}"/>
               </a:ext>
             </a:extLst>
           </p:cNvPr>
@@ -4024,15 +4147,21 @@
           <p:nvPr/>
         </p:nvPicPr>
         <p:blipFill>
-          <a:blip r:embed="rId2"/>
+          <a:blip r:embed="rId2">
+            <a:extLst>
+              <a:ext uri="{28A0092B-C50C-407E-A947-70E740481C1C}">
+                <a14:useLocalDpi xmlns:a14="http://schemas.microsoft.com/office/drawing/2010/main" val="0"/>
+              </a:ext>
+            </a:extLst>
+          </a:blip>
           <a:stretch>
             <a:fillRect/>
           </a:stretch>
         </p:blipFill>
         <p:spPr>
           <a:xfrm>
-            <a:off x="457200" y="1958822"/>
-            <a:ext cx="11104880" cy="3304489"/>
+            <a:off x="1193801" y="1140312"/>
+            <a:ext cx="9230958" cy="5290100"/>
           </a:xfrm>
           <a:prstGeom prst="rect">
             <a:avLst/>
@@ -4042,7 +4171,7 @@
     </p:spTree>
     <p:extLst>
       <p:ext uri="{BB962C8B-B14F-4D97-AF65-F5344CB8AC3E}">
-        <p14:creationId xmlns:p14="http://schemas.microsoft.com/office/powerpoint/2010/main" val="1940863557"/>
+        <p14:creationId xmlns:p14="http://schemas.microsoft.com/office/powerpoint/2010/main" val="3057281813"/>
       </p:ext>
     </p:extLst>
   </p:cSld>
@@ -4092,7 +4221,7 @@
           <a:p>
             <a:r>
               <a:rPr lang="en-US" dirty="0"/>
-              <a:t>Monitoring Widgets – SPM</a:t>
+              <a:t>Monitoring Widgets – Dynatrace</a:t>
             </a:r>
             <a:endParaRPr lang="LID4096" dirty="0"/>
           </a:p>
@@ -4100,10 +4229,10 @@
       </p:sp>
       <p:pic>
         <p:nvPicPr>
-          <p:cNvPr id="5" name="Picture 4">
-            <a:extLst>
-              <a:ext uri="{FF2B5EF4-FFF2-40B4-BE49-F238E27FC236}">
-                <a16:creationId xmlns:a16="http://schemas.microsoft.com/office/drawing/2014/main" id="{DC5E04B0-02A0-48E0-8B29-59C65D46FC41}"/>
+          <p:cNvPr id="4" name="Picture 3">
+            <a:extLst>
+              <a:ext uri="{FF2B5EF4-FFF2-40B4-BE49-F238E27FC236}">
+                <a16:creationId xmlns:a16="http://schemas.microsoft.com/office/drawing/2014/main" id="{A61A1BAD-BCFE-4D10-84E9-B04B9588280E}"/>
               </a:ext>
             </a:extLst>
           </p:cNvPr>
@@ -4120,8 +4249,8 @@
         </p:blipFill>
         <p:spPr>
           <a:xfrm>
-            <a:off x="944880" y="1940627"/>
-            <a:ext cx="10099040" cy="3421714"/>
+            <a:off x="838200" y="1939320"/>
+            <a:ext cx="10353040" cy="3499328"/>
           </a:xfrm>
           <a:prstGeom prst="rect">
             <a:avLst/>
@@ -4131,7 +4260,7 @@
     </p:spTree>
     <p:extLst>
       <p:ext uri="{BB962C8B-B14F-4D97-AF65-F5344CB8AC3E}">
-        <p14:creationId xmlns:p14="http://schemas.microsoft.com/office/powerpoint/2010/main" val="104645873"/>
+        <p14:creationId xmlns:p14="http://schemas.microsoft.com/office/powerpoint/2010/main" val="1369882625"/>
       </p:ext>
     </p:extLst>
   </p:cSld>
@@ -4163,7 +4292,7 @@
           <p:cNvPr id="2" name="Title 1">
             <a:extLst>
               <a:ext uri="{FF2B5EF4-FFF2-40B4-BE49-F238E27FC236}">
-                <a16:creationId xmlns:a16="http://schemas.microsoft.com/office/drawing/2014/main" id="{19152A8E-8BE5-4F17-8E67-410E7A73295E}"/>
+                <a16:creationId xmlns:a16="http://schemas.microsoft.com/office/drawing/2014/main" id="{C50EDBA1-64F0-4C5D-97F3-8CA2EF1B03D6}"/>
               </a:ext>
             </a:extLst>
           </p:cNvPr>
@@ -4181,15 +4310,7 @@
           <a:p>
             <a:r>
               <a:rPr lang="en-US" dirty="0"/>
-              <a:t>Monitoring Widgets – </a:t>
-            </a:r>
-            <a:r>
-              <a:rPr lang="en-US" dirty="0" err="1"/>
-              <a:t>Webex</a:t>
-            </a:r>
-            <a:r>
-              <a:rPr lang="en-US" dirty="0"/>
-              <a:t> Service</a:t>
+              <a:t>Monitoring Widgets – Prometheus</a:t>
             </a:r>
             <a:endParaRPr lang="LID4096" dirty="0"/>
           </a:p>
@@ -4197,10 +4318,10 @@
       </p:sp>
       <p:pic>
         <p:nvPicPr>
-          <p:cNvPr id="4" name="Picture 3">
-            <a:extLst>
-              <a:ext uri="{FF2B5EF4-FFF2-40B4-BE49-F238E27FC236}">
-                <a16:creationId xmlns:a16="http://schemas.microsoft.com/office/drawing/2014/main" id="{F4B5859B-5868-41C2-9C8A-913591F88797}"/>
+          <p:cNvPr id="7" name="Picture 6">
+            <a:extLst>
+              <a:ext uri="{FF2B5EF4-FFF2-40B4-BE49-F238E27FC236}">
+                <a16:creationId xmlns:a16="http://schemas.microsoft.com/office/drawing/2014/main" id="{72CFC904-D962-42B2-B94B-C83D8823DD20}"/>
               </a:ext>
             </a:extLst>
           </p:cNvPr>
@@ -4217,8 +4338,8 @@
         </p:blipFill>
         <p:spPr>
           <a:xfrm>
-            <a:off x="2471231" y="1864717"/>
-            <a:ext cx="7249537" cy="3982006"/>
+            <a:off x="457200" y="1958822"/>
+            <a:ext cx="11104880" cy="3304489"/>
           </a:xfrm>
           <a:prstGeom prst="rect">
             <a:avLst/>
@@ -4228,7 +4349,7 @@
     </p:spTree>
     <p:extLst>
       <p:ext uri="{BB962C8B-B14F-4D97-AF65-F5344CB8AC3E}">
-        <p14:creationId xmlns:p14="http://schemas.microsoft.com/office/powerpoint/2010/main" val="1278929377"/>
+        <p14:creationId xmlns:p14="http://schemas.microsoft.com/office/powerpoint/2010/main" val="1940863557"/>
       </p:ext>
     </p:extLst>
   </p:cSld>
@@ -4278,7 +4399,15 @@
           <a:p>
             <a:r>
               <a:rPr lang="en-US" dirty="0"/>
-              <a:t>Monitoring Widgets – Database</a:t>
+              <a:t>Monitoring Widgets – </a:t>
+            </a:r>
+            <a:r>
+              <a:rPr lang="en-US" dirty="0" err="1"/>
+              <a:t>Webex</a:t>
+            </a:r>
+            <a:r>
+              <a:rPr lang="en-US" dirty="0"/>
+              <a:t> Service</a:t>
             </a:r>
             <a:endParaRPr lang="LID4096" dirty="0"/>
           </a:p>
@@ -4286,10 +4415,10 @@
       </p:sp>
       <p:pic>
         <p:nvPicPr>
-          <p:cNvPr id="5" name="Picture 4">
-            <a:extLst>
-              <a:ext uri="{FF2B5EF4-FFF2-40B4-BE49-F238E27FC236}">
-                <a16:creationId xmlns:a16="http://schemas.microsoft.com/office/drawing/2014/main" id="{0EE49500-D0D3-4B5C-BAA5-D7C0852B8007}"/>
+          <p:cNvPr id="4" name="Picture 3">
+            <a:extLst>
+              <a:ext uri="{FF2B5EF4-FFF2-40B4-BE49-F238E27FC236}">
+                <a16:creationId xmlns:a16="http://schemas.microsoft.com/office/drawing/2014/main" id="{F4B5859B-5868-41C2-9C8A-913591F88797}"/>
               </a:ext>
             </a:extLst>
           </p:cNvPr>
@@ -4306,8 +4435,8 @@
         </p:blipFill>
         <p:spPr>
           <a:xfrm>
-            <a:off x="955040" y="1285431"/>
-            <a:ext cx="9977120" cy="5207443"/>
+            <a:off x="2471231" y="1864717"/>
+            <a:ext cx="7249537" cy="3982006"/>
           </a:xfrm>
           <a:prstGeom prst="rect">
             <a:avLst/>
@@ -4317,7 +4446,7 @@
     </p:spTree>
     <p:extLst>
       <p:ext uri="{BB962C8B-B14F-4D97-AF65-F5344CB8AC3E}">
-        <p14:creationId xmlns:p14="http://schemas.microsoft.com/office/powerpoint/2010/main" val="604358248"/>
+        <p14:creationId xmlns:p14="http://schemas.microsoft.com/office/powerpoint/2010/main" val="1278929377"/>
       </p:ext>
     </p:extLst>
   </p:cSld>
@@ -4346,10 +4475,10 @@
       </p:grpSpPr>
       <p:sp>
         <p:nvSpPr>
-          <p:cNvPr id="4" name="Title 3">
-            <a:extLst>
-              <a:ext uri="{FF2B5EF4-FFF2-40B4-BE49-F238E27FC236}">
-                <a16:creationId xmlns:a16="http://schemas.microsoft.com/office/drawing/2014/main" id="{0A05D06C-6013-4F53-8478-D129844FC8CC}"/>
+          <p:cNvPr id="2" name="Title 1">
+            <a:extLst>
+              <a:ext uri="{FF2B5EF4-FFF2-40B4-BE49-F238E27FC236}">
+                <a16:creationId xmlns:a16="http://schemas.microsoft.com/office/drawing/2014/main" id="{19152A8E-8BE5-4F17-8E67-410E7A73295E}"/>
               </a:ext>
             </a:extLst>
           </p:cNvPr>
@@ -4367,50 +4496,7 @@
           <a:p>
             <a:r>
               <a:rPr lang="en-US" dirty="0"/>
-              <a:t>Dashboard Parameters</a:t>
-            </a:r>
-            <a:endParaRPr lang="LID4096" dirty="0"/>
-          </a:p>
-        </p:txBody>
-      </p:sp>
-      <p:sp>
-        <p:nvSpPr>
-          <p:cNvPr id="5" name="Content Placeholder 4">
-            <a:extLst>
-              <a:ext uri="{FF2B5EF4-FFF2-40B4-BE49-F238E27FC236}">
-                <a16:creationId xmlns:a16="http://schemas.microsoft.com/office/drawing/2014/main" id="{D82C205C-D269-41A7-9079-97120B0063B3}"/>
-              </a:ext>
-            </a:extLst>
-          </p:cNvPr>
-          <p:cNvSpPr>
-            <a:spLocks noGrp="1"/>
-          </p:cNvSpPr>
-          <p:nvPr>
-            <p:ph idx="1"/>
-          </p:nvPr>
-        </p:nvSpPr>
-        <p:spPr>
-          <a:xfrm>
-            <a:off x="838200" y="1320801"/>
-            <a:ext cx="10515600" cy="965199"/>
-          </a:xfrm>
-        </p:spPr>
-        <p:txBody>
-          <a:bodyPr>
-            <a:normAutofit/>
-          </a:bodyPr>
-          <a:lstStyle/>
-          <a:p>
-            <a:r>
-              <a:rPr lang="en-US" dirty="0"/>
-              <a:t>You can add custom parameters to the dashboard. Either global </a:t>
-            </a:r>
-            <a:br>
-              <a:rPr lang="en-US" dirty="0"/>
-            </a:br>
-            <a:r>
-              <a:rPr lang="en-US" dirty="0"/>
-              <a:t>override the or replacing placeholders.</a:t>
+              <a:t>Monitoring Widgets – Database</a:t>
             </a:r>
             <a:endParaRPr lang="LID4096" dirty="0"/>
           </a:p>
@@ -4418,10 +4504,10 @@
       </p:sp>
       <p:pic>
         <p:nvPicPr>
-          <p:cNvPr id="7" name="Picture 6">
-            <a:extLst>
-              <a:ext uri="{FF2B5EF4-FFF2-40B4-BE49-F238E27FC236}">
-                <a16:creationId xmlns:a16="http://schemas.microsoft.com/office/drawing/2014/main" id="{49B0932E-A655-45F2-9269-67C936BCF00C}"/>
+          <p:cNvPr id="5" name="Picture 4">
+            <a:extLst>
+              <a:ext uri="{FF2B5EF4-FFF2-40B4-BE49-F238E27FC236}">
+                <a16:creationId xmlns:a16="http://schemas.microsoft.com/office/drawing/2014/main" id="{0EE49500-D0D3-4B5C-BAA5-D7C0852B8007}"/>
               </a:ext>
             </a:extLst>
           </p:cNvPr>
@@ -4438,38 +4524,8 @@
         </p:blipFill>
         <p:spPr>
           <a:xfrm>
-            <a:off x="838200" y="2286000"/>
-            <a:ext cx="3378266" cy="4192095"/>
-          </a:xfrm>
-          <a:prstGeom prst="rect">
-            <a:avLst/>
-          </a:prstGeom>
-        </p:spPr>
-      </p:pic>
-      <p:pic>
-        <p:nvPicPr>
-          <p:cNvPr id="9" name="Picture 8">
-            <a:extLst>
-              <a:ext uri="{FF2B5EF4-FFF2-40B4-BE49-F238E27FC236}">
-                <a16:creationId xmlns:a16="http://schemas.microsoft.com/office/drawing/2014/main" id="{F875D6FF-E763-452F-B87F-EECE80E9E15C}"/>
-              </a:ext>
-            </a:extLst>
-          </p:cNvPr>
-          <p:cNvPicPr>
-            <a:picLocks noChangeAspect="1"/>
-          </p:cNvPicPr>
-          <p:nvPr/>
-        </p:nvPicPr>
-        <p:blipFill>
-          <a:blip r:embed="rId3"/>
-          <a:stretch>
-            <a:fillRect/>
-          </a:stretch>
-        </p:blipFill>
-        <p:spPr>
-          <a:xfrm>
-            <a:off x="4536082" y="2286000"/>
-            <a:ext cx="6213197" cy="4223173"/>
+            <a:off x="955040" y="1285431"/>
+            <a:ext cx="9977120" cy="5207443"/>
           </a:xfrm>
           <a:prstGeom prst="rect">
             <a:avLst/>
@@ -4479,7 +4535,7 @@
     </p:spTree>
     <p:extLst>
       <p:ext uri="{BB962C8B-B14F-4D97-AF65-F5344CB8AC3E}">
-        <p14:creationId xmlns:p14="http://schemas.microsoft.com/office/powerpoint/2010/main" val="3799331030"/>
+        <p14:creationId xmlns:p14="http://schemas.microsoft.com/office/powerpoint/2010/main" val="604358248"/>
       </p:ext>
     </p:extLst>
   </p:cSld>
@@ -4494,7 +4550,13 @@
   <p:cSld>
     <p:spTree>
       <p:nvGrpSpPr>
-        <p:cNvPr id="1" name=""/>
+        <p:cNvPr id="1" name="">
+          <a:extLst>
+            <a:ext uri="{FF2B5EF4-FFF2-40B4-BE49-F238E27FC236}">
+              <a16:creationId xmlns:a16="http://schemas.microsoft.com/office/drawing/2014/main" id="{08E6AFD9-4126-680D-B254-FFA50C6E941F}"/>
+            </a:ext>
+          </a:extLst>
+        </p:cNvPr>
         <p:cNvGrpSpPr/>
         <p:nvPr/>
       </p:nvGrpSpPr>
@@ -4511,25 +4573,30 @@
           <p:cNvPr id="2" name="Title 1">
             <a:extLst>
               <a:ext uri="{FF2B5EF4-FFF2-40B4-BE49-F238E27FC236}">
-                <a16:creationId xmlns:a16="http://schemas.microsoft.com/office/drawing/2014/main" id="{CCE9F001-422D-41D2-B0B0-44D45D916CA6}"/>
-              </a:ext>
-            </a:extLst>
-          </p:cNvPr>
-          <p:cNvSpPr>
-            <a:spLocks noGrp="1"/>
-          </p:cNvSpPr>
-          <p:nvPr>
-            <p:ph type="title"/>
-          </p:nvPr>
-        </p:nvSpPr>
-        <p:spPr/>
-        <p:txBody>
-          <a:bodyPr/>
-          <a:lstStyle/>
-          <a:p>
-            <a:r>
-              <a:rPr lang="en-US" dirty="0"/>
-              <a:t>Example – Self Monitoring</a:t>
+                <a16:creationId xmlns:a16="http://schemas.microsoft.com/office/drawing/2014/main" id="{CDD6EF49-268D-30AA-5757-EFEE7D80D092}"/>
+              </a:ext>
+            </a:extLst>
+          </p:cNvPr>
+          <p:cNvSpPr>
+            <a:spLocks noGrp="1"/>
+          </p:cNvSpPr>
+          <p:nvPr>
+            <p:ph type="ctrTitle"/>
+          </p:nvPr>
+        </p:nvSpPr>
+        <p:spPr>
+          <a:xfrm>
+            <a:off x="1524000" y="2788915"/>
+            <a:ext cx="9144000" cy="1060677"/>
+          </a:xfrm>
+        </p:spPr>
+        <p:txBody>
+          <a:bodyPr/>
+          <a:lstStyle/>
+          <a:p>
+            <a:r>
+              <a:rPr lang="en-CH" dirty="0"/>
+              <a:t>Example Dashboards</a:t>
             </a:r>
             <a:endParaRPr lang="LID4096" dirty="0"/>
           </a:p>
@@ -4537,81 +4604,38 @@
       </p:sp>
       <p:sp>
         <p:nvSpPr>
-          <p:cNvPr id="3" name="Content Placeholder 2">
-            <a:extLst>
-              <a:ext uri="{FF2B5EF4-FFF2-40B4-BE49-F238E27FC236}">
-                <a16:creationId xmlns:a16="http://schemas.microsoft.com/office/drawing/2014/main" id="{CB15881A-5069-4285-97F3-5453BC930157}"/>
-              </a:ext>
-            </a:extLst>
-          </p:cNvPr>
-          <p:cNvSpPr>
-            <a:spLocks noGrp="1"/>
-          </p:cNvSpPr>
-          <p:nvPr>
-            <p:ph idx="1"/>
-          </p:nvPr>
-        </p:nvSpPr>
-        <p:spPr/>
-        <p:txBody>
-          <a:bodyPr>
-            <a:normAutofit fontScale="85000" lnSpcReduction="20000"/>
-          </a:bodyPr>
-          <a:lstStyle/>
-          <a:p>
-            <a:r>
-              <a:rPr lang="en-US" dirty="0"/>
-              <a:t>EMP has a Prometheus endpoint(/metrics) and we can create a dashboard to</a:t>
-            </a:r>
-          </a:p>
-          <a:p>
-            <a:r>
-              <a:rPr lang="en-US" dirty="0"/>
-              <a:t>self-monitor the application(importable template available).</a:t>
-            </a:r>
+          <p:cNvPr id="3" name="Subtitle 2">
+            <a:extLst>
+              <a:ext uri="{FF2B5EF4-FFF2-40B4-BE49-F238E27FC236}">
+                <a16:creationId xmlns:a16="http://schemas.microsoft.com/office/drawing/2014/main" id="{3E814948-6AA7-7901-AFEB-9784C03AE3AD}"/>
+              </a:ext>
+            </a:extLst>
+          </p:cNvPr>
+          <p:cNvSpPr>
+            <a:spLocks noGrp="1"/>
+          </p:cNvSpPr>
+          <p:nvPr>
+            <p:ph type="subTitle" idx="1"/>
+          </p:nvPr>
+        </p:nvSpPr>
+        <p:spPr>
+          <a:xfrm>
+            <a:off x="1524000" y="3941668"/>
+            <a:ext cx="9144000" cy="819739"/>
+          </a:xfrm>
+        </p:spPr>
+        <p:txBody>
+          <a:bodyPr/>
+          <a:lstStyle/>
+          <a:p>
             <a:endParaRPr lang="LID4096" dirty="0"/>
           </a:p>
         </p:txBody>
       </p:sp>
-      <p:pic>
-        <p:nvPicPr>
-          <p:cNvPr id="7" name="Picture 6">
-            <a:extLst>
-              <a:ext uri="{FF2B5EF4-FFF2-40B4-BE49-F238E27FC236}">
-                <a16:creationId xmlns:a16="http://schemas.microsoft.com/office/drawing/2014/main" id="{1E253B14-859A-4A12-B362-332BDE13F21B}"/>
-              </a:ext>
-            </a:extLst>
-          </p:cNvPr>
-          <p:cNvPicPr>
-            <a:picLocks noChangeAspect="1"/>
-          </p:cNvPicPr>
-          <p:nvPr/>
-        </p:nvPicPr>
-        <p:blipFill>
-          <a:blip r:embed="rId2">
-            <a:extLst>
-              <a:ext uri="{28A0092B-C50C-407E-A947-70E740481C1C}">
-                <a14:useLocalDpi xmlns:a14="http://schemas.microsoft.com/office/drawing/2010/main" val="0"/>
-              </a:ext>
-            </a:extLst>
-          </a:blip>
-          <a:stretch>
-            <a:fillRect/>
-          </a:stretch>
-        </p:blipFill>
-        <p:spPr>
-          <a:xfrm>
-            <a:off x="1910080" y="2223284"/>
-            <a:ext cx="8056880" cy="4327872"/>
-          </a:xfrm>
-          <a:prstGeom prst="rect">
-            <a:avLst/>
-          </a:prstGeom>
-        </p:spPr>
-      </p:pic>
     </p:spTree>
     <p:extLst>
       <p:ext uri="{BB962C8B-B14F-4D97-AF65-F5344CB8AC3E}">
-        <p14:creationId xmlns:p14="http://schemas.microsoft.com/office/powerpoint/2010/main" val="1094116404"/>
+        <p14:creationId xmlns:p14="http://schemas.microsoft.com/office/powerpoint/2010/main" val="2036255545"/>
       </p:ext>
     </p:extLst>
   </p:cSld>
@@ -4661,7 +4685,7 @@
           <a:p>
             <a:r>
               <a:rPr lang="en-US" dirty="0"/>
-              <a:t>Example – Query MySQL</a:t>
+              <a:t>Example – Self Monitoring</a:t>
             </a:r>
             <a:endParaRPr lang="LID4096" dirty="0"/>
           </a:p>
@@ -4686,13 +4710,19 @@
         <p:spPr/>
         <p:txBody>
           <a:bodyPr>
-            <a:normAutofit fontScale="92500" lnSpcReduction="10000"/>
+            <a:normAutofit fontScale="85000" lnSpcReduction="20000"/>
           </a:bodyPr>
           <a:lstStyle/>
           <a:p>
             <a:r>
               <a:rPr lang="en-US" dirty="0"/>
-              <a:t>Query Records from a Database with a simple query. Check if the value of a specific column reaches a defined threshold and set the color appropriately:</a:t>
+              <a:t>EMP has a Prometheus endpoint(/metrics) and we can create a dashboard to</a:t>
+            </a:r>
+          </a:p>
+          <a:p>
+            <a:r>
+              <a:rPr lang="en-US" dirty="0"/>
+              <a:t>self-monitor the application(importable template available).</a:t>
             </a:r>
             <a:endParaRPr lang="LID4096" dirty="0"/>
           </a:p>
@@ -4700,10 +4730,10 @@
       </p:sp>
       <p:pic>
         <p:nvPicPr>
-          <p:cNvPr id="5" name="Picture 4">
-            <a:extLst>
-              <a:ext uri="{FF2B5EF4-FFF2-40B4-BE49-F238E27FC236}">
-                <a16:creationId xmlns:a16="http://schemas.microsoft.com/office/drawing/2014/main" id="{2340FC03-CF5D-4247-998C-49AA412A5808}"/>
+          <p:cNvPr id="7" name="Picture 6">
+            <a:extLst>
+              <a:ext uri="{FF2B5EF4-FFF2-40B4-BE49-F238E27FC236}">
+                <a16:creationId xmlns:a16="http://schemas.microsoft.com/office/drawing/2014/main" id="{1E253B14-859A-4A12-B362-332BDE13F21B}"/>
               </a:ext>
             </a:extLst>
           </p:cNvPr>
@@ -4713,15 +4743,21 @@
           <p:nvPr/>
         </p:nvPicPr>
         <p:blipFill>
-          <a:blip r:embed="rId2"/>
+          <a:blip r:embed="rId2">
+            <a:extLst>
+              <a:ext uri="{28A0092B-C50C-407E-A947-70E740481C1C}">
+                <a14:useLocalDpi xmlns:a14="http://schemas.microsoft.com/office/drawing/2010/main" val="0"/>
+              </a:ext>
+            </a:extLst>
+          </a:blip>
           <a:stretch>
             <a:fillRect/>
           </a:stretch>
         </p:blipFill>
         <p:spPr>
           <a:xfrm>
-            <a:off x="1922780" y="2276477"/>
-            <a:ext cx="8346440" cy="3947335"/>
+            <a:off x="1910080" y="2223284"/>
+            <a:ext cx="8056880" cy="4327872"/>
           </a:xfrm>
           <a:prstGeom prst="rect">
             <a:avLst/>
@@ -4731,7 +4767,7 @@
     </p:spTree>
     <p:extLst>
       <p:ext uri="{BB962C8B-B14F-4D97-AF65-F5344CB8AC3E}">
-        <p14:creationId xmlns:p14="http://schemas.microsoft.com/office/powerpoint/2010/main" val="1664385213"/>
+        <p14:creationId xmlns:p14="http://schemas.microsoft.com/office/powerpoint/2010/main" val="1094116404"/>
       </p:ext>
     </p:extLst>
   </p:cSld>
@@ -4805,12 +4841,14 @@
         </p:nvSpPr>
         <p:spPr>
           <a:xfrm>
-            <a:off x="838200" y="1825625"/>
-            <a:ext cx="10515600" cy="3994262"/>
-          </a:xfrm>
-        </p:spPr>
-        <p:txBody>
-          <a:bodyPr/>
+            <a:off x="838200" y="1561011"/>
+            <a:ext cx="10515600" cy="4258876"/>
+          </a:xfrm>
+        </p:spPr>
+        <p:txBody>
+          <a:bodyPr>
+            <a:normAutofit lnSpcReduction="10000"/>
+          </a:bodyPr>
           <a:lstStyle/>
           <a:p>
             <a:pPr marL="0" indent="0">
@@ -4841,6 +4879,14 @@
               <a:rPr lang="en-US" dirty="0"/>
               <a:t>Dashboarding of time based information (charts)</a:t>
             </a:r>
+            <a:endParaRPr lang="en-CH" dirty="0"/>
+          </a:p>
+          <a:p>
+            <a:r>
+              <a:rPr lang="en-CH" dirty="0"/>
+              <a:t>Dashboarding of Business Analytics related data</a:t>
+            </a:r>
+            <a:endParaRPr lang="en-US" dirty="0"/>
           </a:p>
           <a:p>
             <a:r>
@@ -4903,10 +4949,10 @@
       </p:grpSpPr>
       <p:sp>
         <p:nvSpPr>
-          <p:cNvPr id="4" name="Title 3">
-            <a:extLst>
-              <a:ext uri="{FF2B5EF4-FFF2-40B4-BE49-F238E27FC236}">
-                <a16:creationId xmlns:a16="http://schemas.microsoft.com/office/drawing/2014/main" id="{0A05D06C-6013-4F53-8478-D129844FC8CC}"/>
+          <p:cNvPr id="2" name="Title 1">
+            <a:extLst>
+              <a:ext uri="{FF2B5EF4-FFF2-40B4-BE49-F238E27FC236}">
+                <a16:creationId xmlns:a16="http://schemas.microsoft.com/office/drawing/2014/main" id="{CCE9F001-422D-41D2-B0B0-44D45D916CA6}"/>
               </a:ext>
             </a:extLst>
           </p:cNvPr>
@@ -4924,7 +4970,7 @@
           <a:p>
             <a:r>
               <a:rPr lang="en-US" dirty="0"/>
-              <a:t>Dashboard Parameters Widget</a:t>
+              <a:t>Example – Query MySQL</a:t>
             </a:r>
             <a:endParaRPr lang="LID4096" dirty="0"/>
           </a:p>
@@ -4932,10 +4978,10 @@
       </p:sp>
       <p:sp>
         <p:nvSpPr>
-          <p:cNvPr id="5" name="Content Placeholder 4">
-            <a:extLst>
-              <a:ext uri="{FF2B5EF4-FFF2-40B4-BE49-F238E27FC236}">
-                <a16:creationId xmlns:a16="http://schemas.microsoft.com/office/drawing/2014/main" id="{D82C205C-D269-41A7-9079-97120B0063B3}"/>
+          <p:cNvPr id="3" name="Content Placeholder 2">
+            <a:extLst>
+              <a:ext uri="{FF2B5EF4-FFF2-40B4-BE49-F238E27FC236}">
+                <a16:creationId xmlns:a16="http://schemas.microsoft.com/office/drawing/2014/main" id="{CB15881A-5069-4285-97F3-5453BC930157}"/>
               </a:ext>
             </a:extLst>
           </p:cNvPr>
@@ -4946,21 +4992,16 @@
             <p:ph idx="1"/>
           </p:nvPr>
         </p:nvSpPr>
-        <p:spPr>
-          <a:xfrm>
-            <a:off x="838200" y="1320801"/>
-            <a:ext cx="10515600" cy="965199"/>
-          </a:xfrm>
-        </p:spPr>
+        <p:spPr/>
         <p:txBody>
           <a:bodyPr>
-            <a:normAutofit/>
+            <a:normAutofit fontScale="92500" lnSpcReduction="10000"/>
           </a:bodyPr>
           <a:lstStyle/>
           <a:p>
             <a:r>
               <a:rPr lang="en-US" dirty="0"/>
-              <a:t>Allow a user to adjust the defined parameters with one or multiple parameters widgets.</a:t>
+              <a:t>Query Records from a Database with a simple query. Check if the value of a specific column reaches a defined threshold and set the color appropriately:</a:t>
             </a:r>
             <a:endParaRPr lang="LID4096" dirty="0"/>
           </a:p>
@@ -4968,10 +5009,10 @@
       </p:sp>
       <p:pic>
         <p:nvPicPr>
-          <p:cNvPr id="6" name="Picture 5">
-            <a:extLst>
-              <a:ext uri="{FF2B5EF4-FFF2-40B4-BE49-F238E27FC236}">
-                <a16:creationId xmlns:a16="http://schemas.microsoft.com/office/drawing/2014/main" id="{DC953E39-A1E1-4120-BA45-2C7E790EE460}"/>
+          <p:cNvPr id="5" name="Picture 4">
+            <a:extLst>
+              <a:ext uri="{FF2B5EF4-FFF2-40B4-BE49-F238E27FC236}">
+                <a16:creationId xmlns:a16="http://schemas.microsoft.com/office/drawing/2014/main" id="{2340FC03-CF5D-4247-998C-49AA412A5808}"/>
               </a:ext>
             </a:extLst>
           </p:cNvPr>
@@ -4988,8 +5029,8 @@
         </p:blipFill>
         <p:spPr>
           <a:xfrm>
-            <a:off x="2025650" y="2234097"/>
-            <a:ext cx="8017294" cy="4466255"/>
+            <a:off x="1922780" y="2276477"/>
+            <a:ext cx="8346440" cy="3947335"/>
           </a:xfrm>
           <a:prstGeom prst="rect">
             <a:avLst/>
@@ -4999,7 +5040,7 @@
     </p:spTree>
     <p:extLst>
       <p:ext uri="{BB962C8B-B14F-4D97-AF65-F5344CB8AC3E}">
-        <p14:creationId xmlns:p14="http://schemas.microsoft.com/office/powerpoint/2010/main" val="181223501"/>
+        <p14:creationId xmlns:p14="http://schemas.microsoft.com/office/powerpoint/2010/main" val="1664385213"/>
       </p:ext>
     </p:extLst>
   </p:cSld>
@@ -5028,10 +5069,10 @@
       </p:grpSpPr>
       <p:sp>
         <p:nvSpPr>
-          <p:cNvPr id="2" name="Title 1">
-            <a:extLst>
-              <a:ext uri="{FF2B5EF4-FFF2-40B4-BE49-F238E27FC236}">
-                <a16:creationId xmlns:a16="http://schemas.microsoft.com/office/drawing/2014/main" id="{CCE9F001-422D-41D2-B0B0-44D45D916CA6}"/>
+          <p:cNvPr id="4" name="Title 3">
+            <a:extLst>
+              <a:ext uri="{FF2B5EF4-FFF2-40B4-BE49-F238E27FC236}">
+                <a16:creationId xmlns:a16="http://schemas.microsoft.com/office/drawing/2014/main" id="{0A05D06C-6013-4F53-8478-D129844FC8CC}"/>
               </a:ext>
             </a:extLst>
           </p:cNvPr>
@@ -5049,7 +5090,7 @@
           <a:p>
             <a:r>
               <a:rPr lang="en-US" dirty="0"/>
-              <a:t>Example – Dynatrace Host Analysis</a:t>
+              <a:t>Dashboard Parameters Widget</a:t>
             </a:r>
             <a:endParaRPr lang="LID4096" dirty="0"/>
           </a:p>
@@ -5057,10 +5098,10 @@
       </p:sp>
       <p:sp>
         <p:nvSpPr>
-          <p:cNvPr id="3" name="Content Placeholder 2">
-            <a:extLst>
-              <a:ext uri="{FF2B5EF4-FFF2-40B4-BE49-F238E27FC236}">
-                <a16:creationId xmlns:a16="http://schemas.microsoft.com/office/drawing/2014/main" id="{CB15881A-5069-4285-97F3-5453BC930157}"/>
+          <p:cNvPr id="5" name="Content Placeholder 4">
+            <a:extLst>
+              <a:ext uri="{FF2B5EF4-FFF2-40B4-BE49-F238E27FC236}">
+                <a16:creationId xmlns:a16="http://schemas.microsoft.com/office/drawing/2014/main" id="{D82C205C-D269-41A7-9079-97120B0063B3}"/>
               </a:ext>
             </a:extLst>
           </p:cNvPr>
@@ -5071,22 +5112,21 @@
             <p:ph idx="1"/>
           </p:nvPr>
         </p:nvSpPr>
-        <p:spPr/>
+        <p:spPr>
+          <a:xfrm>
+            <a:off x="838200" y="1320801"/>
+            <a:ext cx="10515600" cy="965199"/>
+          </a:xfrm>
+        </p:spPr>
         <p:txBody>
           <a:bodyPr>
-            <a:normAutofit fontScale="85000" lnSpcReduction="20000"/>
+            <a:normAutofit/>
           </a:bodyPr>
           <a:lstStyle/>
           <a:p>
             <a:r>
               <a:rPr lang="en-US" dirty="0"/>
-              <a:t>Parameterized dashboard to analyze host metrics from Dynatrace.</a:t>
-            </a:r>
-          </a:p>
-          <a:p>
-            <a:r>
-              <a:rPr lang="en-US" dirty="0"/>
-              <a:t>This is included as a template that can be imported:</a:t>
+              <a:t>Allow a user to adjust the defined parameters with one or multiple parameters widgets.</a:t>
             </a:r>
             <a:endParaRPr lang="LID4096" dirty="0"/>
           </a:p>
@@ -5097,7 +5137,7 @@
           <p:cNvPr id="6" name="Picture 5">
             <a:extLst>
               <a:ext uri="{FF2B5EF4-FFF2-40B4-BE49-F238E27FC236}">
-                <a16:creationId xmlns:a16="http://schemas.microsoft.com/office/drawing/2014/main" id="{561C0D25-8CF3-4C36-B0D6-6C3465A877FF}"/>
+                <a16:creationId xmlns:a16="http://schemas.microsoft.com/office/drawing/2014/main" id="{DC953E39-A1E1-4120-BA45-2C7E790EE460}"/>
               </a:ext>
             </a:extLst>
           </p:cNvPr>
@@ -5107,21 +5147,15 @@
           <p:nvPr/>
         </p:nvPicPr>
         <p:blipFill>
-          <a:blip r:embed="rId2">
-            <a:extLst>
-              <a:ext uri="{28A0092B-C50C-407E-A947-70E740481C1C}">
-                <a14:useLocalDpi xmlns:a14="http://schemas.microsoft.com/office/drawing/2010/main" val="0"/>
-              </a:ext>
-            </a:extLst>
-          </a:blip>
+          <a:blip r:embed="rId2"/>
           <a:stretch>
             <a:fillRect/>
           </a:stretch>
         </p:blipFill>
         <p:spPr>
           <a:xfrm>
-            <a:off x="1928282" y="2249096"/>
-            <a:ext cx="7916758" cy="4243779"/>
+            <a:off x="2025650" y="2234097"/>
+            <a:ext cx="8017294" cy="4466255"/>
           </a:xfrm>
           <a:prstGeom prst="rect">
             <a:avLst/>
@@ -5131,7 +5165,7 @@
     </p:spTree>
     <p:extLst>
       <p:ext uri="{BB962C8B-B14F-4D97-AF65-F5344CB8AC3E}">
-        <p14:creationId xmlns:p14="http://schemas.microsoft.com/office/powerpoint/2010/main" val="3498365790"/>
+        <p14:creationId xmlns:p14="http://schemas.microsoft.com/office/powerpoint/2010/main" val="181223501"/>
       </p:ext>
     </p:extLst>
   </p:cSld>
@@ -5163,7 +5197,7 @@
           <p:cNvPr id="2" name="Title 1">
             <a:extLst>
               <a:ext uri="{FF2B5EF4-FFF2-40B4-BE49-F238E27FC236}">
-                <a16:creationId xmlns:a16="http://schemas.microsoft.com/office/drawing/2014/main" id="{A7586D44-EECA-4316-AFD9-18218DD93FC5}"/>
+                <a16:creationId xmlns:a16="http://schemas.microsoft.com/office/drawing/2014/main" id="{CCE9F001-422D-41D2-B0B0-44D45D916CA6}"/>
               </a:ext>
             </a:extLst>
           </p:cNvPr>
@@ -5181,9 +5215,9 @@
           <a:p>
             <a:r>
               <a:rPr lang="en-US" dirty="0"/>
-              <a:t>Query Feature</a:t>
-            </a:r>
-            <a:endParaRPr lang="en-CH" dirty="0"/>
+              <a:t>Example – Dynatrace Host Analysis</a:t>
+            </a:r>
+            <a:endParaRPr lang="LID4096" dirty="0"/>
           </a:p>
         </p:txBody>
       </p:sp>
@@ -5192,7 +5226,7 @@
           <p:cNvPr id="3" name="Content Placeholder 2">
             <a:extLst>
               <a:ext uri="{FF2B5EF4-FFF2-40B4-BE49-F238E27FC236}">
-                <a16:creationId xmlns:a16="http://schemas.microsoft.com/office/drawing/2014/main" id="{274B9576-886E-4FFB-A78F-8B87E0DBB4C2}"/>
+                <a16:creationId xmlns:a16="http://schemas.microsoft.com/office/drawing/2014/main" id="{CB15881A-5069-4285-97F3-5453BC930157}"/>
               </a:ext>
             </a:extLst>
           </p:cNvPr>
@@ -5203,120 +5237,67 @@
             <p:ph idx="1"/>
           </p:nvPr>
         </p:nvSpPr>
-        <p:spPr>
-          <a:xfrm>
-            <a:off x="838200" y="1320801"/>
-            <a:ext cx="10515600" cy="4914899"/>
-          </a:xfrm>
-        </p:spPr>
+        <p:spPr/>
         <p:txBody>
           <a:bodyPr>
-            <a:normAutofit fontScale="92500" lnSpcReduction="20000"/>
+            <a:normAutofit fontScale="85000" lnSpcReduction="20000"/>
           </a:bodyPr>
           <a:lstStyle/>
           <a:p>
             <a:r>
               <a:rPr lang="en-US" dirty="0"/>
-              <a:t>The query feature gives you more flexibility on how you want to fetch and display the data in EMP. You can either use it to fetch data on the fly or display data on a dashboard. Features:</a:t>
-            </a:r>
-          </a:p>
-          <a:p>
-            <a:pPr marL="457200" indent="-457200">
-              <a:buFont typeface="Arial" panose="020B0604020202020204" pitchFamily="34" charset="0"/>
-              <a:buChar char="•"/>
-            </a:pPr>
-            <a:r>
-              <a:rPr lang="en-US" dirty="0"/>
-              <a:t>Various out of the box database sources (MySQL, MSSQL Oracle, any JDBC…)</a:t>
-            </a:r>
-          </a:p>
-          <a:p>
-            <a:pPr marL="457200" indent="-457200">
-              <a:buFont typeface="Arial" panose="020B0604020202020204" pitchFamily="34" charset="0"/>
-              <a:buChar char="•"/>
-            </a:pPr>
-            <a:r>
-              <a:rPr lang="en-US" dirty="0"/>
-              <a:t>Prometheus Source</a:t>
-            </a:r>
-          </a:p>
-          <a:p>
-            <a:pPr marL="457200" indent="-457200">
-              <a:buFont typeface="Arial" panose="020B0604020202020204" pitchFamily="34" charset="0"/>
-              <a:buChar char="•"/>
-            </a:pPr>
-            <a:r>
-              <a:rPr lang="en-US" dirty="0"/>
-              <a:t>Commands for filtering based on field values</a:t>
-            </a:r>
-          </a:p>
-          <a:p>
-            <a:pPr marL="457200" indent="-457200">
-              <a:buFont typeface="Arial" panose="020B0604020202020204" pitchFamily="34" charset="0"/>
-              <a:buChar char="•"/>
-            </a:pPr>
-            <a:r>
-              <a:rPr lang="en-US" dirty="0"/>
-              <a:t>Sorting of the data based on one or multiple field</a:t>
-            </a:r>
-          </a:p>
-          <a:p>
-            <a:pPr marL="457200" indent="-457200">
-              <a:buFont typeface="Arial" panose="020B0604020202020204" pitchFamily="34" charset="0"/>
-              <a:buChar char="•"/>
-            </a:pPr>
-            <a:r>
-              <a:rPr lang="en-US" dirty="0"/>
-              <a:t>Merging of data from multiple sources into one dataset</a:t>
-            </a:r>
-          </a:p>
-          <a:p>
-            <a:pPr marL="457200" indent="-457200">
-              <a:buFont typeface="Arial" panose="020B0604020202020204" pitchFamily="34" charset="0"/>
-              <a:buChar char="•"/>
-            </a:pPr>
-            <a:r>
-              <a:rPr lang="en-US" dirty="0"/>
-              <a:t>Deduplication by field values and keeping top &lt;n&gt; or last &lt;n&gt; records</a:t>
-            </a:r>
-          </a:p>
-          <a:p>
-            <a:pPr marL="457200" indent="-457200">
-              <a:buFont typeface="Arial" panose="020B0604020202020204" pitchFamily="34" charset="0"/>
-              <a:buChar char="•"/>
-            </a:pPr>
-            <a:r>
-              <a:rPr lang="en-US" dirty="0"/>
-              <a:t>Formatting of fields or records based on field values </a:t>
-            </a:r>
-          </a:p>
-          <a:p>
-            <a:pPr marL="457200" indent="-457200">
-              <a:buFont typeface="Arial" panose="020B0604020202020204" pitchFamily="34" charset="0"/>
-              <a:buChar char="•"/>
-            </a:pPr>
-            <a:r>
-              <a:rPr lang="en-US" dirty="0"/>
-              <a:t>Integrate the queries into dashboards using the Query Widget</a:t>
-            </a:r>
-          </a:p>
-          <a:p>
-            <a:pPr marL="457200" indent="-457200">
-              <a:buFont typeface="Arial" panose="020B0604020202020204" pitchFamily="34" charset="0"/>
-              <a:buChar char="•"/>
-            </a:pPr>
-            <a:r>
-              <a:rPr lang="en-US" dirty="0"/>
-              <a:t>Mass display of traffic lights</a:t>
-            </a:r>
-            <a:endParaRPr lang="en-CH" dirty="0"/>
-          </a:p>
-        </p:txBody>
-      </p:sp>
+              <a:t>Parameterized dashboard to analyze host metrics from Dynatrace.</a:t>
+            </a:r>
+          </a:p>
+          <a:p>
+            <a:r>
+              <a:rPr lang="en-US" dirty="0"/>
+              <a:t>This is included as a template that can be imported:</a:t>
+            </a:r>
+            <a:endParaRPr lang="LID4096" dirty="0"/>
+          </a:p>
+        </p:txBody>
+      </p:sp>
+      <p:pic>
+        <p:nvPicPr>
+          <p:cNvPr id="6" name="Picture 5">
+            <a:extLst>
+              <a:ext uri="{FF2B5EF4-FFF2-40B4-BE49-F238E27FC236}">
+                <a16:creationId xmlns:a16="http://schemas.microsoft.com/office/drawing/2014/main" id="{561C0D25-8CF3-4C36-B0D6-6C3465A877FF}"/>
+              </a:ext>
+            </a:extLst>
+          </p:cNvPr>
+          <p:cNvPicPr>
+            <a:picLocks noChangeAspect="1"/>
+          </p:cNvPicPr>
+          <p:nvPr/>
+        </p:nvPicPr>
+        <p:blipFill>
+          <a:blip r:embed="rId2">
+            <a:extLst>
+              <a:ext uri="{28A0092B-C50C-407E-A947-70E740481C1C}">
+                <a14:useLocalDpi xmlns:a14="http://schemas.microsoft.com/office/drawing/2010/main" val="0"/>
+              </a:ext>
+            </a:extLst>
+          </a:blip>
+          <a:stretch>
+            <a:fillRect/>
+          </a:stretch>
+        </p:blipFill>
+        <p:spPr>
+          <a:xfrm>
+            <a:off x="1928282" y="2249096"/>
+            <a:ext cx="7916758" cy="4243779"/>
+          </a:xfrm>
+          <a:prstGeom prst="rect">
+            <a:avLst/>
+          </a:prstGeom>
+        </p:spPr>
+      </p:pic>
     </p:spTree>
     <p:extLst>
       <p:ext uri="{BB962C8B-B14F-4D97-AF65-F5344CB8AC3E}">
-        <p14:creationId xmlns:p14="http://schemas.microsoft.com/office/powerpoint/2010/main" val="99721151"/>
+        <p14:creationId xmlns:p14="http://schemas.microsoft.com/office/powerpoint/2010/main" val="3498365790"/>
       </p:ext>
     </p:extLst>
   </p:cSld>
@@ -5331,7 +5312,13 @@
   <p:cSld>
     <p:spTree>
       <p:nvGrpSpPr>
-        <p:cNvPr id="1" name=""/>
+        <p:cNvPr id="1" name="">
+          <a:extLst>
+            <a:ext uri="{FF2B5EF4-FFF2-40B4-BE49-F238E27FC236}">
+              <a16:creationId xmlns:a16="http://schemas.microsoft.com/office/drawing/2014/main" id="{17A95CCE-9676-4E37-3CD9-7EA94A3B9BA5}"/>
+            </a:ext>
+          </a:extLst>
+        </p:cNvPr>
         <p:cNvGrpSpPr/>
         <p:nvPr/>
       </p:nvGrpSpPr>
@@ -5348,93 +5335,69 @@
           <p:cNvPr id="2" name="Title 1">
             <a:extLst>
               <a:ext uri="{FF2B5EF4-FFF2-40B4-BE49-F238E27FC236}">
-                <a16:creationId xmlns:a16="http://schemas.microsoft.com/office/drawing/2014/main" id="{640606EA-B052-4986-9E62-6ACA495288FE}"/>
-              </a:ext>
-            </a:extLst>
-          </p:cNvPr>
-          <p:cNvSpPr>
-            <a:spLocks noGrp="1"/>
-          </p:cNvSpPr>
-          <p:nvPr>
-            <p:ph type="title"/>
-          </p:nvPr>
-        </p:nvSpPr>
-        <p:spPr/>
-        <p:txBody>
-          <a:bodyPr/>
-          <a:lstStyle/>
-          <a:p>
-            <a:r>
-              <a:rPr lang="en-US" dirty="0"/>
-              <a:t>Example – Fetch Data From Database</a:t>
-            </a:r>
-            <a:endParaRPr lang="en-CH" dirty="0"/>
-          </a:p>
-        </p:txBody>
-      </p:sp>
-      <p:sp>
-        <p:nvSpPr>
-          <p:cNvPr id="3" name="Content Placeholder 2">
-            <a:extLst>
-              <a:ext uri="{FF2B5EF4-FFF2-40B4-BE49-F238E27FC236}">
-                <a16:creationId xmlns:a16="http://schemas.microsoft.com/office/drawing/2014/main" id="{BF0741C9-90F7-49E1-9999-3F216DB04D68}"/>
-              </a:ext>
-            </a:extLst>
-          </p:cNvPr>
-          <p:cNvSpPr>
-            <a:spLocks noGrp="1"/>
-          </p:cNvSpPr>
-          <p:nvPr>
-            <p:ph idx="1"/>
-          </p:nvPr>
-        </p:nvSpPr>
-        <p:spPr/>
-        <p:txBody>
-          <a:bodyPr/>
-          <a:lstStyle/>
-          <a:p>
-            <a:r>
-              <a:rPr lang="en-US" dirty="0"/>
-              <a:t>Fetches data from a database and displays the data as table.</a:t>
-            </a:r>
-            <a:endParaRPr lang="en-CH" dirty="0"/>
-          </a:p>
-        </p:txBody>
-      </p:sp>
-      <p:pic>
-        <p:nvPicPr>
-          <p:cNvPr id="9" name="Picture 8">
-            <a:extLst>
-              <a:ext uri="{FF2B5EF4-FFF2-40B4-BE49-F238E27FC236}">
-                <a16:creationId xmlns:a16="http://schemas.microsoft.com/office/drawing/2014/main" id="{EC1EA80E-36ED-462E-AF59-5356E89542BF}"/>
-              </a:ext>
-            </a:extLst>
-          </p:cNvPr>
-          <p:cNvPicPr>
-            <a:picLocks noChangeAspect="1"/>
-          </p:cNvPicPr>
-          <p:nvPr/>
-        </p:nvPicPr>
-        <p:blipFill>
-          <a:blip r:embed="rId2"/>
-          <a:stretch>
-            <a:fillRect/>
-          </a:stretch>
-        </p:blipFill>
-        <p:spPr>
-          <a:xfrm>
-            <a:off x="1437524" y="2194986"/>
-            <a:ext cx="9147926" cy="4663014"/>
-          </a:xfrm>
-          <a:prstGeom prst="rect">
-            <a:avLst/>
-          </a:prstGeom>
-        </p:spPr>
-      </p:pic>
+                <a16:creationId xmlns:a16="http://schemas.microsoft.com/office/drawing/2014/main" id="{7730E1A0-803C-08D3-DBEE-1F00D68A7D2C}"/>
+              </a:ext>
+            </a:extLst>
+          </p:cNvPr>
+          <p:cNvSpPr>
+            <a:spLocks noGrp="1"/>
+          </p:cNvSpPr>
+          <p:nvPr>
+            <p:ph type="ctrTitle"/>
+          </p:nvPr>
+        </p:nvSpPr>
+        <p:spPr>
+          <a:xfrm>
+            <a:off x="1524000" y="2788915"/>
+            <a:ext cx="9144000" cy="1060677"/>
+          </a:xfrm>
+        </p:spPr>
+        <p:txBody>
+          <a:bodyPr/>
+          <a:lstStyle/>
+          <a:p>
+            <a:r>
+              <a:rPr lang="en-CH" dirty="0"/>
+              <a:t>EMP Query Feature</a:t>
+            </a:r>
+            <a:endParaRPr lang="LID4096" dirty="0"/>
+          </a:p>
+        </p:txBody>
+      </p:sp>
+      <p:sp>
+        <p:nvSpPr>
+          <p:cNvPr id="3" name="Subtitle 2">
+            <a:extLst>
+              <a:ext uri="{FF2B5EF4-FFF2-40B4-BE49-F238E27FC236}">
+                <a16:creationId xmlns:a16="http://schemas.microsoft.com/office/drawing/2014/main" id="{0B5565F4-E7B5-3AC2-226D-113C46F866EA}"/>
+              </a:ext>
+            </a:extLst>
+          </p:cNvPr>
+          <p:cNvSpPr>
+            <a:spLocks noGrp="1"/>
+          </p:cNvSpPr>
+          <p:nvPr>
+            <p:ph type="subTitle" idx="1"/>
+          </p:nvPr>
+        </p:nvSpPr>
+        <p:spPr>
+          <a:xfrm>
+            <a:off x="1524000" y="3941668"/>
+            <a:ext cx="9144000" cy="819739"/>
+          </a:xfrm>
+        </p:spPr>
+        <p:txBody>
+          <a:bodyPr/>
+          <a:lstStyle/>
+          <a:p>
+            <a:endParaRPr lang="LID4096" dirty="0"/>
+          </a:p>
+        </p:txBody>
+      </p:sp>
     </p:spTree>
     <p:extLst>
       <p:ext uri="{BB962C8B-B14F-4D97-AF65-F5344CB8AC3E}">
-        <p14:creationId xmlns:p14="http://schemas.microsoft.com/office/powerpoint/2010/main" val="3073090357"/>
+        <p14:creationId xmlns:p14="http://schemas.microsoft.com/office/powerpoint/2010/main" val="3526431989"/>
       </p:ext>
     </p:extLst>
   </p:cSld>
@@ -5466,7 +5429,7 @@
           <p:cNvPr id="2" name="Title 1">
             <a:extLst>
               <a:ext uri="{FF2B5EF4-FFF2-40B4-BE49-F238E27FC236}">
-                <a16:creationId xmlns:a16="http://schemas.microsoft.com/office/drawing/2014/main" id="{B53864B2-4AB9-49D8-8013-C3F6ADB9C1C1}"/>
+                <a16:creationId xmlns:a16="http://schemas.microsoft.com/office/drawing/2014/main" id="{A7586D44-EECA-4316-AFD9-18218DD93FC5}"/>
               </a:ext>
             </a:extLst>
           </p:cNvPr>
@@ -5477,135 +5440,149 @@
             <p:ph type="title"/>
           </p:nvPr>
         </p:nvSpPr>
-        <p:spPr>
-          <a:xfrm>
-            <a:off x="838200" y="365125"/>
-            <a:ext cx="7885566" cy="752475"/>
+        <p:spPr/>
+        <p:txBody>
+          <a:bodyPr/>
+          <a:lstStyle/>
+          <a:p>
+            <a:r>
+              <a:rPr lang="en-US" dirty="0"/>
+              <a:t>Query Feature</a:t>
+            </a:r>
+            <a:endParaRPr lang="en-CH" dirty="0"/>
+          </a:p>
+        </p:txBody>
+      </p:sp>
+      <p:sp>
+        <p:nvSpPr>
+          <p:cNvPr id="3" name="Content Placeholder 2">
+            <a:extLst>
+              <a:ext uri="{FF2B5EF4-FFF2-40B4-BE49-F238E27FC236}">
+                <a16:creationId xmlns:a16="http://schemas.microsoft.com/office/drawing/2014/main" id="{274B9576-886E-4FFB-A78F-8B87E0DBB4C2}"/>
+              </a:ext>
+            </a:extLst>
+          </p:cNvPr>
+          <p:cNvSpPr>
+            <a:spLocks noGrp="1"/>
+          </p:cNvSpPr>
+          <p:nvPr>
+            <p:ph idx="1"/>
+          </p:nvPr>
+        </p:nvSpPr>
+        <p:spPr>
+          <a:xfrm>
+            <a:off x="838200" y="1320801"/>
+            <a:ext cx="10515600" cy="4914899"/>
           </a:xfrm>
         </p:spPr>
         <p:txBody>
           <a:bodyPr>
-            <a:normAutofit fontScale="90000"/>
+            <a:normAutofit fontScale="92500" lnSpcReduction="20000"/>
           </a:bodyPr>
           <a:lstStyle/>
           <a:p>
-            <a:pPr algn="l"/>
-            <a:r>
-              <a:rPr lang="en-US" dirty="0"/>
-              <a:t>Example – Fetch from Prometheus</a:t>
+            <a:r>
+              <a:rPr lang="en-US" dirty="0"/>
+              <a:t>The query feature gives you more flexibility on how you want to fetch and display the data in EMP. You can either use it to fetch data on the fly or display data on a dashboard. Features:</a:t>
+            </a:r>
+          </a:p>
+          <a:p>
+            <a:pPr marL="457200" indent="-457200">
+              <a:buFont typeface="Arial" panose="020B0604020202020204" pitchFamily="34" charset="0"/>
+              <a:buChar char="•"/>
+            </a:pPr>
+            <a:r>
+              <a:rPr lang="en-US" dirty="0"/>
+              <a:t>Various out of the box database sources (MySQL, MSSQL Oracle, any JDBC…)</a:t>
+            </a:r>
+          </a:p>
+          <a:p>
+            <a:pPr marL="457200" indent="-457200">
+              <a:buFont typeface="Arial" panose="020B0604020202020204" pitchFamily="34" charset="0"/>
+              <a:buChar char="•"/>
+            </a:pPr>
+            <a:r>
+              <a:rPr lang="en-US" dirty="0"/>
+              <a:t>Prometheus Source</a:t>
+            </a:r>
+          </a:p>
+          <a:p>
+            <a:pPr marL="457200" indent="-457200">
+              <a:buFont typeface="Arial" panose="020B0604020202020204" pitchFamily="34" charset="0"/>
+              <a:buChar char="•"/>
+            </a:pPr>
+            <a:r>
+              <a:rPr lang="en-US" dirty="0"/>
+              <a:t>Commands for filtering based on field values</a:t>
+            </a:r>
+          </a:p>
+          <a:p>
+            <a:pPr marL="457200" indent="-457200">
+              <a:buFont typeface="Arial" panose="020B0604020202020204" pitchFamily="34" charset="0"/>
+              <a:buChar char="•"/>
+            </a:pPr>
+            <a:r>
+              <a:rPr lang="en-US" dirty="0"/>
+              <a:t>Sorting of the data based on one or multiple field</a:t>
+            </a:r>
+          </a:p>
+          <a:p>
+            <a:pPr marL="457200" indent="-457200">
+              <a:buFont typeface="Arial" panose="020B0604020202020204" pitchFamily="34" charset="0"/>
+              <a:buChar char="•"/>
+            </a:pPr>
+            <a:r>
+              <a:rPr lang="en-US" dirty="0"/>
+              <a:t>Merging of data from multiple sources into one dataset</a:t>
+            </a:r>
+          </a:p>
+          <a:p>
+            <a:pPr marL="457200" indent="-457200">
+              <a:buFont typeface="Arial" panose="020B0604020202020204" pitchFamily="34" charset="0"/>
+              <a:buChar char="•"/>
+            </a:pPr>
+            <a:r>
+              <a:rPr lang="en-US" dirty="0"/>
+              <a:t>Deduplication by field values and keeping top &lt;n&gt; or last &lt;n&gt; records</a:t>
+            </a:r>
+          </a:p>
+          <a:p>
+            <a:pPr marL="457200" indent="-457200">
+              <a:buFont typeface="Arial" panose="020B0604020202020204" pitchFamily="34" charset="0"/>
+              <a:buChar char="•"/>
+            </a:pPr>
+            <a:r>
+              <a:rPr lang="en-US" dirty="0"/>
+              <a:t>Formatting of fields or records based on field values </a:t>
+            </a:r>
+          </a:p>
+          <a:p>
+            <a:pPr marL="457200" indent="-457200">
+              <a:buFont typeface="Arial" panose="020B0604020202020204" pitchFamily="34" charset="0"/>
+              <a:buChar char="•"/>
+            </a:pPr>
+            <a:r>
+              <a:rPr lang="en-US" dirty="0"/>
+              <a:t>Integrate the queries into dashboards using the Query Widget</a:t>
+            </a:r>
+          </a:p>
+          <a:p>
+            <a:pPr marL="457200" indent="-457200">
+              <a:buFont typeface="Arial" panose="020B0604020202020204" pitchFamily="34" charset="0"/>
+              <a:buChar char="•"/>
+            </a:pPr>
+            <a:r>
+              <a:rPr lang="en-US" dirty="0"/>
+              <a:t>Mass display of traffic lights</a:t>
             </a:r>
             <a:endParaRPr lang="en-CH" dirty="0"/>
           </a:p>
         </p:txBody>
       </p:sp>
-      <p:sp>
-        <p:nvSpPr>
-          <p:cNvPr id="3" name="Content Placeholder 2">
-            <a:extLst>
-              <a:ext uri="{FF2B5EF4-FFF2-40B4-BE49-F238E27FC236}">
-                <a16:creationId xmlns:a16="http://schemas.microsoft.com/office/drawing/2014/main" id="{40F91D5A-43AA-4E10-9D36-CF013FCB93DD}"/>
-              </a:ext>
-            </a:extLst>
-          </p:cNvPr>
-          <p:cNvSpPr>
-            <a:spLocks noGrp="1"/>
-          </p:cNvSpPr>
-          <p:nvPr>
-            <p:ph idx="1"/>
-          </p:nvPr>
-        </p:nvSpPr>
-        <p:spPr>
-          <a:xfrm>
-            <a:off x="838200" y="1320801"/>
-            <a:ext cx="7359650" cy="1580944"/>
-          </a:xfrm>
-        </p:spPr>
-        <p:txBody>
-          <a:bodyPr>
-            <a:normAutofit lnSpcReduction="10000"/>
-          </a:bodyPr>
-          <a:lstStyle/>
-          <a:p>
-            <a:r>
-              <a:rPr lang="en-US" dirty="0"/>
-              <a:t>Fetch data with two different Prometheus queries from two different </a:t>
-            </a:r>
-            <a:r>
-              <a:rPr lang="en-US" dirty="0" err="1"/>
-              <a:t>prometheus</a:t>
-            </a:r>
-            <a:r>
-              <a:rPr lang="en-US" dirty="0"/>
-              <a:t> instances. Filter, sort and format by the field “value” and display the result as panels.</a:t>
-            </a:r>
-            <a:endParaRPr lang="en-CH" dirty="0"/>
-          </a:p>
-        </p:txBody>
-      </p:sp>
-      <p:pic>
-        <p:nvPicPr>
-          <p:cNvPr id="5" name="Picture 4">
-            <a:extLst>
-              <a:ext uri="{FF2B5EF4-FFF2-40B4-BE49-F238E27FC236}">
-                <a16:creationId xmlns:a16="http://schemas.microsoft.com/office/drawing/2014/main" id="{AB05D91A-B99C-4AD3-AA03-77DE922ECEB4}"/>
-              </a:ext>
-            </a:extLst>
-          </p:cNvPr>
-          <p:cNvPicPr>
-            <a:picLocks noChangeAspect="1"/>
-          </p:cNvPicPr>
-          <p:nvPr/>
-        </p:nvPicPr>
-        <p:blipFill>
-          <a:blip r:embed="rId2"/>
-          <a:stretch>
-            <a:fillRect/>
-          </a:stretch>
-        </p:blipFill>
-        <p:spPr>
-          <a:xfrm>
-            <a:off x="956739" y="3245912"/>
-            <a:ext cx="6778111" cy="2635454"/>
-          </a:xfrm>
-          <a:prstGeom prst="rect">
-            <a:avLst/>
-          </a:prstGeom>
-        </p:spPr>
-      </p:pic>
-      <p:pic>
-        <p:nvPicPr>
-          <p:cNvPr id="9" name="Picture 8">
-            <a:extLst>
-              <a:ext uri="{FF2B5EF4-FFF2-40B4-BE49-F238E27FC236}">
-                <a16:creationId xmlns:a16="http://schemas.microsoft.com/office/drawing/2014/main" id="{0A6CDAF2-8CE4-4821-AA03-70BF1497DF03}"/>
-              </a:ext>
-            </a:extLst>
-          </p:cNvPr>
-          <p:cNvPicPr>
-            <a:picLocks noChangeAspect="1"/>
-          </p:cNvPicPr>
-          <p:nvPr/>
-        </p:nvPicPr>
-        <p:blipFill>
-          <a:blip r:embed="rId3"/>
-          <a:stretch>
-            <a:fillRect/>
-          </a:stretch>
-        </p:blipFill>
-        <p:spPr>
-          <a:xfrm>
-            <a:off x="8524413" y="-13062"/>
-            <a:ext cx="4610823" cy="6858000"/>
-          </a:xfrm>
-          <a:prstGeom prst="rect">
-            <a:avLst/>
-          </a:prstGeom>
-        </p:spPr>
-      </p:pic>
     </p:spTree>
     <p:extLst>
       <p:ext uri="{BB962C8B-B14F-4D97-AF65-F5344CB8AC3E}">
-        <p14:creationId xmlns:p14="http://schemas.microsoft.com/office/powerpoint/2010/main" val="609745034"/>
+        <p14:creationId xmlns:p14="http://schemas.microsoft.com/office/powerpoint/2010/main" val="99721151"/>
       </p:ext>
     </p:extLst>
   </p:cSld>
@@ -5637,7 +5614,7 @@
           <p:cNvPr id="2" name="Title 1">
             <a:extLst>
               <a:ext uri="{FF2B5EF4-FFF2-40B4-BE49-F238E27FC236}">
-                <a16:creationId xmlns:a16="http://schemas.microsoft.com/office/drawing/2014/main" id="{1A48B704-594D-4CE1-8C3B-5EAC7C5F03A6}"/>
+                <a16:creationId xmlns:a16="http://schemas.microsoft.com/office/drawing/2014/main" id="{640606EA-B052-4986-9E62-6ACA495288FE}"/>
               </a:ext>
             </a:extLst>
           </p:cNvPr>
@@ -5655,7 +5632,7 @@
           <a:p>
             <a:r>
               <a:rPr lang="en-US" dirty="0"/>
-              <a:t>Example - Format</a:t>
+              <a:t>Example – Fetch Data From Database</a:t>
             </a:r>
             <a:endParaRPr lang="en-CH" dirty="0"/>
           </a:p>
@@ -5666,7 +5643,7 @@
           <p:cNvPr id="3" name="Content Placeholder 2">
             <a:extLst>
               <a:ext uri="{FF2B5EF4-FFF2-40B4-BE49-F238E27FC236}">
-                <a16:creationId xmlns:a16="http://schemas.microsoft.com/office/drawing/2014/main" id="{8ABB42C9-39CD-487D-9BEE-AFC8655570CB}"/>
+                <a16:creationId xmlns:a16="http://schemas.microsoft.com/office/drawing/2014/main" id="{BF0741C9-90F7-49E1-9999-3F216DB04D68}"/>
               </a:ext>
             </a:extLst>
           </p:cNvPr>
@@ -5684,7 +5661,7 @@
           <a:p>
             <a:r>
               <a:rPr lang="en-US" dirty="0"/>
-              <a:t>Show records as traffic lights based on field values.</a:t>
+              <a:t>Fetches data from a database and displays the data as table.</a:t>
             </a:r>
             <a:endParaRPr lang="en-CH" dirty="0"/>
           </a:p>
@@ -5692,10 +5669,10 @@
       </p:sp>
       <p:pic>
         <p:nvPicPr>
-          <p:cNvPr id="7" name="Picture 6">
-            <a:extLst>
-              <a:ext uri="{FF2B5EF4-FFF2-40B4-BE49-F238E27FC236}">
-                <a16:creationId xmlns:a16="http://schemas.microsoft.com/office/drawing/2014/main" id="{1F2C98FB-B744-402A-81F8-C360DDFF2473}"/>
+          <p:cNvPr id="9" name="Picture 8">
+            <a:extLst>
+              <a:ext uri="{FF2B5EF4-FFF2-40B4-BE49-F238E27FC236}">
+                <a16:creationId xmlns:a16="http://schemas.microsoft.com/office/drawing/2014/main" id="{EC1EA80E-36ED-462E-AF59-5356E89542BF}"/>
               </a:ext>
             </a:extLst>
           </p:cNvPr>
@@ -5712,38 +5689,8 @@
         </p:blipFill>
         <p:spPr>
           <a:xfrm>
-            <a:off x="4805341" y="2276476"/>
-            <a:ext cx="6726259" cy="4010023"/>
-          </a:xfrm>
-          <a:prstGeom prst="rect">
-            <a:avLst/>
-          </a:prstGeom>
-        </p:spPr>
-      </p:pic>
-      <p:pic>
-        <p:nvPicPr>
-          <p:cNvPr id="9" name="Picture 8">
-            <a:extLst>
-              <a:ext uri="{FF2B5EF4-FFF2-40B4-BE49-F238E27FC236}">
-                <a16:creationId xmlns:a16="http://schemas.microsoft.com/office/drawing/2014/main" id="{B559597C-4528-417D-AA8B-6A743F209691}"/>
-              </a:ext>
-            </a:extLst>
-          </p:cNvPr>
-          <p:cNvPicPr>
-            <a:picLocks noChangeAspect="1"/>
-          </p:cNvPicPr>
-          <p:nvPr/>
-        </p:nvPicPr>
-        <p:blipFill>
-          <a:blip r:embed="rId3"/>
-          <a:stretch>
-            <a:fillRect/>
-          </a:stretch>
-        </p:blipFill>
-        <p:spPr>
-          <a:xfrm>
-            <a:off x="838200" y="2276476"/>
-            <a:ext cx="3760047" cy="4010023"/>
+            <a:off x="1437524" y="2194986"/>
+            <a:ext cx="9147926" cy="4663014"/>
           </a:xfrm>
           <a:prstGeom prst="rect">
             <a:avLst/>
@@ -5753,7 +5700,7 @@
     </p:spTree>
     <p:extLst>
       <p:ext uri="{BB962C8B-B14F-4D97-AF65-F5344CB8AC3E}">
-        <p14:creationId xmlns:p14="http://schemas.microsoft.com/office/powerpoint/2010/main" val="4235682211"/>
+        <p14:creationId xmlns:p14="http://schemas.microsoft.com/office/powerpoint/2010/main" val="3073090357"/>
       </p:ext>
     </p:extLst>
   </p:cSld>
@@ -5785,7 +5732,7 @@
           <p:cNvPr id="2" name="Title 1">
             <a:extLst>
               <a:ext uri="{FF2B5EF4-FFF2-40B4-BE49-F238E27FC236}">
-                <a16:creationId xmlns:a16="http://schemas.microsoft.com/office/drawing/2014/main" id="{A8BFE8D1-2656-4D55-B23C-7228FA743196}"/>
+                <a16:creationId xmlns:a16="http://schemas.microsoft.com/office/drawing/2014/main" id="{B53864B2-4AB9-49D8-8013-C3F6ADB9C1C1}"/>
               </a:ext>
             </a:extLst>
           </p:cNvPr>
@@ -5796,14 +5743,22 @@
             <p:ph type="title"/>
           </p:nvPr>
         </p:nvSpPr>
-        <p:spPr/>
-        <p:txBody>
-          <a:bodyPr/>
-          <a:lstStyle/>
-          <a:p>
-            <a:r>
-              <a:rPr lang="en-US" dirty="0"/>
-              <a:t>Example –Dashboard Widget with Parameters</a:t>
+        <p:spPr>
+          <a:xfrm>
+            <a:off x="838200" y="365125"/>
+            <a:ext cx="7885566" cy="752475"/>
+          </a:xfrm>
+        </p:spPr>
+        <p:txBody>
+          <a:bodyPr>
+            <a:normAutofit fontScale="90000"/>
+          </a:bodyPr>
+          <a:lstStyle/>
+          <a:p>
+            <a:pPr algn="l"/>
+            <a:r>
+              <a:rPr lang="en-US" dirty="0"/>
+              <a:t>Example – Fetch from Prometheus</a:t>
             </a:r>
             <a:endParaRPr lang="en-CH" dirty="0"/>
           </a:p>
@@ -5814,7 +5769,7 @@
           <p:cNvPr id="3" name="Content Placeholder 2">
             <a:extLst>
               <a:ext uri="{FF2B5EF4-FFF2-40B4-BE49-F238E27FC236}">
-                <a16:creationId xmlns:a16="http://schemas.microsoft.com/office/drawing/2014/main" id="{0A425075-3083-4C08-9A0E-A1DE3A4D6342}"/>
+                <a16:creationId xmlns:a16="http://schemas.microsoft.com/office/drawing/2014/main" id="{40F91D5A-43AA-4E10-9D36-CF013FCB93DD}"/>
               </a:ext>
             </a:extLst>
           </p:cNvPr>
@@ -5825,16 +5780,29 @@
             <p:ph idx="1"/>
           </p:nvPr>
         </p:nvSpPr>
-        <p:spPr/>
+        <p:spPr>
+          <a:xfrm>
+            <a:off x="838200" y="1320801"/>
+            <a:ext cx="7359650" cy="1580944"/>
+          </a:xfrm>
+        </p:spPr>
         <p:txBody>
           <a:bodyPr>
-            <a:normAutofit fontScale="92500" lnSpcReduction="10000"/>
+            <a:normAutofit lnSpcReduction="10000"/>
           </a:bodyPr>
           <a:lstStyle/>
           <a:p>
             <a:r>
               <a:rPr lang="en-US" dirty="0"/>
-              <a:t>Add queries to dashboards and use the dashboard parameter feature to customize your query.</a:t>
+              <a:t>Fetch data with two different Prometheus queries from two different </a:t>
+            </a:r>
+            <a:r>
+              <a:rPr lang="en-US" dirty="0" err="1"/>
+              <a:t>prometheus</a:t>
+            </a:r>
+            <a:r>
+              <a:rPr lang="en-US" dirty="0"/>
+              <a:t> instances. Filter, sort and format by the field “value” and display the result as panels.</a:t>
             </a:r>
             <a:endParaRPr lang="en-CH" dirty="0"/>
           </a:p>
@@ -5842,10 +5810,10 @@
       </p:sp>
       <p:pic>
         <p:nvPicPr>
-          <p:cNvPr id="7" name="Picture 6">
-            <a:extLst>
-              <a:ext uri="{FF2B5EF4-FFF2-40B4-BE49-F238E27FC236}">
-                <a16:creationId xmlns:a16="http://schemas.microsoft.com/office/drawing/2014/main" id="{1F5A427E-4B35-421D-8621-525DBD1FC382}"/>
+          <p:cNvPr id="5" name="Picture 4">
+            <a:extLst>
+              <a:ext uri="{FF2B5EF4-FFF2-40B4-BE49-F238E27FC236}">
+                <a16:creationId xmlns:a16="http://schemas.microsoft.com/office/drawing/2014/main" id="{AB05D91A-B99C-4AD3-AA03-77DE922ECEB4}"/>
               </a:ext>
             </a:extLst>
           </p:cNvPr>
@@ -5862,8 +5830,38 @@
         </p:blipFill>
         <p:spPr>
           <a:xfrm>
-            <a:off x="1031387" y="2162360"/>
-            <a:ext cx="10129225" cy="4479740"/>
+            <a:off x="956739" y="3245912"/>
+            <a:ext cx="6778111" cy="2635454"/>
+          </a:xfrm>
+          <a:prstGeom prst="rect">
+            <a:avLst/>
+          </a:prstGeom>
+        </p:spPr>
+      </p:pic>
+      <p:pic>
+        <p:nvPicPr>
+          <p:cNvPr id="9" name="Picture 8">
+            <a:extLst>
+              <a:ext uri="{FF2B5EF4-FFF2-40B4-BE49-F238E27FC236}">
+                <a16:creationId xmlns:a16="http://schemas.microsoft.com/office/drawing/2014/main" id="{0A6CDAF2-8CE4-4821-AA03-70BF1497DF03}"/>
+              </a:ext>
+            </a:extLst>
+          </p:cNvPr>
+          <p:cNvPicPr>
+            <a:picLocks noChangeAspect="1"/>
+          </p:cNvPicPr>
+          <p:nvPr/>
+        </p:nvPicPr>
+        <p:blipFill>
+          <a:blip r:embed="rId3"/>
+          <a:stretch>
+            <a:fillRect/>
+          </a:stretch>
+        </p:blipFill>
+        <p:spPr>
+          <a:xfrm>
+            <a:off x="8524413" y="-13062"/>
+            <a:ext cx="4610823" cy="6858000"/>
           </a:xfrm>
           <a:prstGeom prst="rect">
             <a:avLst/>
@@ -5873,7 +5871,7 @@
     </p:spTree>
     <p:extLst>
       <p:ext uri="{BB962C8B-B14F-4D97-AF65-F5344CB8AC3E}">
-        <p14:creationId xmlns:p14="http://schemas.microsoft.com/office/powerpoint/2010/main" val="3728745337"/>
+        <p14:creationId xmlns:p14="http://schemas.microsoft.com/office/powerpoint/2010/main" val="609745034"/>
       </p:ext>
     </p:extLst>
   </p:cSld>
@@ -5883,7 +5881,7 @@
 </p:sld>
 </file>
 
-<file path=ppt/slides/slide3.xml><?xml version="1.0" encoding="utf-8"?>
+<file path=ppt/slides/slide27.xml><?xml version="1.0" encoding="utf-8"?>
 <p:sld xmlns:a="http://schemas.openxmlformats.org/drawingml/2006/main" xmlns:r="http://schemas.openxmlformats.org/officeDocument/2006/relationships" xmlns:p="http://schemas.openxmlformats.org/presentationml/2006/main">
   <p:cSld>
     <p:spTree>
@@ -5905,7 +5903,7 @@
           <p:cNvPr id="2" name="Title 1">
             <a:extLst>
               <a:ext uri="{FF2B5EF4-FFF2-40B4-BE49-F238E27FC236}">
-                <a16:creationId xmlns:a16="http://schemas.microsoft.com/office/drawing/2014/main" id="{CDCDEA46-AB36-471C-8BC0-E2849C41986F}"/>
+                <a16:creationId xmlns:a16="http://schemas.microsoft.com/office/drawing/2014/main" id="{1A48B704-594D-4CE1-8C3B-5EAC7C5F03A6}"/>
               </a:ext>
             </a:extLst>
           </p:cNvPr>
@@ -5923,18 +5921,47 @@
           <a:p>
             <a:r>
               <a:rPr lang="en-US" dirty="0"/>
-              <a:t>User Management</a:t>
-            </a:r>
-            <a:endParaRPr lang="LID4096" dirty="0"/>
+              <a:t>Example - Format</a:t>
+            </a:r>
+            <a:endParaRPr lang="en-CH" dirty="0"/>
+          </a:p>
+        </p:txBody>
+      </p:sp>
+      <p:sp>
+        <p:nvSpPr>
+          <p:cNvPr id="3" name="Content Placeholder 2">
+            <a:extLst>
+              <a:ext uri="{FF2B5EF4-FFF2-40B4-BE49-F238E27FC236}">
+                <a16:creationId xmlns:a16="http://schemas.microsoft.com/office/drawing/2014/main" id="{8ABB42C9-39CD-487D-9BEE-AFC8655570CB}"/>
+              </a:ext>
+            </a:extLst>
+          </p:cNvPr>
+          <p:cNvSpPr>
+            <a:spLocks noGrp="1"/>
+          </p:cNvSpPr>
+          <p:nvPr>
+            <p:ph idx="1"/>
+          </p:nvPr>
+        </p:nvSpPr>
+        <p:spPr/>
+        <p:txBody>
+          <a:bodyPr/>
+          <a:lstStyle/>
+          <a:p>
+            <a:r>
+              <a:rPr lang="en-US" dirty="0"/>
+              <a:t>Show records as traffic lights based on field values.</a:t>
+            </a:r>
+            <a:endParaRPr lang="en-CH" dirty="0"/>
           </a:p>
         </p:txBody>
       </p:sp>
       <p:pic>
         <p:nvPicPr>
-          <p:cNvPr id="5" name="Picture 4">
-            <a:extLst>
-              <a:ext uri="{FF2B5EF4-FFF2-40B4-BE49-F238E27FC236}">
-                <a16:creationId xmlns:a16="http://schemas.microsoft.com/office/drawing/2014/main" id="{FB790BAE-2EAA-4426-8E94-CA35B3AA924A}"/>
+          <p:cNvPr id="7" name="Picture 6">
+            <a:extLst>
+              <a:ext uri="{FF2B5EF4-FFF2-40B4-BE49-F238E27FC236}">
+                <a16:creationId xmlns:a16="http://schemas.microsoft.com/office/drawing/2014/main" id="{1F2C98FB-B744-402A-81F8-C360DDFF2473}"/>
               </a:ext>
             </a:extLst>
           </p:cNvPr>
@@ -5951,8 +5978,38 @@
         </p:blipFill>
         <p:spPr>
           <a:xfrm>
-            <a:off x="838200" y="1358329"/>
-            <a:ext cx="10048240" cy="4902874"/>
+            <a:off x="4805341" y="2276476"/>
+            <a:ext cx="6726259" cy="4010023"/>
+          </a:xfrm>
+          <a:prstGeom prst="rect">
+            <a:avLst/>
+          </a:prstGeom>
+        </p:spPr>
+      </p:pic>
+      <p:pic>
+        <p:nvPicPr>
+          <p:cNvPr id="9" name="Picture 8">
+            <a:extLst>
+              <a:ext uri="{FF2B5EF4-FFF2-40B4-BE49-F238E27FC236}">
+                <a16:creationId xmlns:a16="http://schemas.microsoft.com/office/drawing/2014/main" id="{B559597C-4528-417D-AA8B-6A743F209691}"/>
+              </a:ext>
+            </a:extLst>
+          </p:cNvPr>
+          <p:cNvPicPr>
+            <a:picLocks noChangeAspect="1"/>
+          </p:cNvPicPr>
+          <p:nvPr/>
+        </p:nvPicPr>
+        <p:blipFill>
+          <a:blip r:embed="rId3"/>
+          <a:stretch>
+            <a:fillRect/>
+          </a:stretch>
+        </p:blipFill>
+        <p:spPr>
+          <a:xfrm>
+            <a:off x="838200" y="2276476"/>
+            <a:ext cx="3760047" cy="4010023"/>
           </a:xfrm>
           <a:prstGeom prst="rect">
             <a:avLst/>
@@ -5962,7 +6019,2005 @@
     </p:spTree>
     <p:extLst>
       <p:ext uri="{BB962C8B-B14F-4D97-AF65-F5344CB8AC3E}">
-        <p14:creationId xmlns:p14="http://schemas.microsoft.com/office/powerpoint/2010/main" val="2716562526"/>
+        <p14:creationId xmlns:p14="http://schemas.microsoft.com/office/powerpoint/2010/main" val="4235682211"/>
+      </p:ext>
+    </p:extLst>
+  </p:cSld>
+  <p:clrMapOvr>
+    <a:masterClrMapping/>
+  </p:clrMapOvr>
+</p:sld>
+</file>
+
+<file path=ppt/slides/slide28.xml><?xml version="1.0" encoding="utf-8"?>
+<p:sld xmlns:a="http://schemas.openxmlformats.org/drawingml/2006/main" xmlns:r="http://schemas.openxmlformats.org/officeDocument/2006/relationships" xmlns:p="http://schemas.openxmlformats.org/presentationml/2006/main">
+  <p:cSld>
+    <p:spTree>
+      <p:nvGrpSpPr>
+        <p:cNvPr id="1" name=""/>
+        <p:cNvGrpSpPr/>
+        <p:nvPr/>
+      </p:nvGrpSpPr>
+      <p:grpSpPr>
+        <a:xfrm>
+          <a:off x="0" y="0"/>
+          <a:ext cx="0" cy="0"/>
+          <a:chOff x="0" y="0"/>
+          <a:chExt cx="0" cy="0"/>
+        </a:xfrm>
+      </p:grpSpPr>
+      <p:sp>
+        <p:nvSpPr>
+          <p:cNvPr id="2" name="Title 1">
+            <a:extLst>
+              <a:ext uri="{FF2B5EF4-FFF2-40B4-BE49-F238E27FC236}">
+                <a16:creationId xmlns:a16="http://schemas.microsoft.com/office/drawing/2014/main" id="{A8BFE8D1-2656-4D55-B23C-7228FA743196}"/>
+              </a:ext>
+            </a:extLst>
+          </p:cNvPr>
+          <p:cNvSpPr>
+            <a:spLocks noGrp="1"/>
+          </p:cNvSpPr>
+          <p:nvPr>
+            <p:ph type="title"/>
+          </p:nvPr>
+        </p:nvSpPr>
+        <p:spPr/>
+        <p:txBody>
+          <a:bodyPr/>
+          <a:lstStyle/>
+          <a:p>
+            <a:r>
+              <a:rPr lang="en-US" dirty="0"/>
+              <a:t>Example –Dashboard Widget with Parameters</a:t>
+            </a:r>
+            <a:endParaRPr lang="en-CH" dirty="0"/>
+          </a:p>
+        </p:txBody>
+      </p:sp>
+      <p:sp>
+        <p:nvSpPr>
+          <p:cNvPr id="3" name="Content Placeholder 2">
+            <a:extLst>
+              <a:ext uri="{FF2B5EF4-FFF2-40B4-BE49-F238E27FC236}">
+                <a16:creationId xmlns:a16="http://schemas.microsoft.com/office/drawing/2014/main" id="{0A425075-3083-4C08-9A0E-A1DE3A4D6342}"/>
+              </a:ext>
+            </a:extLst>
+          </p:cNvPr>
+          <p:cNvSpPr>
+            <a:spLocks noGrp="1"/>
+          </p:cNvSpPr>
+          <p:nvPr>
+            <p:ph idx="1"/>
+          </p:nvPr>
+        </p:nvSpPr>
+        <p:spPr/>
+        <p:txBody>
+          <a:bodyPr>
+            <a:normAutofit fontScale="92500" lnSpcReduction="10000"/>
+          </a:bodyPr>
+          <a:lstStyle/>
+          <a:p>
+            <a:r>
+              <a:rPr lang="en-US" dirty="0"/>
+              <a:t>Add queries to dashboards and use the dashboard parameter feature to customize your query.</a:t>
+            </a:r>
+            <a:endParaRPr lang="en-CH" dirty="0"/>
+          </a:p>
+        </p:txBody>
+      </p:sp>
+      <p:pic>
+        <p:nvPicPr>
+          <p:cNvPr id="7" name="Picture 6">
+            <a:extLst>
+              <a:ext uri="{FF2B5EF4-FFF2-40B4-BE49-F238E27FC236}">
+                <a16:creationId xmlns:a16="http://schemas.microsoft.com/office/drawing/2014/main" id="{1F5A427E-4B35-421D-8621-525DBD1FC382}"/>
+              </a:ext>
+            </a:extLst>
+          </p:cNvPr>
+          <p:cNvPicPr>
+            <a:picLocks noChangeAspect="1"/>
+          </p:cNvPicPr>
+          <p:nvPr/>
+        </p:nvPicPr>
+        <p:blipFill>
+          <a:blip r:embed="rId2"/>
+          <a:stretch>
+            <a:fillRect/>
+          </a:stretch>
+        </p:blipFill>
+        <p:spPr>
+          <a:xfrm>
+            <a:off x="1031387" y="2162360"/>
+            <a:ext cx="10129225" cy="4479740"/>
+          </a:xfrm>
+          <a:prstGeom prst="rect">
+            <a:avLst/>
+          </a:prstGeom>
+        </p:spPr>
+      </p:pic>
+    </p:spTree>
+    <p:extLst>
+      <p:ext uri="{BB962C8B-B14F-4D97-AF65-F5344CB8AC3E}">
+        <p14:creationId xmlns:p14="http://schemas.microsoft.com/office/powerpoint/2010/main" val="3728745337"/>
+      </p:ext>
+    </p:extLst>
+  </p:cSld>
+  <p:clrMapOvr>
+    <a:masterClrMapping/>
+  </p:clrMapOvr>
+</p:sld>
+</file>
+
+<file path=ppt/slides/slide29.xml><?xml version="1.0" encoding="utf-8"?>
+<p:sld xmlns:a="http://schemas.openxmlformats.org/drawingml/2006/main" xmlns:r="http://schemas.openxmlformats.org/officeDocument/2006/relationships" xmlns:p="http://schemas.openxmlformats.org/presentationml/2006/main">
+  <p:cSld>
+    <p:spTree>
+      <p:nvGrpSpPr>
+        <p:cNvPr id="1" name="">
+          <a:extLst>
+            <a:ext uri="{FF2B5EF4-FFF2-40B4-BE49-F238E27FC236}">
+              <a16:creationId xmlns:a16="http://schemas.microsoft.com/office/drawing/2014/main" id="{60AB8E76-AA99-BF94-7E1C-5149DCC39EC8}"/>
+            </a:ext>
+          </a:extLst>
+        </p:cNvPr>
+        <p:cNvGrpSpPr/>
+        <p:nvPr/>
+      </p:nvGrpSpPr>
+      <p:grpSpPr>
+        <a:xfrm>
+          <a:off x="0" y="0"/>
+          <a:ext cx="0" cy="0"/>
+          <a:chOff x="0" y="0"/>
+          <a:chExt cx="0" cy="0"/>
+        </a:xfrm>
+      </p:grpSpPr>
+      <p:sp>
+        <p:nvSpPr>
+          <p:cNvPr id="2" name="Title 1">
+            <a:extLst>
+              <a:ext uri="{FF2B5EF4-FFF2-40B4-BE49-F238E27FC236}">
+                <a16:creationId xmlns:a16="http://schemas.microsoft.com/office/drawing/2014/main" id="{BF31C2BA-7CB4-3206-71DE-58A23C4C33AF}"/>
+              </a:ext>
+            </a:extLst>
+          </p:cNvPr>
+          <p:cNvSpPr>
+            <a:spLocks noGrp="1"/>
+          </p:cNvSpPr>
+          <p:nvPr>
+            <p:ph type="ctrTitle"/>
+          </p:nvPr>
+        </p:nvSpPr>
+        <p:spPr>
+          <a:xfrm>
+            <a:off x="1524000" y="2788915"/>
+            <a:ext cx="9144000" cy="1060677"/>
+          </a:xfrm>
+        </p:spPr>
+        <p:txBody>
+          <a:bodyPr/>
+          <a:lstStyle/>
+          <a:p>
+            <a:r>
+              <a:rPr lang="en-CH" dirty="0"/>
+              <a:t>Business Analytics</a:t>
+            </a:r>
+            <a:endParaRPr lang="LID4096" dirty="0"/>
+          </a:p>
+        </p:txBody>
+      </p:sp>
+      <p:sp>
+        <p:nvSpPr>
+          <p:cNvPr id="3" name="Subtitle 2">
+            <a:extLst>
+              <a:ext uri="{FF2B5EF4-FFF2-40B4-BE49-F238E27FC236}">
+                <a16:creationId xmlns:a16="http://schemas.microsoft.com/office/drawing/2014/main" id="{981D5FAF-C183-522E-AA0F-5C78DAB5EE39}"/>
+              </a:ext>
+            </a:extLst>
+          </p:cNvPr>
+          <p:cNvSpPr>
+            <a:spLocks noGrp="1"/>
+          </p:cNvSpPr>
+          <p:nvPr>
+            <p:ph type="subTitle" idx="1"/>
+          </p:nvPr>
+        </p:nvSpPr>
+        <p:spPr>
+          <a:xfrm>
+            <a:off x="1524000" y="3941668"/>
+            <a:ext cx="9144000" cy="819739"/>
+          </a:xfrm>
+        </p:spPr>
+        <p:txBody>
+          <a:bodyPr/>
+          <a:lstStyle/>
+          <a:p>
+            <a:endParaRPr lang="LID4096" dirty="0"/>
+          </a:p>
+        </p:txBody>
+      </p:sp>
+    </p:spTree>
+    <p:extLst>
+      <p:ext uri="{BB962C8B-B14F-4D97-AF65-F5344CB8AC3E}">
+        <p14:creationId xmlns:p14="http://schemas.microsoft.com/office/powerpoint/2010/main" val="1935924472"/>
+      </p:ext>
+    </p:extLst>
+  </p:cSld>
+  <p:clrMapOvr>
+    <a:masterClrMapping/>
+  </p:clrMapOvr>
+</p:sld>
+</file>
+
+<file path=ppt/slides/slide3.xml><?xml version="1.0" encoding="utf-8"?>
+<p:sld xmlns:a="http://schemas.openxmlformats.org/drawingml/2006/main" xmlns:r="http://schemas.openxmlformats.org/officeDocument/2006/relationships" xmlns:p="http://schemas.openxmlformats.org/presentationml/2006/main">
+  <p:cSld>
+    <p:spTree>
+      <p:nvGrpSpPr>
+        <p:cNvPr id="1" name="">
+          <a:extLst>
+            <a:ext uri="{FF2B5EF4-FFF2-40B4-BE49-F238E27FC236}">
+              <a16:creationId xmlns:a16="http://schemas.microsoft.com/office/drawing/2014/main" id="{5B203BD0-4FAC-442B-5E0C-1093A4320128}"/>
+            </a:ext>
+          </a:extLst>
+        </p:cNvPr>
+        <p:cNvGrpSpPr/>
+        <p:nvPr/>
+      </p:nvGrpSpPr>
+      <p:grpSpPr>
+        <a:xfrm>
+          <a:off x="0" y="0"/>
+          <a:ext cx="0" cy="0"/>
+          <a:chOff x="0" y="0"/>
+          <a:chExt cx="0" cy="0"/>
+        </a:xfrm>
+      </p:grpSpPr>
+      <p:sp>
+        <p:nvSpPr>
+          <p:cNvPr id="2" name="Title 1">
+            <a:extLst>
+              <a:ext uri="{FF2B5EF4-FFF2-40B4-BE49-F238E27FC236}">
+                <a16:creationId xmlns:a16="http://schemas.microsoft.com/office/drawing/2014/main" id="{D2F926CB-5E88-4154-72B5-6D93E2B1ED99}"/>
+              </a:ext>
+            </a:extLst>
+          </p:cNvPr>
+          <p:cNvSpPr>
+            <a:spLocks noGrp="1"/>
+          </p:cNvSpPr>
+          <p:nvPr>
+            <p:ph type="ctrTitle"/>
+          </p:nvPr>
+        </p:nvSpPr>
+        <p:spPr>
+          <a:xfrm>
+            <a:off x="1524000" y="2788915"/>
+            <a:ext cx="9144000" cy="1060677"/>
+          </a:xfrm>
+        </p:spPr>
+        <p:txBody>
+          <a:bodyPr/>
+          <a:lstStyle/>
+          <a:p>
+            <a:r>
+              <a:rPr lang="en-CH" dirty="0"/>
+              <a:t>General Features</a:t>
+            </a:r>
+            <a:endParaRPr lang="LID4096" dirty="0"/>
+          </a:p>
+        </p:txBody>
+      </p:sp>
+      <p:sp>
+        <p:nvSpPr>
+          <p:cNvPr id="3" name="Subtitle 2">
+            <a:extLst>
+              <a:ext uri="{FF2B5EF4-FFF2-40B4-BE49-F238E27FC236}">
+                <a16:creationId xmlns:a16="http://schemas.microsoft.com/office/drawing/2014/main" id="{95BA5FB3-CBFB-A105-727F-57F47D186190}"/>
+              </a:ext>
+            </a:extLst>
+          </p:cNvPr>
+          <p:cNvSpPr>
+            <a:spLocks noGrp="1"/>
+          </p:cNvSpPr>
+          <p:nvPr>
+            <p:ph type="subTitle" idx="1"/>
+          </p:nvPr>
+        </p:nvSpPr>
+        <p:spPr>
+          <a:xfrm>
+            <a:off x="1524000" y="3941668"/>
+            <a:ext cx="9144000" cy="819739"/>
+          </a:xfrm>
+        </p:spPr>
+        <p:txBody>
+          <a:bodyPr/>
+          <a:lstStyle/>
+          <a:p>
+            <a:endParaRPr lang="LID4096" dirty="0"/>
+          </a:p>
+        </p:txBody>
+      </p:sp>
+    </p:spTree>
+    <p:extLst>
+      <p:ext uri="{BB962C8B-B14F-4D97-AF65-F5344CB8AC3E}">
+        <p14:creationId xmlns:p14="http://schemas.microsoft.com/office/powerpoint/2010/main" val="2987397103"/>
+      </p:ext>
+    </p:extLst>
+  </p:cSld>
+  <p:clrMapOvr>
+    <a:masterClrMapping/>
+  </p:clrMapOvr>
+</p:sld>
+</file>
+
+<file path=ppt/slides/slide30.xml><?xml version="1.0" encoding="utf-8"?>
+<p:sld xmlns:a="http://schemas.openxmlformats.org/drawingml/2006/main" xmlns:r="http://schemas.openxmlformats.org/officeDocument/2006/relationships" xmlns:p="http://schemas.openxmlformats.org/presentationml/2006/main">
+  <p:cSld>
+    <p:spTree>
+      <p:nvGrpSpPr>
+        <p:cNvPr id="1" name="">
+          <a:extLst>
+            <a:ext uri="{FF2B5EF4-FFF2-40B4-BE49-F238E27FC236}">
+              <a16:creationId xmlns:a16="http://schemas.microsoft.com/office/drawing/2014/main" id="{65A58632-B8BA-6BC6-43CD-68F8264129EB}"/>
+            </a:ext>
+          </a:extLst>
+        </p:cNvPr>
+        <p:cNvGrpSpPr/>
+        <p:nvPr/>
+      </p:nvGrpSpPr>
+      <p:grpSpPr>
+        <a:xfrm>
+          <a:off x="0" y="0"/>
+          <a:ext cx="0" cy="0"/>
+          <a:chOff x="0" y="0"/>
+          <a:chExt cx="0" cy="0"/>
+        </a:xfrm>
+      </p:grpSpPr>
+      <p:sp>
+        <p:nvSpPr>
+          <p:cNvPr id="2" name="Title 1">
+            <a:extLst>
+              <a:ext uri="{FF2B5EF4-FFF2-40B4-BE49-F238E27FC236}">
+                <a16:creationId xmlns:a16="http://schemas.microsoft.com/office/drawing/2014/main" id="{BB1BF15C-A188-EEA6-E72C-E4F500CFB216}"/>
+              </a:ext>
+            </a:extLst>
+          </p:cNvPr>
+          <p:cNvSpPr>
+            <a:spLocks noGrp="1"/>
+          </p:cNvSpPr>
+          <p:nvPr>
+            <p:ph type="title"/>
+          </p:nvPr>
+        </p:nvSpPr>
+        <p:spPr/>
+        <p:txBody>
+          <a:bodyPr/>
+          <a:lstStyle/>
+          <a:p>
+            <a:r>
+              <a:rPr lang="en-CH" dirty="0"/>
+              <a:t>Basic Statistics Table</a:t>
+            </a:r>
+          </a:p>
+        </p:txBody>
+      </p:sp>
+      <p:sp>
+        <p:nvSpPr>
+          <p:cNvPr id="3" name="Content Placeholder 2">
+            <a:extLst>
+              <a:ext uri="{FF2B5EF4-FFF2-40B4-BE49-F238E27FC236}">
+                <a16:creationId xmlns:a16="http://schemas.microsoft.com/office/drawing/2014/main" id="{9F5A5AA5-8C9B-4172-09A8-4656725C2BD5}"/>
+              </a:ext>
+            </a:extLst>
+          </p:cNvPr>
+          <p:cNvSpPr>
+            <a:spLocks noGrp="1"/>
+          </p:cNvSpPr>
+          <p:nvPr>
+            <p:ph idx="1"/>
+          </p:nvPr>
+        </p:nvSpPr>
+        <p:spPr>
+          <a:xfrm>
+            <a:off x="838200" y="1046481"/>
+            <a:ext cx="10515600" cy="752475"/>
+          </a:xfrm>
+        </p:spPr>
+        <p:txBody>
+          <a:bodyPr>
+            <a:normAutofit fontScale="25000" lnSpcReduction="20000"/>
+          </a:bodyPr>
+          <a:lstStyle/>
+          <a:p>
+            <a:pPr>
+              <a:lnSpc>
+                <a:spcPct val="120000"/>
+              </a:lnSpc>
+            </a:pPr>
+            <a:r>
+              <a:rPr lang="en-GB" sz="8000" dirty="0"/>
+              <a:t>You can create basic statistics to easily understand the distribution and variability of your data and identify outliers and unusual values.</a:t>
+            </a:r>
+            <a:br>
+              <a:rPr lang="en-CH" dirty="0"/>
+            </a:br>
+            <a:endParaRPr lang="en-CH" dirty="0"/>
+          </a:p>
+        </p:txBody>
+      </p:sp>
+      <p:pic>
+        <p:nvPicPr>
+          <p:cNvPr id="12" name="Picture 11">
+            <a:extLst>
+              <a:ext uri="{FF2B5EF4-FFF2-40B4-BE49-F238E27FC236}">
+                <a16:creationId xmlns:a16="http://schemas.microsoft.com/office/drawing/2014/main" id="{7D51E73E-0003-7269-6F02-6E8E5E2DC0E3}"/>
+              </a:ext>
+            </a:extLst>
+          </p:cNvPr>
+          <p:cNvPicPr>
+            <a:picLocks noChangeAspect="1"/>
+          </p:cNvPicPr>
+          <p:nvPr/>
+        </p:nvPicPr>
+        <p:blipFill>
+          <a:blip r:embed="rId2"/>
+          <a:stretch>
+            <a:fillRect/>
+          </a:stretch>
+        </p:blipFill>
+        <p:spPr>
+          <a:xfrm>
+            <a:off x="4264572" y="3412406"/>
+            <a:ext cx="7777835" cy="3080469"/>
+          </a:xfrm>
+          <a:prstGeom prst="rect">
+            <a:avLst/>
+          </a:prstGeom>
+        </p:spPr>
+      </p:pic>
+      <p:pic>
+        <p:nvPicPr>
+          <p:cNvPr id="14" name="Picture 13">
+            <a:extLst>
+              <a:ext uri="{FF2B5EF4-FFF2-40B4-BE49-F238E27FC236}">
+                <a16:creationId xmlns:a16="http://schemas.microsoft.com/office/drawing/2014/main" id="{949A66FE-8CE6-4A34-BD9F-91116195729C}"/>
+              </a:ext>
+            </a:extLst>
+          </p:cNvPr>
+          <p:cNvPicPr>
+            <a:picLocks noChangeAspect="1"/>
+          </p:cNvPicPr>
+          <p:nvPr/>
+        </p:nvPicPr>
+        <p:blipFill>
+          <a:blip r:embed="rId3"/>
+          <a:stretch>
+            <a:fillRect/>
+          </a:stretch>
+        </p:blipFill>
+        <p:spPr>
+          <a:xfrm>
+            <a:off x="149593" y="2001407"/>
+            <a:ext cx="4075147" cy="3138964"/>
+          </a:xfrm>
+          <a:prstGeom prst="rect">
+            <a:avLst/>
+          </a:prstGeom>
+        </p:spPr>
+      </p:pic>
+    </p:spTree>
+    <p:extLst>
+      <p:ext uri="{BB962C8B-B14F-4D97-AF65-F5344CB8AC3E}">
+        <p14:creationId xmlns:p14="http://schemas.microsoft.com/office/powerpoint/2010/main" val="4078340194"/>
+      </p:ext>
+    </p:extLst>
+  </p:cSld>
+  <p:clrMapOvr>
+    <a:masterClrMapping/>
+  </p:clrMapOvr>
+</p:sld>
+</file>
+
+<file path=ppt/slides/slide31.xml><?xml version="1.0" encoding="utf-8"?>
+<p:sld xmlns:a="http://schemas.openxmlformats.org/drawingml/2006/main" xmlns:r="http://schemas.openxmlformats.org/officeDocument/2006/relationships" xmlns:p="http://schemas.openxmlformats.org/presentationml/2006/main">
+  <p:cSld>
+    <p:spTree>
+      <p:nvGrpSpPr>
+        <p:cNvPr id="1" name="">
+          <a:extLst>
+            <a:ext uri="{FF2B5EF4-FFF2-40B4-BE49-F238E27FC236}">
+              <a16:creationId xmlns:a16="http://schemas.microsoft.com/office/drawing/2014/main" id="{BF19C98C-E96B-2269-B52E-5E4404A20E86}"/>
+            </a:ext>
+          </a:extLst>
+        </p:cNvPr>
+        <p:cNvGrpSpPr/>
+        <p:nvPr/>
+      </p:nvGrpSpPr>
+      <p:grpSpPr>
+        <a:xfrm>
+          <a:off x="0" y="0"/>
+          <a:ext cx="0" cy="0"/>
+          <a:chOff x="0" y="0"/>
+          <a:chExt cx="0" cy="0"/>
+        </a:xfrm>
+      </p:grpSpPr>
+      <p:sp>
+        <p:nvSpPr>
+          <p:cNvPr id="2" name="Title 1">
+            <a:extLst>
+              <a:ext uri="{FF2B5EF4-FFF2-40B4-BE49-F238E27FC236}">
+                <a16:creationId xmlns:a16="http://schemas.microsoft.com/office/drawing/2014/main" id="{8AE24323-3603-FFB6-1F05-7F9973489A0F}"/>
+              </a:ext>
+            </a:extLst>
+          </p:cNvPr>
+          <p:cNvSpPr>
+            <a:spLocks noGrp="1"/>
+          </p:cNvSpPr>
+          <p:nvPr>
+            <p:ph type="title"/>
+          </p:nvPr>
+        </p:nvSpPr>
+        <p:spPr/>
+        <p:txBody>
+          <a:bodyPr/>
+          <a:lstStyle/>
+          <a:p>
+            <a:r>
+              <a:rPr lang="en-CH" dirty="0"/>
+              <a:t>Basic Pivot Table</a:t>
+            </a:r>
+          </a:p>
+        </p:txBody>
+      </p:sp>
+      <p:sp>
+        <p:nvSpPr>
+          <p:cNvPr id="3" name="Content Placeholder 2">
+            <a:extLst>
+              <a:ext uri="{FF2B5EF4-FFF2-40B4-BE49-F238E27FC236}">
+                <a16:creationId xmlns:a16="http://schemas.microsoft.com/office/drawing/2014/main" id="{67ECFB99-3B44-D95C-DDF9-3142F3E0B1EA}"/>
+              </a:ext>
+            </a:extLst>
+          </p:cNvPr>
+          <p:cNvSpPr>
+            <a:spLocks noGrp="1"/>
+          </p:cNvSpPr>
+          <p:nvPr>
+            <p:ph idx="1"/>
+          </p:nvPr>
+        </p:nvSpPr>
+        <p:spPr>
+          <a:xfrm>
+            <a:off x="838200" y="1117601"/>
+            <a:ext cx="10515600" cy="752475"/>
+          </a:xfrm>
+        </p:spPr>
+        <p:txBody>
+          <a:bodyPr>
+            <a:noAutofit/>
+          </a:bodyPr>
+          <a:lstStyle/>
+          <a:p>
+            <a:pPr>
+              <a:lnSpc>
+                <a:spcPct val="120000"/>
+              </a:lnSpc>
+            </a:pPr>
+            <a:r>
+              <a:rPr lang="en-GB" sz="1600" dirty="0"/>
+              <a:t>Pivot tables allow you to quickly aggregate data and compare multiple categories simultaneously. Using </a:t>
+            </a:r>
+            <a:r>
+              <a:rPr lang="en-GB" sz="1600" dirty="0" err="1"/>
+              <a:t>colors</a:t>
+            </a:r>
+            <a:r>
+              <a:rPr lang="en-GB" sz="1600" dirty="0"/>
+              <a:t> based on thresholds allows you to easily spot outliers and irregular values.</a:t>
+            </a:r>
+            <a:br>
+              <a:rPr lang="en-CH" sz="1600" dirty="0"/>
+            </a:br>
+            <a:endParaRPr lang="en-CH" sz="1600" dirty="0"/>
+          </a:p>
+        </p:txBody>
+      </p:sp>
+      <p:pic>
+        <p:nvPicPr>
+          <p:cNvPr id="5" name="Picture 4">
+            <a:extLst>
+              <a:ext uri="{FF2B5EF4-FFF2-40B4-BE49-F238E27FC236}">
+                <a16:creationId xmlns:a16="http://schemas.microsoft.com/office/drawing/2014/main" id="{3FA64A1B-2447-D662-200C-7A4B562EF166}"/>
+              </a:ext>
+            </a:extLst>
+          </p:cNvPr>
+          <p:cNvPicPr>
+            <a:picLocks noChangeAspect="1"/>
+          </p:cNvPicPr>
+          <p:nvPr/>
+        </p:nvPicPr>
+        <p:blipFill>
+          <a:blip r:embed="rId2"/>
+          <a:stretch>
+            <a:fillRect/>
+          </a:stretch>
+        </p:blipFill>
+        <p:spPr>
+          <a:xfrm>
+            <a:off x="5068388" y="2752545"/>
+            <a:ext cx="6748719" cy="3216411"/>
+          </a:xfrm>
+          <a:prstGeom prst="rect">
+            <a:avLst/>
+          </a:prstGeom>
+        </p:spPr>
+      </p:pic>
+      <p:pic>
+        <p:nvPicPr>
+          <p:cNvPr id="7" name="Picture 6">
+            <a:extLst>
+              <a:ext uri="{FF2B5EF4-FFF2-40B4-BE49-F238E27FC236}">
+                <a16:creationId xmlns:a16="http://schemas.microsoft.com/office/drawing/2014/main" id="{88F2CA34-09FF-74F8-8B38-7A3034A9EAB6}"/>
+              </a:ext>
+            </a:extLst>
+          </p:cNvPr>
+          <p:cNvPicPr>
+            <a:picLocks noChangeAspect="1"/>
+          </p:cNvPicPr>
+          <p:nvPr/>
+        </p:nvPicPr>
+        <p:blipFill>
+          <a:blip r:embed="rId3"/>
+          <a:stretch>
+            <a:fillRect/>
+          </a:stretch>
+        </p:blipFill>
+        <p:spPr>
+          <a:xfrm>
+            <a:off x="838200" y="2073276"/>
+            <a:ext cx="4074725" cy="2145434"/>
+          </a:xfrm>
+          <a:prstGeom prst="rect">
+            <a:avLst/>
+          </a:prstGeom>
+        </p:spPr>
+      </p:pic>
+    </p:spTree>
+    <p:extLst>
+      <p:ext uri="{BB962C8B-B14F-4D97-AF65-F5344CB8AC3E}">
+        <p14:creationId xmlns:p14="http://schemas.microsoft.com/office/powerpoint/2010/main" val="747889039"/>
+      </p:ext>
+    </p:extLst>
+  </p:cSld>
+  <p:clrMapOvr>
+    <a:masterClrMapping/>
+  </p:clrMapOvr>
+</p:sld>
+</file>
+
+<file path=ppt/slides/slide32.xml><?xml version="1.0" encoding="utf-8"?>
+<p:sld xmlns:a="http://schemas.openxmlformats.org/drawingml/2006/main" xmlns:r="http://schemas.openxmlformats.org/officeDocument/2006/relationships" xmlns:p="http://schemas.openxmlformats.org/presentationml/2006/main">
+  <p:cSld>
+    <p:spTree>
+      <p:nvGrpSpPr>
+        <p:cNvPr id="1" name="">
+          <a:extLst>
+            <a:ext uri="{FF2B5EF4-FFF2-40B4-BE49-F238E27FC236}">
+              <a16:creationId xmlns:a16="http://schemas.microsoft.com/office/drawing/2014/main" id="{F7193C15-388C-CD4F-F3D0-E75D309806AE}"/>
+            </a:ext>
+          </a:extLst>
+        </p:cNvPr>
+        <p:cNvGrpSpPr/>
+        <p:nvPr/>
+      </p:nvGrpSpPr>
+      <p:grpSpPr>
+        <a:xfrm>
+          <a:off x="0" y="0"/>
+          <a:ext cx="0" cy="0"/>
+          <a:chOff x="0" y="0"/>
+          <a:chExt cx="0" cy="0"/>
+        </a:xfrm>
+      </p:grpSpPr>
+      <p:sp>
+        <p:nvSpPr>
+          <p:cNvPr id="2" name="Title 1">
+            <a:extLst>
+              <a:ext uri="{FF2B5EF4-FFF2-40B4-BE49-F238E27FC236}">
+                <a16:creationId xmlns:a16="http://schemas.microsoft.com/office/drawing/2014/main" id="{DC0240C0-BC59-02C5-07BD-A4B38D33596A}"/>
+              </a:ext>
+            </a:extLst>
+          </p:cNvPr>
+          <p:cNvSpPr>
+            <a:spLocks noGrp="1"/>
+          </p:cNvSpPr>
+          <p:nvPr>
+            <p:ph type="title"/>
+          </p:nvPr>
+        </p:nvSpPr>
+        <p:spPr/>
+        <p:txBody>
+          <a:bodyPr/>
+          <a:lstStyle/>
+          <a:p>
+            <a:r>
+              <a:rPr lang="en-CH" dirty="0"/>
+              <a:t>Frequency Distribution Table</a:t>
+            </a:r>
+          </a:p>
+        </p:txBody>
+      </p:sp>
+      <p:sp>
+        <p:nvSpPr>
+          <p:cNvPr id="3" name="Content Placeholder 2">
+            <a:extLst>
+              <a:ext uri="{FF2B5EF4-FFF2-40B4-BE49-F238E27FC236}">
+                <a16:creationId xmlns:a16="http://schemas.microsoft.com/office/drawing/2014/main" id="{561B4196-7668-235C-A15A-376FA195E686}"/>
+              </a:ext>
+            </a:extLst>
+          </p:cNvPr>
+          <p:cNvSpPr>
+            <a:spLocks noGrp="1"/>
+          </p:cNvSpPr>
+          <p:nvPr>
+            <p:ph idx="1"/>
+          </p:nvPr>
+        </p:nvSpPr>
+        <p:spPr>
+          <a:xfrm>
+            <a:off x="838200" y="1117601"/>
+            <a:ext cx="10515600" cy="752475"/>
+          </a:xfrm>
+        </p:spPr>
+        <p:txBody>
+          <a:bodyPr>
+            <a:noAutofit/>
+          </a:bodyPr>
+          <a:lstStyle/>
+          <a:p>
+            <a:pPr>
+              <a:lnSpc>
+                <a:spcPct val="120000"/>
+              </a:lnSpc>
+            </a:pPr>
+            <a:r>
+              <a:rPr lang="en-GB" sz="1600" dirty="0"/>
+              <a:t>Using a table that shows frequency distribution helps you understand  the distribution of your data and allows you to identify dominant ranges(e.g. most sold products or dominant customer age etc...)</a:t>
+            </a:r>
+            <a:br>
+              <a:rPr lang="en-CH" sz="1600" dirty="0"/>
+            </a:br>
+            <a:endParaRPr lang="en-CH" sz="1600" dirty="0"/>
+          </a:p>
+        </p:txBody>
+      </p:sp>
+      <p:pic>
+        <p:nvPicPr>
+          <p:cNvPr id="6" name="Picture 5">
+            <a:extLst>
+              <a:ext uri="{FF2B5EF4-FFF2-40B4-BE49-F238E27FC236}">
+                <a16:creationId xmlns:a16="http://schemas.microsoft.com/office/drawing/2014/main" id="{5292C9EB-2E19-9735-5A5A-71C3427FA230}"/>
+              </a:ext>
+            </a:extLst>
+          </p:cNvPr>
+          <p:cNvPicPr>
+            <a:picLocks noChangeAspect="1"/>
+          </p:cNvPicPr>
+          <p:nvPr/>
+        </p:nvPicPr>
+        <p:blipFill>
+          <a:blip r:embed="rId2"/>
+          <a:stretch>
+            <a:fillRect/>
+          </a:stretch>
+        </p:blipFill>
+        <p:spPr>
+          <a:xfrm>
+            <a:off x="4937760" y="2654693"/>
+            <a:ext cx="6624170" cy="3131426"/>
+          </a:xfrm>
+          <a:prstGeom prst="rect">
+            <a:avLst/>
+          </a:prstGeom>
+        </p:spPr>
+      </p:pic>
+      <p:pic>
+        <p:nvPicPr>
+          <p:cNvPr id="9" name="Picture 8">
+            <a:extLst>
+              <a:ext uri="{FF2B5EF4-FFF2-40B4-BE49-F238E27FC236}">
+                <a16:creationId xmlns:a16="http://schemas.microsoft.com/office/drawing/2014/main" id="{9A87A867-4ECB-7737-27C5-68F048F9E396}"/>
+              </a:ext>
+            </a:extLst>
+          </p:cNvPr>
+          <p:cNvPicPr>
+            <a:picLocks noChangeAspect="1"/>
+          </p:cNvPicPr>
+          <p:nvPr/>
+        </p:nvPicPr>
+        <p:blipFill>
+          <a:blip r:embed="rId3"/>
+          <a:stretch>
+            <a:fillRect/>
+          </a:stretch>
+        </p:blipFill>
+        <p:spPr>
+          <a:xfrm>
+            <a:off x="697184" y="1870076"/>
+            <a:ext cx="3935047" cy="2510856"/>
+          </a:xfrm>
+          <a:prstGeom prst="rect">
+            <a:avLst/>
+          </a:prstGeom>
+        </p:spPr>
+      </p:pic>
+    </p:spTree>
+    <p:extLst>
+      <p:ext uri="{BB962C8B-B14F-4D97-AF65-F5344CB8AC3E}">
+        <p14:creationId xmlns:p14="http://schemas.microsoft.com/office/powerpoint/2010/main" val="2695054064"/>
+      </p:ext>
+    </p:extLst>
+  </p:cSld>
+  <p:clrMapOvr>
+    <a:masterClrMapping/>
+  </p:clrMapOvr>
+</p:sld>
+</file>
+
+<file path=ppt/slides/slide33.xml><?xml version="1.0" encoding="utf-8"?>
+<p:sld xmlns:a="http://schemas.openxmlformats.org/drawingml/2006/main" xmlns:r="http://schemas.openxmlformats.org/officeDocument/2006/relationships" xmlns:p="http://schemas.openxmlformats.org/presentationml/2006/main">
+  <p:cSld>
+    <p:spTree>
+      <p:nvGrpSpPr>
+        <p:cNvPr id="1" name="">
+          <a:extLst>
+            <a:ext uri="{FF2B5EF4-FFF2-40B4-BE49-F238E27FC236}">
+              <a16:creationId xmlns:a16="http://schemas.microsoft.com/office/drawing/2014/main" id="{2F859947-7FA3-6BF6-029E-B421BE105ACF}"/>
+            </a:ext>
+          </a:extLst>
+        </p:cNvPr>
+        <p:cNvGrpSpPr/>
+        <p:nvPr/>
+      </p:nvGrpSpPr>
+      <p:grpSpPr>
+        <a:xfrm>
+          <a:off x="0" y="0"/>
+          <a:ext cx="0" cy="0"/>
+          <a:chOff x="0" y="0"/>
+          <a:chExt cx="0" cy="0"/>
+        </a:xfrm>
+      </p:grpSpPr>
+      <p:sp>
+        <p:nvSpPr>
+          <p:cNvPr id="2" name="Title 1">
+            <a:extLst>
+              <a:ext uri="{FF2B5EF4-FFF2-40B4-BE49-F238E27FC236}">
+                <a16:creationId xmlns:a16="http://schemas.microsoft.com/office/drawing/2014/main" id="{81C77C0E-41E8-1C4E-E319-7E7059B6D28E}"/>
+              </a:ext>
+            </a:extLst>
+          </p:cNvPr>
+          <p:cNvSpPr>
+            <a:spLocks noGrp="1"/>
+          </p:cNvSpPr>
+          <p:nvPr>
+            <p:ph type="title"/>
+          </p:nvPr>
+        </p:nvSpPr>
+        <p:spPr/>
+        <p:txBody>
+          <a:bodyPr/>
+          <a:lstStyle/>
+          <a:p>
+            <a:r>
+              <a:rPr lang="en-CH" dirty="0"/>
+              <a:t>Charts</a:t>
+            </a:r>
+          </a:p>
+        </p:txBody>
+      </p:sp>
+      <p:sp>
+        <p:nvSpPr>
+          <p:cNvPr id="3" name="Content Placeholder 2">
+            <a:extLst>
+              <a:ext uri="{FF2B5EF4-FFF2-40B4-BE49-F238E27FC236}">
+                <a16:creationId xmlns:a16="http://schemas.microsoft.com/office/drawing/2014/main" id="{042B8AFC-DE03-7C46-635A-04FA27DB46A5}"/>
+              </a:ext>
+            </a:extLst>
+          </p:cNvPr>
+          <p:cNvSpPr>
+            <a:spLocks noGrp="1"/>
+          </p:cNvSpPr>
+          <p:nvPr>
+            <p:ph idx="1"/>
+          </p:nvPr>
+        </p:nvSpPr>
+        <p:spPr>
+          <a:xfrm>
+            <a:off x="785948" y="1117600"/>
+            <a:ext cx="10515600" cy="752475"/>
+          </a:xfrm>
+        </p:spPr>
+        <p:txBody>
+          <a:bodyPr>
+            <a:noAutofit/>
+          </a:bodyPr>
+          <a:lstStyle/>
+          <a:p>
+            <a:pPr>
+              <a:lnSpc>
+                <a:spcPct val="120000"/>
+              </a:lnSpc>
+            </a:pPr>
+            <a:r>
+              <a:rPr lang="en-CH" sz="2000" dirty="0"/>
+              <a:t>You have the possibility to show your data in various chart types: Line | Area | Bar | Scatter | Stepped Line | Stepped Area | Spark Line | Spark Bar | Pie | Doughnut | Radar | Polar</a:t>
+            </a:r>
+            <a:br>
+              <a:rPr lang="en-CH" sz="2000" dirty="0"/>
+            </a:br>
+            <a:endParaRPr lang="en-CH" sz="2000" dirty="0"/>
+          </a:p>
+        </p:txBody>
+      </p:sp>
+      <p:pic>
+        <p:nvPicPr>
+          <p:cNvPr id="5" name="Picture 4">
+            <a:extLst>
+              <a:ext uri="{FF2B5EF4-FFF2-40B4-BE49-F238E27FC236}">
+                <a16:creationId xmlns:a16="http://schemas.microsoft.com/office/drawing/2014/main" id="{C62C2D90-1A78-4475-E270-A73705FBC208}"/>
+              </a:ext>
+            </a:extLst>
+          </p:cNvPr>
+          <p:cNvPicPr>
+            <a:picLocks noChangeAspect="1"/>
+          </p:cNvPicPr>
+          <p:nvPr/>
+        </p:nvPicPr>
+        <p:blipFill>
+          <a:blip r:embed="rId2"/>
+          <a:stretch>
+            <a:fillRect/>
+          </a:stretch>
+        </p:blipFill>
+        <p:spPr>
+          <a:xfrm>
+            <a:off x="289467" y="2044088"/>
+            <a:ext cx="2038632" cy="1949996"/>
+          </a:xfrm>
+          <a:prstGeom prst="rect">
+            <a:avLst/>
+          </a:prstGeom>
+        </p:spPr>
+      </p:pic>
+      <p:pic>
+        <p:nvPicPr>
+          <p:cNvPr id="7" name="Picture 6">
+            <a:extLst>
+              <a:ext uri="{FF2B5EF4-FFF2-40B4-BE49-F238E27FC236}">
+                <a16:creationId xmlns:a16="http://schemas.microsoft.com/office/drawing/2014/main" id="{1EE43173-489B-221D-8438-4C5823A6798F}"/>
+              </a:ext>
+            </a:extLst>
+          </p:cNvPr>
+          <p:cNvPicPr>
+            <a:picLocks noChangeAspect="1"/>
+          </p:cNvPicPr>
+          <p:nvPr/>
+        </p:nvPicPr>
+        <p:blipFill>
+          <a:blip r:embed="rId3"/>
+          <a:stretch>
+            <a:fillRect/>
+          </a:stretch>
+        </p:blipFill>
+        <p:spPr>
+          <a:xfrm>
+            <a:off x="2529418" y="2041924"/>
+            <a:ext cx="2015340" cy="1949996"/>
+          </a:xfrm>
+          <a:prstGeom prst="rect">
+            <a:avLst/>
+          </a:prstGeom>
+        </p:spPr>
+      </p:pic>
+      <p:pic>
+        <p:nvPicPr>
+          <p:cNvPr id="9" name="Picture 8">
+            <a:extLst>
+              <a:ext uri="{FF2B5EF4-FFF2-40B4-BE49-F238E27FC236}">
+                <a16:creationId xmlns:a16="http://schemas.microsoft.com/office/drawing/2014/main" id="{B128218B-6220-B963-6CA4-8FD5BCB00902}"/>
+              </a:ext>
+            </a:extLst>
+          </p:cNvPr>
+          <p:cNvPicPr>
+            <a:picLocks noChangeAspect="1"/>
+          </p:cNvPicPr>
+          <p:nvPr/>
+        </p:nvPicPr>
+        <p:blipFill>
+          <a:blip r:embed="rId4"/>
+          <a:stretch>
+            <a:fillRect/>
+          </a:stretch>
+        </p:blipFill>
+        <p:spPr>
+          <a:xfrm>
+            <a:off x="4783337" y="2041924"/>
+            <a:ext cx="2026196" cy="1949996"/>
+          </a:xfrm>
+          <a:prstGeom prst="rect">
+            <a:avLst/>
+          </a:prstGeom>
+        </p:spPr>
+      </p:pic>
+      <p:pic>
+        <p:nvPicPr>
+          <p:cNvPr id="12" name="Picture 11">
+            <a:extLst>
+              <a:ext uri="{FF2B5EF4-FFF2-40B4-BE49-F238E27FC236}">
+                <a16:creationId xmlns:a16="http://schemas.microsoft.com/office/drawing/2014/main" id="{A9C2F166-5EED-8213-038E-E3FF26D869F9}"/>
+              </a:ext>
+            </a:extLst>
+          </p:cNvPr>
+          <p:cNvPicPr>
+            <a:picLocks noChangeAspect="1"/>
+          </p:cNvPicPr>
+          <p:nvPr/>
+        </p:nvPicPr>
+        <p:blipFill>
+          <a:blip r:embed="rId5"/>
+          <a:stretch>
+            <a:fillRect/>
+          </a:stretch>
+        </p:blipFill>
+        <p:spPr>
+          <a:xfrm>
+            <a:off x="7019076" y="2041924"/>
+            <a:ext cx="2036279" cy="1949996"/>
+          </a:xfrm>
+          <a:prstGeom prst="rect">
+            <a:avLst/>
+          </a:prstGeom>
+        </p:spPr>
+      </p:pic>
+      <p:pic>
+        <p:nvPicPr>
+          <p:cNvPr id="14" name="Picture 13">
+            <a:extLst>
+              <a:ext uri="{FF2B5EF4-FFF2-40B4-BE49-F238E27FC236}">
+                <a16:creationId xmlns:a16="http://schemas.microsoft.com/office/drawing/2014/main" id="{4D7C10F1-4E17-E20D-83BE-3A955855228F}"/>
+              </a:ext>
+            </a:extLst>
+          </p:cNvPr>
+          <p:cNvPicPr>
+            <a:picLocks noChangeAspect="1"/>
+          </p:cNvPicPr>
+          <p:nvPr/>
+        </p:nvPicPr>
+        <p:blipFill>
+          <a:blip r:embed="rId6"/>
+          <a:stretch>
+            <a:fillRect/>
+          </a:stretch>
+        </p:blipFill>
+        <p:spPr>
+          <a:xfrm>
+            <a:off x="295200" y="4274216"/>
+            <a:ext cx="2039413" cy="1949996"/>
+          </a:xfrm>
+          <a:prstGeom prst="rect">
+            <a:avLst/>
+          </a:prstGeom>
+        </p:spPr>
+      </p:pic>
+      <p:pic>
+        <p:nvPicPr>
+          <p:cNvPr id="16" name="Picture 15">
+            <a:extLst>
+              <a:ext uri="{FF2B5EF4-FFF2-40B4-BE49-F238E27FC236}">
+                <a16:creationId xmlns:a16="http://schemas.microsoft.com/office/drawing/2014/main" id="{C904E044-7D9C-385F-21B3-98DF08E27160}"/>
+              </a:ext>
+            </a:extLst>
+          </p:cNvPr>
+          <p:cNvPicPr>
+            <a:picLocks noChangeAspect="1"/>
+          </p:cNvPicPr>
+          <p:nvPr/>
+        </p:nvPicPr>
+        <p:blipFill>
+          <a:blip r:embed="rId7"/>
+          <a:stretch>
+            <a:fillRect/>
+          </a:stretch>
+        </p:blipFill>
+        <p:spPr>
+          <a:xfrm>
+            <a:off x="2535950" y="4274215"/>
+            <a:ext cx="2038632" cy="1963126"/>
+          </a:xfrm>
+          <a:prstGeom prst="rect">
+            <a:avLst/>
+          </a:prstGeom>
+        </p:spPr>
+      </p:pic>
+      <p:grpSp>
+        <p:nvGrpSpPr>
+          <p:cNvPr id="23" name="Group 22">
+            <a:extLst>
+              <a:ext uri="{FF2B5EF4-FFF2-40B4-BE49-F238E27FC236}">
+                <a16:creationId xmlns:a16="http://schemas.microsoft.com/office/drawing/2014/main" id="{07D05373-9596-2751-186F-3490930E2134}"/>
+              </a:ext>
+            </a:extLst>
+          </p:cNvPr>
+          <p:cNvGrpSpPr/>
+          <p:nvPr/>
+        </p:nvGrpSpPr>
+        <p:grpSpPr>
+          <a:xfrm>
+            <a:off x="4789868" y="4336068"/>
+            <a:ext cx="1992689" cy="1817509"/>
+            <a:chOff x="5950476" y="4423066"/>
+            <a:chExt cx="2307464" cy="2147812"/>
+          </a:xfrm>
+        </p:grpSpPr>
+        <p:pic>
+          <p:nvPicPr>
+            <p:cNvPr id="18" name="Picture 17">
+              <a:extLst>
+                <a:ext uri="{FF2B5EF4-FFF2-40B4-BE49-F238E27FC236}">
+                  <a16:creationId xmlns:a16="http://schemas.microsoft.com/office/drawing/2014/main" id="{7C3FF282-3B15-C4AE-0F52-100CFC2D8911}"/>
+                </a:ext>
+              </a:extLst>
+            </p:cNvPr>
+            <p:cNvPicPr>
+              <a:picLocks noChangeAspect="1"/>
+            </p:cNvPicPr>
+            <p:nvPr/>
+          </p:nvPicPr>
+          <p:blipFill>
+            <a:blip r:embed="rId8"/>
+            <a:stretch>
+              <a:fillRect/>
+            </a:stretch>
+          </p:blipFill>
+          <p:spPr>
+            <a:xfrm>
+              <a:off x="5950476" y="4423066"/>
+              <a:ext cx="2307464" cy="667032"/>
+            </a:xfrm>
+            <a:prstGeom prst="rect">
+              <a:avLst/>
+            </a:prstGeom>
+          </p:spPr>
+        </p:pic>
+        <p:pic>
+          <p:nvPicPr>
+            <p:cNvPr id="20" name="Picture 19">
+              <a:extLst>
+                <a:ext uri="{FF2B5EF4-FFF2-40B4-BE49-F238E27FC236}">
+                  <a16:creationId xmlns:a16="http://schemas.microsoft.com/office/drawing/2014/main" id="{CFA68071-9029-DFE7-0F14-63509BF62FE6}"/>
+                </a:ext>
+              </a:extLst>
+            </p:cNvPr>
+            <p:cNvPicPr>
+              <a:picLocks noChangeAspect="1"/>
+            </p:cNvPicPr>
+            <p:nvPr/>
+          </p:nvPicPr>
+          <p:blipFill>
+            <a:blip r:embed="rId9"/>
+            <a:stretch>
+              <a:fillRect/>
+            </a:stretch>
+          </p:blipFill>
+          <p:spPr>
+            <a:xfrm>
+              <a:off x="5950476" y="5090098"/>
+              <a:ext cx="2307464" cy="700757"/>
+            </a:xfrm>
+            <a:prstGeom prst="rect">
+              <a:avLst/>
+            </a:prstGeom>
+          </p:spPr>
+        </p:pic>
+        <p:pic>
+          <p:nvPicPr>
+            <p:cNvPr id="22" name="Picture 21">
+              <a:extLst>
+                <a:ext uri="{FF2B5EF4-FFF2-40B4-BE49-F238E27FC236}">
+                  <a16:creationId xmlns:a16="http://schemas.microsoft.com/office/drawing/2014/main" id="{E3E8B290-1C28-967D-BE0D-2973AA28C578}"/>
+                </a:ext>
+              </a:extLst>
+            </p:cNvPr>
+            <p:cNvPicPr>
+              <a:picLocks noChangeAspect="1"/>
+            </p:cNvPicPr>
+            <p:nvPr/>
+          </p:nvPicPr>
+          <p:blipFill>
+            <a:blip r:embed="rId10"/>
+            <a:stretch>
+              <a:fillRect/>
+            </a:stretch>
+          </p:blipFill>
+          <p:spPr>
+            <a:xfrm>
+              <a:off x="5950476" y="5883630"/>
+              <a:ext cx="2307464" cy="687248"/>
+            </a:xfrm>
+            <a:prstGeom prst="rect">
+              <a:avLst/>
+            </a:prstGeom>
+          </p:spPr>
+        </p:pic>
+      </p:grpSp>
+      <p:pic>
+        <p:nvPicPr>
+          <p:cNvPr id="25" name="Picture 24">
+            <a:extLst>
+              <a:ext uri="{FF2B5EF4-FFF2-40B4-BE49-F238E27FC236}">
+                <a16:creationId xmlns:a16="http://schemas.microsoft.com/office/drawing/2014/main" id="{378EB05B-61C3-DDA5-8C14-B3AC90E81E94}"/>
+              </a:ext>
+            </a:extLst>
+          </p:cNvPr>
+          <p:cNvPicPr>
+            <a:picLocks noChangeAspect="1"/>
+          </p:cNvPicPr>
+          <p:nvPr/>
+        </p:nvPicPr>
+        <p:blipFill>
+          <a:blip r:embed="rId11"/>
+          <a:stretch>
+            <a:fillRect/>
+          </a:stretch>
+        </p:blipFill>
+        <p:spPr>
+          <a:xfrm>
+            <a:off x="7008771" y="4359084"/>
+            <a:ext cx="1936122" cy="946910"/>
+          </a:xfrm>
+          <a:prstGeom prst="rect">
+            <a:avLst/>
+          </a:prstGeom>
+        </p:spPr>
+      </p:pic>
+      <p:pic>
+        <p:nvPicPr>
+          <p:cNvPr id="27" name="Picture 26">
+            <a:extLst>
+              <a:ext uri="{FF2B5EF4-FFF2-40B4-BE49-F238E27FC236}">
+                <a16:creationId xmlns:a16="http://schemas.microsoft.com/office/drawing/2014/main" id="{EDED4881-F6D2-B294-37BB-014B6903C0BA}"/>
+              </a:ext>
+            </a:extLst>
+          </p:cNvPr>
+          <p:cNvPicPr>
+            <a:picLocks noChangeAspect="1"/>
+          </p:cNvPicPr>
+          <p:nvPr/>
+        </p:nvPicPr>
+        <p:blipFill>
+          <a:blip r:embed="rId12"/>
+          <a:stretch>
+            <a:fillRect/>
+          </a:stretch>
+        </p:blipFill>
+        <p:spPr>
+          <a:xfrm>
+            <a:off x="7078075" y="5391689"/>
+            <a:ext cx="1868219" cy="950326"/>
+          </a:xfrm>
+          <a:prstGeom prst="rect">
+            <a:avLst/>
+          </a:prstGeom>
+        </p:spPr>
+      </p:pic>
+      <p:pic>
+        <p:nvPicPr>
+          <p:cNvPr id="29" name="Picture 28">
+            <a:extLst>
+              <a:ext uri="{FF2B5EF4-FFF2-40B4-BE49-F238E27FC236}">
+                <a16:creationId xmlns:a16="http://schemas.microsoft.com/office/drawing/2014/main" id="{37779B64-62AF-49FA-28E7-7BCBD8EC10DF}"/>
+              </a:ext>
+            </a:extLst>
+          </p:cNvPr>
+          <p:cNvPicPr>
+            <a:picLocks noChangeAspect="1"/>
+          </p:cNvPicPr>
+          <p:nvPr/>
+        </p:nvPicPr>
+        <p:blipFill>
+          <a:blip r:embed="rId13"/>
+          <a:stretch>
+            <a:fillRect/>
+          </a:stretch>
+        </p:blipFill>
+        <p:spPr>
+          <a:xfrm>
+            <a:off x="9135298" y="2041923"/>
+            <a:ext cx="2432911" cy="1990201"/>
+          </a:xfrm>
+          <a:prstGeom prst="rect">
+            <a:avLst/>
+          </a:prstGeom>
+        </p:spPr>
+      </p:pic>
+      <p:pic>
+        <p:nvPicPr>
+          <p:cNvPr id="32" name="Picture 31">
+            <a:extLst>
+              <a:ext uri="{FF2B5EF4-FFF2-40B4-BE49-F238E27FC236}">
+                <a16:creationId xmlns:a16="http://schemas.microsoft.com/office/drawing/2014/main" id="{AD1AA51E-E956-F1C9-1B90-219477FBA655}"/>
+              </a:ext>
+            </a:extLst>
+          </p:cNvPr>
+          <p:cNvPicPr>
+            <a:picLocks noChangeAspect="1"/>
+          </p:cNvPicPr>
+          <p:nvPr/>
+        </p:nvPicPr>
+        <p:blipFill>
+          <a:blip r:embed="rId14"/>
+          <a:stretch>
+            <a:fillRect/>
+          </a:stretch>
+        </p:blipFill>
+        <p:spPr>
+          <a:xfrm>
+            <a:off x="9424209" y="4351649"/>
+            <a:ext cx="2077969" cy="1854983"/>
+          </a:xfrm>
+          <a:prstGeom prst="rect">
+            <a:avLst/>
+          </a:prstGeom>
+        </p:spPr>
+      </p:pic>
+    </p:spTree>
+    <p:extLst>
+      <p:ext uri="{BB962C8B-B14F-4D97-AF65-F5344CB8AC3E}">
+        <p14:creationId xmlns:p14="http://schemas.microsoft.com/office/powerpoint/2010/main" val="2238188747"/>
+      </p:ext>
+    </p:extLst>
+  </p:cSld>
+  <p:clrMapOvr>
+    <a:masterClrMapping/>
+  </p:clrMapOvr>
+</p:sld>
+</file>
+
+<file path=ppt/slides/slide34.xml><?xml version="1.0" encoding="utf-8"?>
+<p:sld xmlns:a="http://schemas.openxmlformats.org/drawingml/2006/main" xmlns:r="http://schemas.openxmlformats.org/officeDocument/2006/relationships" xmlns:p="http://schemas.openxmlformats.org/presentationml/2006/main">
+  <p:cSld>
+    <p:spTree>
+      <p:nvGrpSpPr>
+        <p:cNvPr id="1" name="">
+          <a:extLst>
+            <a:ext uri="{FF2B5EF4-FFF2-40B4-BE49-F238E27FC236}">
+              <a16:creationId xmlns:a16="http://schemas.microsoft.com/office/drawing/2014/main" id="{1F9BF6FD-138E-5148-C216-481D71124255}"/>
+            </a:ext>
+          </a:extLst>
+        </p:cNvPr>
+        <p:cNvGrpSpPr/>
+        <p:nvPr/>
+      </p:nvGrpSpPr>
+      <p:grpSpPr>
+        <a:xfrm>
+          <a:off x="0" y="0"/>
+          <a:ext cx="0" cy="0"/>
+          <a:chOff x="0" y="0"/>
+          <a:chExt cx="0" cy="0"/>
+        </a:xfrm>
+      </p:grpSpPr>
+      <p:sp>
+        <p:nvSpPr>
+          <p:cNvPr id="2" name="Title 1">
+            <a:extLst>
+              <a:ext uri="{FF2B5EF4-FFF2-40B4-BE49-F238E27FC236}">
+                <a16:creationId xmlns:a16="http://schemas.microsoft.com/office/drawing/2014/main" id="{6C7A0EAD-7211-15E8-5BEF-1B6DDAD10A9A}"/>
+              </a:ext>
+            </a:extLst>
+          </p:cNvPr>
+          <p:cNvSpPr>
+            <a:spLocks noGrp="1"/>
+          </p:cNvSpPr>
+          <p:nvPr>
+            <p:ph type="title"/>
+          </p:nvPr>
+        </p:nvSpPr>
+        <p:spPr/>
+        <p:txBody>
+          <a:bodyPr/>
+          <a:lstStyle/>
+          <a:p>
+            <a:r>
+              <a:rPr lang="en-CH" dirty="0"/>
+              <a:t>Category Bar Charts</a:t>
+            </a:r>
+          </a:p>
+        </p:txBody>
+      </p:sp>
+      <p:sp>
+        <p:nvSpPr>
+          <p:cNvPr id="3" name="Content Placeholder 2">
+            <a:extLst>
+              <a:ext uri="{FF2B5EF4-FFF2-40B4-BE49-F238E27FC236}">
+                <a16:creationId xmlns:a16="http://schemas.microsoft.com/office/drawing/2014/main" id="{8AA1D8EE-12B1-B7EB-7506-540259AEF974}"/>
+              </a:ext>
+            </a:extLst>
+          </p:cNvPr>
+          <p:cNvSpPr>
+            <a:spLocks noGrp="1"/>
+          </p:cNvSpPr>
+          <p:nvPr>
+            <p:ph idx="1"/>
+          </p:nvPr>
+        </p:nvSpPr>
+        <p:spPr>
+          <a:xfrm>
+            <a:off x="785948" y="1117600"/>
+            <a:ext cx="10515600" cy="752475"/>
+          </a:xfrm>
+        </p:spPr>
+        <p:txBody>
+          <a:bodyPr>
+            <a:noAutofit/>
+          </a:bodyPr>
+          <a:lstStyle/>
+          <a:p>
+            <a:pPr>
+              <a:lnSpc>
+                <a:spcPct val="120000"/>
+              </a:lnSpc>
+            </a:pPr>
+            <a:r>
+              <a:rPr lang="en-CH" sz="2000" dirty="0"/>
+              <a:t>Create bar charts based on categories. Helps seeing relations between categories and make quick comparison between the performance of these categories.</a:t>
+            </a:r>
+            <a:br>
+              <a:rPr lang="en-CH" sz="2000" dirty="0"/>
+            </a:br>
+            <a:endParaRPr lang="en-CH" sz="2000" dirty="0"/>
+          </a:p>
+        </p:txBody>
+      </p:sp>
+      <p:pic>
+        <p:nvPicPr>
+          <p:cNvPr id="10" name="Picture 9">
+            <a:extLst>
+              <a:ext uri="{FF2B5EF4-FFF2-40B4-BE49-F238E27FC236}">
+                <a16:creationId xmlns:a16="http://schemas.microsoft.com/office/drawing/2014/main" id="{A2FEA14B-BBD0-E20F-86FE-5E91FD997DF9}"/>
+              </a:ext>
+            </a:extLst>
+          </p:cNvPr>
+          <p:cNvPicPr>
+            <a:picLocks noChangeAspect="1"/>
+          </p:cNvPicPr>
+          <p:nvPr/>
+        </p:nvPicPr>
+        <p:blipFill>
+          <a:blip r:embed="rId2"/>
+          <a:stretch>
+            <a:fillRect/>
+          </a:stretch>
+        </p:blipFill>
+        <p:spPr>
+          <a:xfrm>
+            <a:off x="2512170" y="2073276"/>
+            <a:ext cx="7167659" cy="4093094"/>
+          </a:xfrm>
+          <a:prstGeom prst="rect">
+            <a:avLst/>
+          </a:prstGeom>
+        </p:spPr>
+      </p:pic>
+    </p:spTree>
+    <p:extLst>
+      <p:ext uri="{BB962C8B-B14F-4D97-AF65-F5344CB8AC3E}">
+        <p14:creationId xmlns:p14="http://schemas.microsoft.com/office/powerpoint/2010/main" val="607014391"/>
+      </p:ext>
+    </p:extLst>
+  </p:cSld>
+  <p:clrMapOvr>
+    <a:masterClrMapping/>
+  </p:clrMapOvr>
+</p:sld>
+</file>
+
+<file path=ppt/slides/slide35.xml><?xml version="1.0" encoding="utf-8"?>
+<p:sld xmlns:a="http://schemas.openxmlformats.org/drawingml/2006/main" xmlns:r="http://schemas.openxmlformats.org/officeDocument/2006/relationships" xmlns:p="http://schemas.openxmlformats.org/presentationml/2006/main">
+  <p:cSld>
+    <p:spTree>
+      <p:nvGrpSpPr>
+        <p:cNvPr id="1" name="">
+          <a:extLst>
+            <a:ext uri="{FF2B5EF4-FFF2-40B4-BE49-F238E27FC236}">
+              <a16:creationId xmlns:a16="http://schemas.microsoft.com/office/drawing/2014/main" id="{5BEDBABD-2B1B-7421-A822-69F09600432B}"/>
+            </a:ext>
+          </a:extLst>
+        </p:cNvPr>
+        <p:cNvGrpSpPr/>
+        <p:nvPr/>
+      </p:nvGrpSpPr>
+      <p:grpSpPr>
+        <a:xfrm>
+          <a:off x="0" y="0"/>
+          <a:ext cx="0" cy="0"/>
+          <a:chOff x="0" y="0"/>
+          <a:chExt cx="0" cy="0"/>
+        </a:xfrm>
+      </p:grpSpPr>
+      <p:sp>
+        <p:nvSpPr>
+          <p:cNvPr id="2" name="Title 1">
+            <a:extLst>
+              <a:ext uri="{FF2B5EF4-FFF2-40B4-BE49-F238E27FC236}">
+                <a16:creationId xmlns:a16="http://schemas.microsoft.com/office/drawing/2014/main" id="{4399C161-B4FD-BC75-35D0-21097BD743FF}"/>
+              </a:ext>
+            </a:extLst>
+          </p:cNvPr>
+          <p:cNvSpPr>
+            <a:spLocks noGrp="1"/>
+          </p:cNvSpPr>
+          <p:nvPr>
+            <p:ph type="title"/>
+          </p:nvPr>
+        </p:nvSpPr>
+        <p:spPr/>
+        <p:txBody>
+          <a:bodyPr/>
+          <a:lstStyle/>
+          <a:p>
+            <a:r>
+              <a:rPr lang="en-CH" dirty="0"/>
+              <a:t>Scatter Plots</a:t>
+            </a:r>
+          </a:p>
+        </p:txBody>
+      </p:sp>
+      <p:sp>
+        <p:nvSpPr>
+          <p:cNvPr id="3" name="Content Placeholder 2">
+            <a:extLst>
+              <a:ext uri="{FF2B5EF4-FFF2-40B4-BE49-F238E27FC236}">
+                <a16:creationId xmlns:a16="http://schemas.microsoft.com/office/drawing/2014/main" id="{9E89750F-D956-F4A5-19A2-E093A6C6E34E}"/>
+              </a:ext>
+            </a:extLst>
+          </p:cNvPr>
+          <p:cNvSpPr>
+            <a:spLocks noGrp="1"/>
+          </p:cNvSpPr>
+          <p:nvPr>
+            <p:ph idx="1"/>
+          </p:nvPr>
+        </p:nvSpPr>
+        <p:spPr/>
+        <p:txBody>
+          <a:bodyPr>
+            <a:noAutofit/>
+          </a:bodyPr>
+          <a:lstStyle/>
+          <a:p>
+            <a:pPr>
+              <a:lnSpc>
+                <a:spcPct val="120000"/>
+              </a:lnSpc>
+            </a:pPr>
+            <a:r>
+              <a:rPr lang="en-GB" sz="1800" dirty="0"/>
+              <a:t>Scatter plots help to visualize correlations, patterns and clusters for data. They support in </a:t>
+            </a:r>
+            <a:r>
+              <a:rPr lang="en-GB" sz="1800" dirty="0" err="1"/>
+              <a:t>analyzing</a:t>
+            </a:r>
+            <a:r>
+              <a:rPr lang="en-GB" sz="1800" dirty="0"/>
+              <a:t> things like price vs demand, marketing effectiveness and customer </a:t>
+            </a:r>
+            <a:r>
+              <a:rPr lang="en-GB" sz="1800" dirty="0" err="1"/>
+              <a:t>behavior</a:t>
+            </a:r>
+            <a:r>
+              <a:rPr lang="en-GB" sz="1800" dirty="0"/>
+              <a:t>.</a:t>
+            </a:r>
+            <a:br>
+              <a:rPr lang="en-CH" sz="1800" dirty="0"/>
+            </a:br>
+            <a:endParaRPr lang="en-CH" sz="1800" dirty="0"/>
+          </a:p>
+        </p:txBody>
+      </p:sp>
+      <p:pic>
+        <p:nvPicPr>
+          <p:cNvPr id="7" name="Picture 6">
+            <a:extLst>
+              <a:ext uri="{FF2B5EF4-FFF2-40B4-BE49-F238E27FC236}">
+                <a16:creationId xmlns:a16="http://schemas.microsoft.com/office/drawing/2014/main" id="{4166D613-FF7C-FC2B-F773-E6B2B8FF430C}"/>
+              </a:ext>
+            </a:extLst>
+          </p:cNvPr>
+          <p:cNvPicPr>
+            <a:picLocks noChangeAspect="1"/>
+          </p:cNvPicPr>
+          <p:nvPr/>
+        </p:nvPicPr>
+        <p:blipFill>
+          <a:blip r:embed="rId2"/>
+          <a:stretch>
+            <a:fillRect/>
+          </a:stretch>
+        </p:blipFill>
+        <p:spPr>
+          <a:xfrm>
+            <a:off x="215537" y="2177566"/>
+            <a:ext cx="3951514" cy="2357900"/>
+          </a:xfrm>
+          <a:prstGeom prst="rect">
+            <a:avLst/>
+          </a:prstGeom>
+        </p:spPr>
+      </p:pic>
+      <p:pic>
+        <p:nvPicPr>
+          <p:cNvPr id="9" name="Picture 8">
+            <a:extLst>
+              <a:ext uri="{FF2B5EF4-FFF2-40B4-BE49-F238E27FC236}">
+                <a16:creationId xmlns:a16="http://schemas.microsoft.com/office/drawing/2014/main" id="{A5660965-C073-4450-4939-1838D72D8704}"/>
+              </a:ext>
+            </a:extLst>
+          </p:cNvPr>
+          <p:cNvPicPr>
+            <a:picLocks noChangeAspect="1"/>
+          </p:cNvPicPr>
+          <p:nvPr/>
+        </p:nvPicPr>
+        <p:blipFill>
+          <a:blip r:embed="rId3"/>
+          <a:stretch>
+            <a:fillRect/>
+          </a:stretch>
+        </p:blipFill>
+        <p:spPr>
+          <a:xfrm>
+            <a:off x="4859934" y="2276477"/>
+            <a:ext cx="6330033" cy="4259755"/>
+          </a:xfrm>
+          <a:prstGeom prst="rect">
+            <a:avLst/>
+          </a:prstGeom>
+        </p:spPr>
+      </p:pic>
+    </p:spTree>
+    <p:extLst>
+      <p:ext uri="{BB962C8B-B14F-4D97-AF65-F5344CB8AC3E}">
+        <p14:creationId xmlns:p14="http://schemas.microsoft.com/office/powerpoint/2010/main" val="2096804757"/>
+      </p:ext>
+    </p:extLst>
+  </p:cSld>
+  <p:clrMapOvr>
+    <a:masterClrMapping/>
+  </p:clrMapOvr>
+</p:sld>
+</file>
+
+<file path=ppt/slides/slide36.xml><?xml version="1.0" encoding="utf-8"?>
+<p:sld xmlns:a="http://schemas.openxmlformats.org/drawingml/2006/main" xmlns:r="http://schemas.openxmlformats.org/officeDocument/2006/relationships" xmlns:p="http://schemas.openxmlformats.org/presentationml/2006/main">
+  <p:cSld>
+    <p:spTree>
+      <p:nvGrpSpPr>
+        <p:cNvPr id="1" name="">
+          <a:extLst>
+            <a:ext uri="{FF2B5EF4-FFF2-40B4-BE49-F238E27FC236}">
+              <a16:creationId xmlns:a16="http://schemas.microsoft.com/office/drawing/2014/main" id="{E7E8D994-C96E-9307-93F4-7ABC98E58F87}"/>
+            </a:ext>
+          </a:extLst>
+        </p:cNvPr>
+        <p:cNvGrpSpPr/>
+        <p:nvPr/>
+      </p:nvGrpSpPr>
+      <p:grpSpPr>
+        <a:xfrm>
+          <a:off x="0" y="0"/>
+          <a:ext cx="0" cy="0"/>
+          <a:chOff x="0" y="0"/>
+          <a:chExt cx="0" cy="0"/>
+        </a:xfrm>
+      </p:grpSpPr>
+      <p:sp>
+        <p:nvSpPr>
+          <p:cNvPr id="2" name="Title 1">
+            <a:extLst>
+              <a:ext uri="{FF2B5EF4-FFF2-40B4-BE49-F238E27FC236}">
+                <a16:creationId xmlns:a16="http://schemas.microsoft.com/office/drawing/2014/main" id="{D1536424-6546-660B-863F-EB306EA5C9F7}"/>
+              </a:ext>
+            </a:extLst>
+          </p:cNvPr>
+          <p:cNvSpPr>
+            <a:spLocks noGrp="1"/>
+          </p:cNvSpPr>
+          <p:nvPr>
+            <p:ph type="title"/>
+          </p:nvPr>
+        </p:nvSpPr>
+        <p:spPr/>
+        <p:txBody>
+          <a:bodyPr/>
+          <a:lstStyle/>
+          <a:p>
+            <a:r>
+              <a:rPr lang="en-CH" dirty="0"/>
+              <a:t>Status Maps</a:t>
+            </a:r>
+          </a:p>
+        </p:txBody>
+      </p:sp>
+      <p:sp>
+        <p:nvSpPr>
+          <p:cNvPr id="3" name="Content Placeholder 2">
+            <a:extLst>
+              <a:ext uri="{FF2B5EF4-FFF2-40B4-BE49-F238E27FC236}">
+                <a16:creationId xmlns:a16="http://schemas.microsoft.com/office/drawing/2014/main" id="{CE5C771B-C81B-224E-A0D5-824949288463}"/>
+              </a:ext>
+            </a:extLst>
+          </p:cNvPr>
+          <p:cNvSpPr>
+            <a:spLocks noGrp="1"/>
+          </p:cNvSpPr>
+          <p:nvPr>
+            <p:ph idx="1"/>
+          </p:nvPr>
+        </p:nvSpPr>
+        <p:spPr/>
+        <p:txBody>
+          <a:bodyPr>
+            <a:noAutofit/>
+          </a:bodyPr>
+          <a:lstStyle/>
+          <a:p>
+            <a:pPr>
+              <a:lnSpc>
+                <a:spcPct val="120000"/>
+              </a:lnSpc>
+            </a:pPr>
+            <a:r>
+              <a:rPr lang="en-GB" sz="1800" dirty="0"/>
+              <a:t>Helps you to easily get on overview of the status of your data and detect when values are passing thresholds.</a:t>
+            </a:r>
+            <a:br>
+              <a:rPr lang="en-CH" sz="1800" dirty="0"/>
+            </a:br>
+            <a:endParaRPr lang="en-CH" sz="1800" dirty="0"/>
+          </a:p>
+        </p:txBody>
+      </p:sp>
+      <p:pic>
+        <p:nvPicPr>
+          <p:cNvPr id="5" name="Picture 4">
+            <a:extLst>
+              <a:ext uri="{FF2B5EF4-FFF2-40B4-BE49-F238E27FC236}">
+                <a16:creationId xmlns:a16="http://schemas.microsoft.com/office/drawing/2014/main" id="{DF616CE4-7249-9167-1084-F40F80E1D0C1}"/>
+              </a:ext>
+            </a:extLst>
+          </p:cNvPr>
+          <p:cNvPicPr>
+            <a:picLocks noChangeAspect="1"/>
+          </p:cNvPicPr>
+          <p:nvPr/>
+        </p:nvPicPr>
+        <p:blipFill>
+          <a:blip r:embed="rId2"/>
+          <a:stretch>
+            <a:fillRect/>
+          </a:stretch>
+        </p:blipFill>
+        <p:spPr>
+          <a:xfrm>
+            <a:off x="5855851" y="2263414"/>
+            <a:ext cx="5401429" cy="3562847"/>
+          </a:xfrm>
+          <a:prstGeom prst="rect">
+            <a:avLst/>
+          </a:prstGeom>
+        </p:spPr>
+      </p:pic>
+      <p:pic>
+        <p:nvPicPr>
+          <p:cNvPr id="8" name="Picture 7">
+            <a:extLst>
+              <a:ext uri="{FF2B5EF4-FFF2-40B4-BE49-F238E27FC236}">
+                <a16:creationId xmlns:a16="http://schemas.microsoft.com/office/drawing/2014/main" id="{F2A7C1F6-0E8C-67A9-FED5-277DEC5FB0F4}"/>
+              </a:ext>
+            </a:extLst>
+          </p:cNvPr>
+          <p:cNvPicPr>
+            <a:picLocks noChangeAspect="1"/>
+          </p:cNvPicPr>
+          <p:nvPr/>
+        </p:nvPicPr>
+        <p:blipFill>
+          <a:blip r:embed="rId3"/>
+          <a:stretch>
+            <a:fillRect/>
+          </a:stretch>
+        </p:blipFill>
+        <p:spPr>
+          <a:xfrm>
+            <a:off x="934720" y="2276477"/>
+            <a:ext cx="4039116" cy="3359972"/>
+          </a:xfrm>
+          <a:prstGeom prst="rect">
+            <a:avLst/>
+          </a:prstGeom>
+        </p:spPr>
+      </p:pic>
+    </p:spTree>
+    <p:extLst>
+      <p:ext uri="{BB962C8B-B14F-4D97-AF65-F5344CB8AC3E}">
+        <p14:creationId xmlns:p14="http://schemas.microsoft.com/office/powerpoint/2010/main" val="2580605475"/>
+      </p:ext>
+    </p:extLst>
+  </p:cSld>
+  <p:clrMapOvr>
+    <a:masterClrMapping/>
+  </p:clrMapOvr>
+</p:sld>
+</file>
+
+<file path=ppt/slides/slide37.xml><?xml version="1.0" encoding="utf-8"?>
+<p:sld xmlns:a="http://schemas.openxmlformats.org/drawingml/2006/main" xmlns:r="http://schemas.openxmlformats.org/officeDocument/2006/relationships" xmlns:p="http://schemas.openxmlformats.org/presentationml/2006/main">
+  <p:cSld>
+    <p:spTree>
+      <p:nvGrpSpPr>
+        <p:cNvPr id="1" name="">
+          <a:extLst>
+            <a:ext uri="{FF2B5EF4-FFF2-40B4-BE49-F238E27FC236}">
+              <a16:creationId xmlns:a16="http://schemas.microsoft.com/office/drawing/2014/main" id="{772DFAEE-A463-33CC-B624-A3AE23208425}"/>
+            </a:ext>
+          </a:extLst>
+        </p:cNvPr>
+        <p:cNvGrpSpPr/>
+        <p:nvPr/>
+      </p:nvGrpSpPr>
+      <p:grpSpPr>
+        <a:xfrm>
+          <a:off x="0" y="0"/>
+          <a:ext cx="0" cy="0"/>
+          <a:chOff x="0" y="0"/>
+          <a:chExt cx="0" cy="0"/>
+        </a:xfrm>
+      </p:grpSpPr>
+      <p:sp>
+        <p:nvSpPr>
+          <p:cNvPr id="2" name="Title 1">
+            <a:extLst>
+              <a:ext uri="{FF2B5EF4-FFF2-40B4-BE49-F238E27FC236}">
+                <a16:creationId xmlns:a16="http://schemas.microsoft.com/office/drawing/2014/main" id="{9601B00C-2C82-986B-F714-627F25B74AC2}"/>
+              </a:ext>
+            </a:extLst>
+          </p:cNvPr>
+          <p:cNvSpPr>
+            <a:spLocks noGrp="1"/>
+          </p:cNvSpPr>
+          <p:nvPr>
+            <p:ph type="title"/>
+          </p:nvPr>
+        </p:nvSpPr>
+        <p:spPr/>
+        <p:txBody>
+          <a:bodyPr/>
+          <a:lstStyle/>
+          <a:p>
+            <a:r>
+              <a:rPr lang="en-CH" dirty="0"/>
+              <a:t>Stats Matrix with Status Maps</a:t>
+            </a:r>
+          </a:p>
+        </p:txBody>
+      </p:sp>
+      <p:sp>
+        <p:nvSpPr>
+          <p:cNvPr id="3" name="Content Placeholder 2">
+            <a:extLst>
+              <a:ext uri="{FF2B5EF4-FFF2-40B4-BE49-F238E27FC236}">
+                <a16:creationId xmlns:a16="http://schemas.microsoft.com/office/drawing/2014/main" id="{4FE1F83A-D8D8-47D5-5A7A-547227D379D1}"/>
+              </a:ext>
+            </a:extLst>
+          </p:cNvPr>
+          <p:cNvSpPr>
+            <a:spLocks noGrp="1"/>
+          </p:cNvSpPr>
+          <p:nvPr>
+            <p:ph idx="1"/>
+          </p:nvPr>
+        </p:nvSpPr>
+        <p:spPr/>
+        <p:txBody>
+          <a:bodyPr>
+            <a:normAutofit fontScale="25000" lnSpcReduction="20000"/>
+          </a:bodyPr>
+          <a:lstStyle/>
+          <a:p>
+            <a:pPr>
+              <a:lnSpc>
+                <a:spcPct val="120000"/>
+              </a:lnSpc>
+            </a:pPr>
+            <a:r>
+              <a:rPr lang="en-GB" sz="8000" dirty="0"/>
+              <a:t>Using stats matrix to group data by two fields and showing them as a status map.</a:t>
+            </a:r>
+            <a:r>
+              <a:rPr lang="en-CH" sz="8000" dirty="0"/>
+              <a:t> Helps identifying changes over time for specific categories.</a:t>
+            </a:r>
+            <a:br>
+              <a:rPr lang="en-CH" dirty="0"/>
+            </a:br>
+            <a:endParaRPr lang="en-CH" dirty="0"/>
+          </a:p>
+        </p:txBody>
+      </p:sp>
+      <p:pic>
+        <p:nvPicPr>
+          <p:cNvPr id="5" name="Picture 4">
+            <a:extLst>
+              <a:ext uri="{FF2B5EF4-FFF2-40B4-BE49-F238E27FC236}">
+                <a16:creationId xmlns:a16="http://schemas.microsoft.com/office/drawing/2014/main" id="{7F80CC29-440C-2AEC-4157-76B6CD9A1142}"/>
+              </a:ext>
+            </a:extLst>
+          </p:cNvPr>
+          <p:cNvPicPr>
+            <a:picLocks noChangeAspect="1"/>
+          </p:cNvPicPr>
+          <p:nvPr/>
+        </p:nvPicPr>
+        <p:blipFill>
+          <a:blip r:embed="rId2"/>
+          <a:stretch>
+            <a:fillRect/>
+          </a:stretch>
+        </p:blipFill>
+        <p:spPr>
+          <a:xfrm>
+            <a:off x="5163281" y="2185869"/>
+            <a:ext cx="6420995" cy="4565150"/>
+          </a:xfrm>
+          <a:prstGeom prst="rect">
+            <a:avLst/>
+          </a:prstGeom>
+        </p:spPr>
+      </p:pic>
+      <p:pic>
+        <p:nvPicPr>
+          <p:cNvPr id="8" name="Picture 7">
+            <a:extLst>
+              <a:ext uri="{FF2B5EF4-FFF2-40B4-BE49-F238E27FC236}">
+                <a16:creationId xmlns:a16="http://schemas.microsoft.com/office/drawing/2014/main" id="{C98F4B20-DEF3-7E0D-43DD-5841F89FD5AB}"/>
+              </a:ext>
+            </a:extLst>
+          </p:cNvPr>
+          <p:cNvPicPr>
+            <a:picLocks noChangeAspect="1"/>
+          </p:cNvPicPr>
+          <p:nvPr/>
+        </p:nvPicPr>
+        <p:blipFill>
+          <a:blip r:embed="rId3"/>
+          <a:stretch>
+            <a:fillRect/>
+          </a:stretch>
+        </p:blipFill>
+        <p:spPr>
+          <a:xfrm>
+            <a:off x="838200" y="2276477"/>
+            <a:ext cx="3524742" cy="3696216"/>
+          </a:xfrm>
+          <a:prstGeom prst="rect">
+            <a:avLst/>
+          </a:prstGeom>
+        </p:spPr>
+      </p:pic>
+    </p:spTree>
+    <p:extLst>
+      <p:ext uri="{BB962C8B-B14F-4D97-AF65-F5344CB8AC3E}">
+        <p14:creationId xmlns:p14="http://schemas.microsoft.com/office/powerpoint/2010/main" val="2214737594"/>
       </p:ext>
     </p:extLst>
   </p:cSld>
@@ -5994,7 +8049,7 @@
           <p:cNvPr id="2" name="Title 1">
             <a:extLst>
               <a:ext uri="{FF2B5EF4-FFF2-40B4-BE49-F238E27FC236}">
-                <a16:creationId xmlns:a16="http://schemas.microsoft.com/office/drawing/2014/main" id="{F208E1EB-D1EA-49C6-A87D-807F9EF8B59B}"/>
+                <a16:creationId xmlns:a16="http://schemas.microsoft.com/office/drawing/2014/main" id="{CDCDEA46-AB36-471C-8BC0-E2849C41986F}"/>
               </a:ext>
             </a:extLst>
           </p:cNvPr>
@@ -6012,7 +8067,7 @@
           <a:p>
             <a:r>
               <a:rPr lang="en-US" dirty="0"/>
-              <a:t>Dashboard List</a:t>
+              <a:t>User Management</a:t>
             </a:r>
             <a:endParaRPr lang="LID4096" dirty="0"/>
           </a:p>
@@ -6023,7 +8078,7 @@
           <p:cNvPr id="5" name="Picture 4">
             <a:extLst>
               <a:ext uri="{FF2B5EF4-FFF2-40B4-BE49-F238E27FC236}">
-                <a16:creationId xmlns:a16="http://schemas.microsoft.com/office/drawing/2014/main" id="{2457B652-73B7-45B0-874C-963B358D59FA}"/>
+                <a16:creationId xmlns:a16="http://schemas.microsoft.com/office/drawing/2014/main" id="{FB790BAE-2EAA-4426-8E94-CA35B3AA924A}"/>
               </a:ext>
             </a:extLst>
           </p:cNvPr>
@@ -6040,8 +8095,8 @@
         </p:blipFill>
         <p:spPr>
           <a:xfrm>
-            <a:off x="2015322" y="1208878"/>
-            <a:ext cx="8161355" cy="5283997"/>
+            <a:off x="838200" y="1358329"/>
+            <a:ext cx="10048240" cy="4902874"/>
           </a:xfrm>
           <a:prstGeom prst="rect">
             <a:avLst/>
@@ -6051,7 +8106,7 @@
     </p:spTree>
     <p:extLst>
       <p:ext uri="{BB962C8B-B14F-4D97-AF65-F5344CB8AC3E}">
-        <p14:creationId xmlns:p14="http://schemas.microsoft.com/office/powerpoint/2010/main" val="2710998144"/>
+        <p14:creationId xmlns:p14="http://schemas.microsoft.com/office/powerpoint/2010/main" val="2716562526"/>
       </p:ext>
     </p:extLst>
   </p:cSld>
@@ -6083,7 +8138,7 @@
           <p:cNvPr id="2" name="Title 1">
             <a:extLst>
               <a:ext uri="{FF2B5EF4-FFF2-40B4-BE49-F238E27FC236}">
-                <a16:creationId xmlns:a16="http://schemas.microsoft.com/office/drawing/2014/main" id="{DF1C355E-D737-4D59-8170-3869785DCA0C}"/>
+                <a16:creationId xmlns:a16="http://schemas.microsoft.com/office/drawing/2014/main" id="{F208E1EB-D1EA-49C6-A87D-807F9EF8B59B}"/>
               </a:ext>
             </a:extLst>
           </p:cNvPr>
@@ -6101,75 +8156,7 @@
           <a:p>
             <a:r>
               <a:rPr lang="en-US" dirty="0"/>
-              <a:t>Dashboard Options</a:t>
-            </a:r>
-            <a:endParaRPr lang="LID4096" dirty="0"/>
-          </a:p>
-        </p:txBody>
-      </p:sp>
-      <p:sp>
-        <p:nvSpPr>
-          <p:cNvPr id="3" name="Content Placeholder 2">
-            <a:extLst>
-              <a:ext uri="{FF2B5EF4-FFF2-40B4-BE49-F238E27FC236}">
-                <a16:creationId xmlns:a16="http://schemas.microsoft.com/office/drawing/2014/main" id="{6A872884-D8FA-473F-BA4D-48DF02AD3431}"/>
-              </a:ext>
-            </a:extLst>
-          </p:cNvPr>
-          <p:cNvSpPr>
-            <a:spLocks noGrp="1"/>
-          </p:cNvSpPr>
-          <p:nvPr>
-            <p:ph idx="1"/>
-          </p:nvPr>
-        </p:nvSpPr>
-        <p:spPr>
-          <a:xfrm>
-            <a:off x="838200" y="1320800"/>
-            <a:ext cx="4546600" cy="4856163"/>
-          </a:xfrm>
-        </p:spPr>
-        <p:txBody>
-          <a:bodyPr/>
-          <a:lstStyle/>
-          <a:p>
-            <a:r>
-              <a:rPr lang="en-US" dirty="0"/>
-              <a:t>Dashboards can be shared with:</a:t>
-            </a:r>
-          </a:p>
-          <a:p>
-            <a:pPr lvl="1"/>
-            <a:r>
-              <a:rPr lang="en-US" dirty="0"/>
-              <a:t>Specific users</a:t>
-            </a:r>
-          </a:p>
-          <a:p>
-            <a:pPr lvl="1"/>
-            <a:r>
-              <a:rPr lang="en-US" dirty="0"/>
-              <a:t>Groups of users</a:t>
-            </a:r>
-          </a:p>
-          <a:p>
-            <a:pPr lvl="1"/>
-            <a:r>
-              <a:rPr lang="en-US" dirty="0"/>
-              <a:t>All who can access the dashboard feature (if no user/group is specified)</a:t>
-            </a:r>
-          </a:p>
-          <a:p>
-            <a:pPr lvl="1"/>
-            <a:r>
-              <a:rPr lang="en-US" dirty="0"/>
-              <a:t>Everyone(Public URL)</a:t>
-            </a:r>
-          </a:p>
-          <a:p>
-            <a:r>
-              <a:rPr lang="en-US" dirty="0"/>
-              <a:t>Editor permissions can be granted to users or groups</a:t>
+              <a:t>Dashboard List</a:t>
             </a:r>
             <a:endParaRPr lang="LID4096" dirty="0"/>
           </a:p>
@@ -6180,7 +8167,7 @@
           <p:cNvPr id="5" name="Picture 4">
             <a:extLst>
               <a:ext uri="{FF2B5EF4-FFF2-40B4-BE49-F238E27FC236}">
-                <a16:creationId xmlns:a16="http://schemas.microsoft.com/office/drawing/2014/main" id="{6661E8F4-3000-4F5D-9315-C3E1003B6820}"/>
+                <a16:creationId xmlns:a16="http://schemas.microsoft.com/office/drawing/2014/main" id="{2457B652-73B7-45B0-874C-963B358D59FA}"/>
               </a:ext>
             </a:extLst>
           </p:cNvPr>
@@ -6197,8 +8184,8 @@
         </p:blipFill>
         <p:spPr>
           <a:xfrm>
-            <a:off x="5652442" y="1320800"/>
-            <a:ext cx="5919798" cy="4853386"/>
+            <a:off x="2015322" y="1208878"/>
+            <a:ext cx="8161355" cy="5283997"/>
           </a:xfrm>
           <a:prstGeom prst="rect">
             <a:avLst/>
@@ -6208,7 +8195,7 @@
     </p:spTree>
     <p:extLst>
       <p:ext uri="{BB962C8B-B14F-4D97-AF65-F5344CB8AC3E}">
-        <p14:creationId xmlns:p14="http://schemas.microsoft.com/office/powerpoint/2010/main" val="4250660046"/>
+        <p14:creationId xmlns:p14="http://schemas.microsoft.com/office/powerpoint/2010/main" val="2710998144"/>
       </p:ext>
     </p:extLst>
   </p:cSld>
@@ -6240,7 +8227,7 @@
           <p:cNvPr id="2" name="Title 1">
             <a:extLst>
               <a:ext uri="{FF2B5EF4-FFF2-40B4-BE49-F238E27FC236}">
-                <a16:creationId xmlns:a16="http://schemas.microsoft.com/office/drawing/2014/main" id="{1B5E51F3-A5F3-4C93-AA3F-38F4818C0DFE}"/>
+                <a16:creationId xmlns:a16="http://schemas.microsoft.com/office/drawing/2014/main" id="{DF1C355E-D737-4D59-8170-3869785DCA0C}"/>
               </a:ext>
             </a:extLst>
           </p:cNvPr>
@@ -6258,7 +8245,7 @@
           <a:p>
             <a:r>
               <a:rPr lang="en-US" dirty="0"/>
-              <a:t>Available Widgets in Version 1.8 </a:t>
+              <a:t>Dashboard Options</a:t>
             </a:r>
             <a:endParaRPr lang="LID4096" dirty="0"/>
           </a:p>
@@ -6266,312 +8253,106 @@
       </p:sp>
       <p:sp>
         <p:nvSpPr>
-          <p:cNvPr id="4" name="Text Placeholder 3">
-            <a:extLst>
-              <a:ext uri="{FF2B5EF4-FFF2-40B4-BE49-F238E27FC236}">
-                <a16:creationId xmlns:a16="http://schemas.microsoft.com/office/drawing/2014/main" id="{A8EEC71F-C940-4310-B1A3-4ABC28A37254}"/>
-              </a:ext>
-            </a:extLst>
-          </p:cNvPr>
-          <p:cNvSpPr>
-            <a:spLocks noGrp="1"/>
-          </p:cNvSpPr>
-          <p:nvPr>
-            <p:ph type="body" idx="1"/>
-          </p:nvPr>
-        </p:nvSpPr>
-        <p:spPr>
-          <a:xfrm>
-            <a:off x="839788" y="1681163"/>
-            <a:ext cx="5157787" cy="405821"/>
-          </a:xfrm>
-        </p:spPr>
-        <p:txBody>
-          <a:bodyPr>
-            <a:normAutofit lnSpcReduction="10000"/>
-          </a:bodyPr>
-          <a:lstStyle/>
-          <a:p>
-            <a:r>
-              <a:rPr lang="en-US" dirty="0"/>
-              <a:t>Standard Widgets</a:t>
+          <p:cNvPr id="3" name="Content Placeholder 2">
+            <a:extLst>
+              <a:ext uri="{FF2B5EF4-FFF2-40B4-BE49-F238E27FC236}">
+                <a16:creationId xmlns:a16="http://schemas.microsoft.com/office/drawing/2014/main" id="{6A872884-D8FA-473F-BA4D-48DF02AD3431}"/>
+              </a:ext>
+            </a:extLst>
+          </p:cNvPr>
+          <p:cNvSpPr>
+            <a:spLocks noGrp="1"/>
+          </p:cNvSpPr>
+          <p:nvPr>
+            <p:ph idx="1"/>
+          </p:nvPr>
+        </p:nvSpPr>
+        <p:spPr>
+          <a:xfrm>
+            <a:off x="838200" y="1320800"/>
+            <a:ext cx="4546600" cy="4856163"/>
+          </a:xfrm>
+        </p:spPr>
+        <p:txBody>
+          <a:bodyPr/>
+          <a:lstStyle/>
+          <a:p>
+            <a:r>
+              <a:rPr lang="en-US" dirty="0"/>
+              <a:t>Dashboards can be shared with:</a:t>
+            </a:r>
+          </a:p>
+          <a:p>
+            <a:pPr lvl="1"/>
+            <a:r>
+              <a:rPr lang="en-US" dirty="0"/>
+              <a:t>Specific users</a:t>
+            </a:r>
+          </a:p>
+          <a:p>
+            <a:pPr lvl="1"/>
+            <a:r>
+              <a:rPr lang="en-US" dirty="0"/>
+              <a:t>Groups of users</a:t>
+            </a:r>
+          </a:p>
+          <a:p>
+            <a:pPr lvl="1"/>
+            <a:r>
+              <a:rPr lang="en-US" dirty="0"/>
+              <a:t>All who can access the dashboard feature (if no user/group is specified)</a:t>
+            </a:r>
+          </a:p>
+          <a:p>
+            <a:pPr lvl="1"/>
+            <a:r>
+              <a:rPr lang="en-US" dirty="0"/>
+              <a:t>Everyone(Public URL)</a:t>
+            </a:r>
+          </a:p>
+          <a:p>
+            <a:r>
+              <a:rPr lang="en-US" dirty="0"/>
+              <a:t>Editor permissions can be granted to users or groups</a:t>
             </a:r>
             <a:endParaRPr lang="LID4096" dirty="0"/>
           </a:p>
         </p:txBody>
       </p:sp>
-      <p:sp>
-        <p:nvSpPr>
-          <p:cNvPr id="5" name="Content Placeholder 4">
-            <a:extLst>
-              <a:ext uri="{FF2B5EF4-FFF2-40B4-BE49-F238E27FC236}">
-                <a16:creationId xmlns:a16="http://schemas.microsoft.com/office/drawing/2014/main" id="{9455BA79-08DE-44E8-8A22-40E4D835AAD7}"/>
-              </a:ext>
-            </a:extLst>
-          </p:cNvPr>
-          <p:cNvSpPr>
-            <a:spLocks noGrp="1"/>
-          </p:cNvSpPr>
-          <p:nvPr>
-            <p:ph sz="half" idx="2"/>
-          </p:nvPr>
-        </p:nvSpPr>
-        <p:spPr>
-          <a:xfrm>
-            <a:off x="839788" y="2086984"/>
-            <a:ext cx="5157787" cy="4539727"/>
-          </a:xfrm>
-        </p:spPr>
-        <p:txBody>
-          <a:bodyPr>
-            <a:normAutofit fontScale="62500" lnSpcReduction="20000"/>
-          </a:bodyPr>
-          <a:lstStyle/>
-          <a:p>
-            <a:r>
-              <a:rPr lang="en-US" dirty="0"/>
-              <a:t>Text</a:t>
-            </a:r>
-          </a:p>
-          <a:p>
-            <a:r>
-              <a:rPr lang="en-US" dirty="0"/>
-              <a:t>Label</a:t>
-            </a:r>
-          </a:p>
-          <a:p>
-            <a:r>
-              <a:rPr lang="en-US" dirty="0"/>
-              <a:t>List</a:t>
-            </a:r>
-          </a:p>
-          <a:p>
-            <a:r>
-              <a:rPr lang="en-US" dirty="0"/>
-              <a:t>Checklist</a:t>
-            </a:r>
-          </a:p>
-          <a:p>
-            <a:r>
-              <a:rPr lang="en-US" dirty="0"/>
-              <a:t>CSV Table</a:t>
-            </a:r>
-          </a:p>
-          <a:p>
-            <a:r>
-              <a:rPr lang="en-US" dirty="0"/>
-              <a:t>Tags</a:t>
-            </a:r>
-          </a:p>
-          <a:p>
-            <a:r>
-              <a:rPr lang="en-US" dirty="0"/>
-              <a:t>Image</a:t>
-            </a:r>
-          </a:p>
-          <a:p>
-            <a:r>
-              <a:rPr lang="en-US" dirty="0"/>
-              <a:t>HTML Editor</a:t>
-            </a:r>
-          </a:p>
-          <a:p>
-            <a:r>
-              <a:rPr lang="en-US" dirty="0"/>
-              <a:t>Website</a:t>
-            </a:r>
-          </a:p>
-          <a:p>
-            <a:r>
-              <a:rPr lang="en-US" dirty="0" err="1"/>
-              <a:t>Youtube</a:t>
-            </a:r>
-            <a:r>
-              <a:rPr lang="en-US" dirty="0"/>
-              <a:t> Video</a:t>
-            </a:r>
-          </a:p>
-          <a:p>
-            <a:r>
-              <a:rPr lang="en-US" dirty="0"/>
-              <a:t>Refresh Time</a:t>
-            </a:r>
-          </a:p>
-          <a:p>
-            <a:r>
-              <a:rPr lang="en-US" dirty="0"/>
-              <a:t>Parameters</a:t>
-            </a:r>
-          </a:p>
-          <a:p>
-            <a:r>
-              <a:rPr lang="en-US" dirty="0"/>
-              <a:t>Replica</a:t>
-            </a:r>
-          </a:p>
-          <a:p>
-            <a:r>
-              <a:rPr lang="en-US" dirty="0"/>
-              <a:t>Display Query Results</a:t>
-            </a:r>
-          </a:p>
-        </p:txBody>
-      </p:sp>
-      <p:sp>
-        <p:nvSpPr>
-          <p:cNvPr id="6" name="Text Placeholder 5">
-            <a:extLst>
-              <a:ext uri="{FF2B5EF4-FFF2-40B4-BE49-F238E27FC236}">
-                <a16:creationId xmlns:a16="http://schemas.microsoft.com/office/drawing/2014/main" id="{8AC8E697-F251-4298-9E93-26FBE2A5DC91}"/>
-              </a:ext>
-            </a:extLst>
-          </p:cNvPr>
-          <p:cNvSpPr>
-            <a:spLocks noGrp="1"/>
-          </p:cNvSpPr>
-          <p:nvPr>
-            <p:ph type="body" sz="quarter" idx="3"/>
-          </p:nvPr>
-        </p:nvSpPr>
-        <p:spPr>
-          <a:xfrm>
-            <a:off x="6172200" y="1681163"/>
-            <a:ext cx="5183188" cy="405821"/>
-          </a:xfrm>
-        </p:spPr>
-        <p:txBody>
-          <a:bodyPr>
-            <a:normAutofit lnSpcReduction="10000"/>
-          </a:bodyPr>
-          <a:lstStyle/>
-          <a:p>
-            <a:r>
-              <a:rPr lang="en-US" dirty="0"/>
-              <a:t>Monitoring Widgets</a:t>
-            </a:r>
-            <a:endParaRPr lang="LID4096" dirty="0"/>
-          </a:p>
-        </p:txBody>
-      </p:sp>
-      <p:sp>
-        <p:nvSpPr>
-          <p:cNvPr id="7" name="Content Placeholder 6">
-            <a:extLst>
-              <a:ext uri="{FF2B5EF4-FFF2-40B4-BE49-F238E27FC236}">
-                <a16:creationId xmlns:a16="http://schemas.microsoft.com/office/drawing/2014/main" id="{F2180B55-ED5E-4476-9568-27428783EFE7}"/>
-              </a:ext>
-            </a:extLst>
-          </p:cNvPr>
-          <p:cNvSpPr>
-            <a:spLocks noGrp="1"/>
-          </p:cNvSpPr>
-          <p:nvPr>
-            <p:ph sz="quarter" idx="4"/>
-          </p:nvPr>
-        </p:nvSpPr>
-        <p:spPr>
-          <a:xfrm>
-            <a:off x="6172200" y="2086984"/>
-            <a:ext cx="5183188" cy="4539727"/>
-          </a:xfrm>
-        </p:spPr>
-        <p:txBody>
-          <a:bodyPr>
-            <a:normAutofit fontScale="62500" lnSpcReduction="20000"/>
-          </a:bodyPr>
-          <a:lstStyle/>
-          <a:p>
-            <a:r>
-              <a:rPr lang="en-US" dirty="0"/>
-              <a:t>Dynatrace</a:t>
-            </a:r>
-          </a:p>
-          <a:p>
-            <a:r>
-              <a:rPr lang="en-US" dirty="0"/>
-              <a:t>MySQL</a:t>
-            </a:r>
-          </a:p>
-          <a:p>
-            <a:r>
-              <a:rPr lang="en-US" dirty="0"/>
-              <a:t>MSSQL</a:t>
-            </a:r>
-          </a:p>
-          <a:p>
-            <a:r>
-              <a:rPr lang="en-US" dirty="0"/>
-              <a:t>Oracle</a:t>
-            </a:r>
-          </a:p>
-          <a:p>
-            <a:r>
-              <a:rPr lang="en-US" dirty="0"/>
-              <a:t>Other Databases(JDBC Drivers)</a:t>
-            </a:r>
-          </a:p>
-          <a:p>
-            <a:r>
-              <a:rPr lang="en-US" dirty="0" err="1"/>
-              <a:t>InfluxDB</a:t>
-            </a:r>
-            <a:endParaRPr lang="en-US" dirty="0"/>
-          </a:p>
-          <a:p>
-            <a:r>
-              <a:rPr lang="en-US" dirty="0"/>
-              <a:t>Prometheus</a:t>
-            </a:r>
-          </a:p>
-          <a:p>
-            <a:r>
-              <a:rPr lang="en-US" dirty="0" err="1"/>
-              <a:t>Exense</a:t>
-            </a:r>
-            <a:r>
-              <a:rPr lang="en-US" dirty="0"/>
-              <a:t> Step</a:t>
-            </a:r>
-          </a:p>
-          <a:p>
-            <a:r>
-              <a:rPr lang="en-US" dirty="0"/>
-              <a:t>Silk Performance Manager(SPM)</a:t>
-            </a:r>
-          </a:p>
-          <a:p>
-            <a:r>
-              <a:rPr lang="en-US" dirty="0" err="1"/>
-              <a:t>Webex</a:t>
-            </a:r>
-            <a:endParaRPr lang="en-US" dirty="0"/>
-          </a:p>
-          <a:p>
-            <a:r>
-              <a:rPr lang="en-US" dirty="0"/>
-              <a:t>CA </a:t>
-            </a:r>
-            <a:r>
-              <a:rPr lang="en-US" dirty="0" err="1"/>
-              <a:t>Automic</a:t>
-            </a:r>
-            <a:r>
-              <a:rPr lang="en-US" dirty="0"/>
-              <a:t> Workload Automation(AWA)</a:t>
-            </a:r>
-          </a:p>
-          <a:p>
-            <a:pPr marL="0" indent="0">
-              <a:buNone/>
-            </a:pPr>
-            <a:endParaRPr lang="LID4096" dirty="0"/>
-          </a:p>
-        </p:txBody>
-      </p:sp>
+      <p:pic>
+        <p:nvPicPr>
+          <p:cNvPr id="5" name="Picture 4">
+            <a:extLst>
+              <a:ext uri="{FF2B5EF4-FFF2-40B4-BE49-F238E27FC236}">
+                <a16:creationId xmlns:a16="http://schemas.microsoft.com/office/drawing/2014/main" id="{6661E8F4-3000-4F5D-9315-C3E1003B6820}"/>
+              </a:ext>
+            </a:extLst>
+          </p:cNvPr>
+          <p:cNvPicPr>
+            <a:picLocks noChangeAspect="1"/>
+          </p:cNvPicPr>
+          <p:nvPr/>
+        </p:nvPicPr>
+        <p:blipFill>
+          <a:blip r:embed="rId2"/>
+          <a:stretch>
+            <a:fillRect/>
+          </a:stretch>
+        </p:blipFill>
+        <p:spPr>
+          <a:xfrm>
+            <a:off x="5652442" y="1320800"/>
+            <a:ext cx="5919798" cy="4853386"/>
+          </a:xfrm>
+          <a:prstGeom prst="rect">
+            <a:avLst/>
+          </a:prstGeom>
+        </p:spPr>
+      </p:pic>
     </p:spTree>
     <p:extLst>
       <p:ext uri="{BB962C8B-B14F-4D97-AF65-F5344CB8AC3E}">
-        <p14:creationId xmlns:p14="http://schemas.microsoft.com/office/powerpoint/2010/main" val="560022635"/>
+        <p14:creationId xmlns:p14="http://schemas.microsoft.com/office/powerpoint/2010/main" val="4250660046"/>
       </p:ext>
     </p:extLst>
   </p:cSld>
@@ -6600,10 +8381,10 @@
       </p:grpSpPr>
       <p:sp>
         <p:nvSpPr>
-          <p:cNvPr id="2" name="Title 1">
-            <a:extLst>
-              <a:ext uri="{FF2B5EF4-FFF2-40B4-BE49-F238E27FC236}">
-                <a16:creationId xmlns:a16="http://schemas.microsoft.com/office/drawing/2014/main" id="{62118670-9D33-4A23-AC4C-183474388AAF}"/>
+          <p:cNvPr id="4" name="Title 3">
+            <a:extLst>
+              <a:ext uri="{FF2B5EF4-FFF2-40B4-BE49-F238E27FC236}">
+                <a16:creationId xmlns:a16="http://schemas.microsoft.com/office/drawing/2014/main" id="{0A05D06C-6013-4F53-8478-D129844FC8CC}"/>
               </a:ext>
             </a:extLst>
           </p:cNvPr>
@@ -6621,7 +8402,7 @@
           <a:p>
             <a:r>
               <a:rPr lang="en-US" dirty="0"/>
-              <a:t>Monitoring Widgets – Displays</a:t>
+              <a:t>Dashboard Parameters</a:t>
             </a:r>
             <a:endParaRPr lang="LID4096" dirty="0"/>
           </a:p>
@@ -6629,10 +8410,10 @@
       </p:sp>
       <p:sp>
         <p:nvSpPr>
-          <p:cNvPr id="3" name="Content Placeholder 2">
-            <a:extLst>
-              <a:ext uri="{FF2B5EF4-FFF2-40B4-BE49-F238E27FC236}">
-                <a16:creationId xmlns:a16="http://schemas.microsoft.com/office/drawing/2014/main" id="{DB6FEBE8-F4AB-4F0A-A9FA-DFC07580C120}"/>
+          <p:cNvPr id="5" name="Content Placeholder 4">
+            <a:extLst>
+              <a:ext uri="{FF2B5EF4-FFF2-40B4-BE49-F238E27FC236}">
+                <a16:creationId xmlns:a16="http://schemas.microsoft.com/office/drawing/2014/main" id="{D82C205C-D269-41A7-9079-97120B0063B3}"/>
               </a:ext>
             </a:extLst>
           </p:cNvPr>
@@ -6645,27 +8426,26 @@
         </p:nvSpPr>
         <p:spPr>
           <a:xfrm>
-            <a:off x="838200" y="1239521"/>
-            <a:ext cx="10515600" cy="752475"/>
+            <a:off x="838200" y="1320801"/>
+            <a:ext cx="10515600" cy="965199"/>
           </a:xfrm>
         </p:spPr>
         <p:txBody>
           <a:bodyPr>
-            <a:normAutofit fontScale="92500" lnSpcReduction="10000"/>
+            <a:normAutofit/>
           </a:bodyPr>
           <a:lstStyle/>
           <a:p>
-            <a:pPr algn="ctr"/>
-            <a:r>
-              <a:rPr lang="en-US" dirty="0"/>
-              <a:t>Many Monitoring widgets use a default approach to show data, </a:t>
+            <a:r>
+              <a:rPr lang="en-US" dirty="0"/>
+              <a:t>You can add custom parameters to the dashboard. Either global </a:t>
             </a:r>
             <a:br>
               <a:rPr lang="en-US" dirty="0"/>
             </a:br>
             <a:r>
               <a:rPr lang="en-US" dirty="0"/>
-              <a:t>and can be displayed as: Tiles, Table, Panels, Cards, Bar, Map, List, CSV, JSON, </a:t>
+              <a:t>override the or replacing placeholders.</a:t>
             </a:r>
             <a:endParaRPr lang="LID4096" dirty="0"/>
           </a:p>
@@ -6673,10 +8453,10 @@
       </p:sp>
       <p:pic>
         <p:nvPicPr>
-          <p:cNvPr id="5" name="Picture 4">
-            <a:extLst>
-              <a:ext uri="{FF2B5EF4-FFF2-40B4-BE49-F238E27FC236}">
-                <a16:creationId xmlns:a16="http://schemas.microsoft.com/office/drawing/2014/main" id="{45AD0FA3-F6CA-4F38-81D6-5DF2B4E9C2F1}"/>
+          <p:cNvPr id="7" name="Picture 6">
+            <a:extLst>
+              <a:ext uri="{FF2B5EF4-FFF2-40B4-BE49-F238E27FC236}">
+                <a16:creationId xmlns:a16="http://schemas.microsoft.com/office/drawing/2014/main" id="{49B0932E-A655-45F2-9269-67C936BCF00C}"/>
               </a:ext>
             </a:extLst>
           </p:cNvPr>
@@ -6693,8 +8473,38 @@
         </p:blipFill>
         <p:spPr>
           <a:xfrm>
-            <a:off x="2271791" y="2158367"/>
-            <a:ext cx="7648418" cy="4384093"/>
+            <a:off x="838200" y="2286000"/>
+            <a:ext cx="3378266" cy="4192095"/>
+          </a:xfrm>
+          <a:prstGeom prst="rect">
+            <a:avLst/>
+          </a:prstGeom>
+        </p:spPr>
+      </p:pic>
+      <p:pic>
+        <p:nvPicPr>
+          <p:cNvPr id="9" name="Picture 8">
+            <a:extLst>
+              <a:ext uri="{FF2B5EF4-FFF2-40B4-BE49-F238E27FC236}">
+                <a16:creationId xmlns:a16="http://schemas.microsoft.com/office/drawing/2014/main" id="{F875D6FF-E763-452F-B87F-EECE80E9E15C}"/>
+              </a:ext>
+            </a:extLst>
+          </p:cNvPr>
+          <p:cNvPicPr>
+            <a:picLocks noChangeAspect="1"/>
+          </p:cNvPicPr>
+          <p:nvPr/>
+        </p:nvPicPr>
+        <p:blipFill>
+          <a:blip r:embed="rId3"/>
+          <a:stretch>
+            <a:fillRect/>
+          </a:stretch>
+        </p:blipFill>
+        <p:spPr>
+          <a:xfrm>
+            <a:off x="4536082" y="2286000"/>
+            <a:ext cx="6213197" cy="4223173"/>
           </a:xfrm>
           <a:prstGeom prst="rect">
             <a:avLst/>
@@ -6704,7 +8514,7 @@
     </p:spTree>
     <p:extLst>
       <p:ext uri="{BB962C8B-B14F-4D97-AF65-F5344CB8AC3E}">
-        <p14:creationId xmlns:p14="http://schemas.microsoft.com/office/powerpoint/2010/main" val="78368369"/>
+        <p14:creationId xmlns:p14="http://schemas.microsoft.com/office/powerpoint/2010/main" val="3799331030"/>
       </p:ext>
     </p:extLst>
   </p:cSld>
@@ -6719,7 +8529,13 @@
   <p:cSld>
     <p:spTree>
       <p:nvGrpSpPr>
-        <p:cNvPr id="1" name=""/>
+        <p:cNvPr id="1" name="">
+          <a:extLst>
+            <a:ext uri="{FF2B5EF4-FFF2-40B4-BE49-F238E27FC236}">
+              <a16:creationId xmlns:a16="http://schemas.microsoft.com/office/drawing/2014/main" id="{25B38990-2EFD-17E2-AEE2-186963C9BC13}"/>
+            </a:ext>
+          </a:extLst>
+        </p:cNvPr>
         <p:cNvGrpSpPr/>
         <p:nvPr/>
       </p:nvGrpSpPr>
@@ -6736,93 +8552,61 @@
           <p:cNvPr id="2" name="Title 1">
             <a:extLst>
               <a:ext uri="{FF2B5EF4-FFF2-40B4-BE49-F238E27FC236}">
-                <a16:creationId xmlns:a16="http://schemas.microsoft.com/office/drawing/2014/main" id="{62118670-9D33-4A23-AC4C-183474388AAF}"/>
-              </a:ext>
-            </a:extLst>
-          </p:cNvPr>
-          <p:cNvSpPr>
-            <a:spLocks noGrp="1"/>
-          </p:cNvSpPr>
-          <p:nvPr>
-            <p:ph type="title"/>
-          </p:nvPr>
-        </p:nvSpPr>
-        <p:spPr/>
-        <p:txBody>
-          <a:bodyPr/>
-          <a:lstStyle/>
-          <a:p>
-            <a:r>
-              <a:rPr lang="en-US" dirty="0"/>
-              <a:t>Monitoring Widgets – Displays</a:t>
+                <a16:creationId xmlns:a16="http://schemas.microsoft.com/office/drawing/2014/main" id="{070646A5-9ACC-73FC-C0CF-257D908227C4}"/>
+              </a:ext>
+            </a:extLst>
+          </p:cNvPr>
+          <p:cNvSpPr>
+            <a:spLocks noGrp="1"/>
+          </p:cNvSpPr>
+          <p:nvPr>
+            <p:ph type="ctrTitle"/>
+          </p:nvPr>
+        </p:nvSpPr>
+        <p:spPr>
+          <a:xfrm>
+            <a:off x="1524000" y="2788915"/>
+            <a:ext cx="9144000" cy="1060677"/>
+          </a:xfrm>
+        </p:spPr>
+        <p:txBody>
+          <a:bodyPr/>
+          <a:lstStyle/>
+          <a:p>
+            <a:r>
+              <a:rPr lang="en-CH" dirty="0"/>
+              <a:t>Dashboard Widgets</a:t>
             </a:r>
             <a:endParaRPr lang="LID4096" dirty="0"/>
           </a:p>
         </p:txBody>
       </p:sp>
-      <p:pic>
-        <p:nvPicPr>
-          <p:cNvPr id="6" name="Picture 5">
-            <a:extLst>
-              <a:ext uri="{FF2B5EF4-FFF2-40B4-BE49-F238E27FC236}">
-                <a16:creationId xmlns:a16="http://schemas.microsoft.com/office/drawing/2014/main" id="{DC7BF7BF-BA0B-4410-A826-DE5724E882F0}"/>
-              </a:ext>
-            </a:extLst>
-          </p:cNvPr>
-          <p:cNvPicPr>
-            <a:picLocks noChangeAspect="1"/>
-          </p:cNvPicPr>
-          <p:nvPr/>
-        </p:nvPicPr>
-        <p:blipFill>
-          <a:blip r:embed="rId2"/>
-          <a:stretch>
-            <a:fillRect/>
-          </a:stretch>
-        </p:blipFill>
-        <p:spPr>
-          <a:xfrm>
-            <a:off x="1641908" y="1828167"/>
-            <a:ext cx="8908184" cy="4335043"/>
-          </a:xfrm>
-          <a:prstGeom prst="rect">
-            <a:avLst/>
-          </a:prstGeom>
-        </p:spPr>
-      </p:pic>
-      <p:sp>
-        <p:nvSpPr>
-          <p:cNvPr id="7" name="Content Placeholder 2">
-            <a:extLst>
-              <a:ext uri="{FF2B5EF4-FFF2-40B4-BE49-F238E27FC236}">
-                <a16:creationId xmlns:a16="http://schemas.microsoft.com/office/drawing/2014/main" id="{E4DA3F9C-F9DB-4F20-8762-A4E630955EE6}"/>
-              </a:ext>
-            </a:extLst>
-          </p:cNvPr>
-          <p:cNvSpPr>
-            <a:spLocks noGrp="1"/>
-          </p:cNvSpPr>
-          <p:nvPr>
-            <p:ph idx="1"/>
-          </p:nvPr>
-        </p:nvSpPr>
-        <p:spPr>
-          <a:xfrm>
-            <a:off x="838200" y="1239521"/>
-            <a:ext cx="10515600" cy="752475"/>
-          </a:xfrm>
-        </p:spPr>
-        <p:txBody>
-          <a:bodyPr>
-            <a:normAutofit/>
-          </a:bodyPr>
-          <a:lstStyle/>
-          <a:p>
-            <a:pPr algn="ctr"/>
-            <a:r>
-              <a:rPr lang="en-US" dirty="0"/>
-              <a:t>Examples for Status Bar, Map and List:</a:t>
-            </a:r>
+      <p:sp>
+        <p:nvSpPr>
+          <p:cNvPr id="3" name="Subtitle 2">
+            <a:extLst>
+              <a:ext uri="{FF2B5EF4-FFF2-40B4-BE49-F238E27FC236}">
+                <a16:creationId xmlns:a16="http://schemas.microsoft.com/office/drawing/2014/main" id="{F3491F41-66AC-C5B6-F09C-3A69E4E368DD}"/>
+              </a:ext>
+            </a:extLst>
+          </p:cNvPr>
+          <p:cNvSpPr>
+            <a:spLocks noGrp="1"/>
+          </p:cNvSpPr>
+          <p:nvPr>
+            <p:ph type="subTitle" idx="1"/>
+          </p:nvPr>
+        </p:nvSpPr>
+        <p:spPr>
+          <a:xfrm>
+            <a:off x="1524000" y="3941668"/>
+            <a:ext cx="9144000" cy="819739"/>
+          </a:xfrm>
+        </p:spPr>
+        <p:txBody>
+          <a:bodyPr/>
+          <a:lstStyle/>
+          <a:p>
             <a:endParaRPr lang="LID4096" dirty="0"/>
           </a:p>
         </p:txBody>
@@ -6830,7 +8614,7 @@
     </p:spTree>
     <p:extLst>
       <p:ext uri="{BB962C8B-B14F-4D97-AF65-F5344CB8AC3E}">
-        <p14:creationId xmlns:p14="http://schemas.microsoft.com/office/powerpoint/2010/main" val="3124610342"/>
+        <p14:creationId xmlns:p14="http://schemas.microsoft.com/office/powerpoint/2010/main" val="2187087172"/>
       </p:ext>
     </p:extLst>
   </p:cSld>
@@ -6859,10 +8643,10 @@
       </p:grpSpPr>
       <p:sp>
         <p:nvSpPr>
-          <p:cNvPr id="7" name="Title 6">
-            <a:extLst>
-              <a:ext uri="{FF2B5EF4-FFF2-40B4-BE49-F238E27FC236}">
-                <a16:creationId xmlns:a16="http://schemas.microsoft.com/office/drawing/2014/main" id="{73B810CF-8B65-40F1-A50C-4AEABE85B5E5}"/>
+          <p:cNvPr id="2" name="Title 1">
+            <a:extLst>
+              <a:ext uri="{FF2B5EF4-FFF2-40B4-BE49-F238E27FC236}">
+                <a16:creationId xmlns:a16="http://schemas.microsoft.com/office/drawing/2014/main" id="{1B5E51F3-A5F3-4C93-AA3F-38F4818C0DFE}"/>
               </a:ext>
             </a:extLst>
           </p:cNvPr>
@@ -6875,14 +8659,48 @@
         </p:nvSpPr>
         <p:spPr/>
         <p:txBody>
+          <a:bodyPr/>
+          <a:lstStyle/>
+          <a:p>
+            <a:r>
+              <a:rPr lang="en-US" dirty="0"/>
+              <a:t>Available Widgets in Version 1.8 </a:t>
+            </a:r>
+            <a:endParaRPr lang="LID4096" dirty="0"/>
+          </a:p>
+        </p:txBody>
+      </p:sp>
+      <p:sp>
+        <p:nvSpPr>
+          <p:cNvPr id="4" name="Text Placeholder 3">
+            <a:extLst>
+              <a:ext uri="{FF2B5EF4-FFF2-40B4-BE49-F238E27FC236}">
+                <a16:creationId xmlns:a16="http://schemas.microsoft.com/office/drawing/2014/main" id="{A8EEC71F-C940-4310-B1A3-4ABC28A37254}"/>
+              </a:ext>
+            </a:extLst>
+          </p:cNvPr>
+          <p:cNvSpPr>
+            <a:spLocks noGrp="1"/>
+          </p:cNvSpPr>
+          <p:nvPr>
+            <p:ph type="body" idx="1"/>
+          </p:nvPr>
+        </p:nvSpPr>
+        <p:spPr>
+          <a:xfrm>
+            <a:off x="839788" y="1681163"/>
+            <a:ext cx="5157787" cy="405821"/>
+          </a:xfrm>
+        </p:spPr>
+        <p:txBody>
           <a:bodyPr>
-            <a:normAutofit/>
+            <a:normAutofit lnSpcReduction="10000"/>
           </a:bodyPr>
           <a:lstStyle/>
           <a:p>
             <a:r>
               <a:rPr lang="en-US" dirty="0"/>
-              <a:t>Dashboard Widgets – Colors</a:t>
+              <a:t>Standard Widgets</a:t>
             </a:r>
             <a:endParaRPr lang="LID4096" dirty="0"/>
           </a:p>
@@ -6890,73 +8708,276 @@
       </p:sp>
       <p:sp>
         <p:nvSpPr>
-          <p:cNvPr id="12" name="Content Placeholder 11">
-            <a:extLst>
-              <a:ext uri="{FF2B5EF4-FFF2-40B4-BE49-F238E27FC236}">
-                <a16:creationId xmlns:a16="http://schemas.microsoft.com/office/drawing/2014/main" id="{46AFF02A-4A3F-46A9-AA85-C205489ED0A3}"/>
-              </a:ext>
-            </a:extLst>
-          </p:cNvPr>
-          <p:cNvSpPr>
-            <a:spLocks noGrp="1"/>
-          </p:cNvSpPr>
-          <p:nvPr>
-            <p:ph idx="1"/>
-          </p:nvPr>
-        </p:nvSpPr>
-        <p:spPr/>
-        <p:txBody>
-          <a:bodyPr/>
-          <a:lstStyle/>
-          <a:p>
-            <a:r>
-              <a:rPr lang="en-US" dirty="0"/>
-              <a:t>Widgets can be colored to highlight or create visual grouping.</a:t>
+          <p:cNvPr id="5" name="Content Placeholder 4">
+            <a:extLst>
+              <a:ext uri="{FF2B5EF4-FFF2-40B4-BE49-F238E27FC236}">
+                <a16:creationId xmlns:a16="http://schemas.microsoft.com/office/drawing/2014/main" id="{9455BA79-08DE-44E8-8A22-40E4D835AAD7}"/>
+              </a:ext>
+            </a:extLst>
+          </p:cNvPr>
+          <p:cNvSpPr>
+            <a:spLocks noGrp="1"/>
+          </p:cNvSpPr>
+          <p:nvPr>
+            <p:ph sz="half" idx="2"/>
+          </p:nvPr>
+        </p:nvSpPr>
+        <p:spPr>
+          <a:xfrm>
+            <a:off x="839788" y="2086984"/>
+            <a:ext cx="5157787" cy="4539727"/>
+          </a:xfrm>
+        </p:spPr>
+        <p:txBody>
+          <a:bodyPr>
+            <a:normAutofit fontScale="62500" lnSpcReduction="20000"/>
+          </a:bodyPr>
+          <a:lstStyle/>
+          <a:p>
+            <a:r>
+              <a:rPr lang="en-US" dirty="0"/>
+              <a:t>Text</a:t>
+            </a:r>
+          </a:p>
+          <a:p>
+            <a:r>
+              <a:rPr lang="en-US" dirty="0"/>
+              <a:t>Label</a:t>
+            </a:r>
+          </a:p>
+          <a:p>
+            <a:r>
+              <a:rPr lang="en-US" dirty="0"/>
+              <a:t>List</a:t>
+            </a:r>
+          </a:p>
+          <a:p>
+            <a:r>
+              <a:rPr lang="en-US" dirty="0"/>
+              <a:t>Checklist</a:t>
+            </a:r>
+          </a:p>
+          <a:p>
+            <a:r>
+              <a:rPr lang="en-US" dirty="0"/>
+              <a:t>CSV Table</a:t>
+            </a:r>
+          </a:p>
+          <a:p>
+            <a:r>
+              <a:rPr lang="en-US" dirty="0"/>
+              <a:t>Tags</a:t>
+            </a:r>
+          </a:p>
+          <a:p>
+            <a:r>
+              <a:rPr lang="en-US" dirty="0"/>
+              <a:t>Image</a:t>
+            </a:r>
+          </a:p>
+          <a:p>
+            <a:r>
+              <a:rPr lang="en-US" dirty="0"/>
+              <a:t>HTML Editor</a:t>
+            </a:r>
+          </a:p>
+          <a:p>
+            <a:r>
+              <a:rPr lang="en-US" dirty="0"/>
+              <a:t>Website</a:t>
+            </a:r>
+          </a:p>
+          <a:p>
+            <a:r>
+              <a:rPr lang="en-US" dirty="0" err="1"/>
+              <a:t>Youtube</a:t>
+            </a:r>
+            <a:r>
+              <a:rPr lang="en-US" dirty="0"/>
+              <a:t> Video</a:t>
+            </a:r>
+          </a:p>
+          <a:p>
+            <a:r>
+              <a:rPr lang="en-US" dirty="0"/>
+              <a:t>Refresh Time</a:t>
+            </a:r>
+          </a:p>
+          <a:p>
+            <a:r>
+              <a:rPr lang="en-US" dirty="0"/>
+              <a:t>Parameters</a:t>
+            </a:r>
+          </a:p>
+          <a:p>
+            <a:r>
+              <a:rPr lang="en-US" dirty="0"/>
+              <a:t>Replica</a:t>
+            </a:r>
+          </a:p>
+          <a:p>
+            <a:r>
+              <a:rPr lang="en-US" dirty="0"/>
+              <a:t>Display Query Results</a:t>
+            </a:r>
+          </a:p>
+        </p:txBody>
+      </p:sp>
+      <p:sp>
+        <p:nvSpPr>
+          <p:cNvPr id="6" name="Text Placeholder 5">
+            <a:extLst>
+              <a:ext uri="{FF2B5EF4-FFF2-40B4-BE49-F238E27FC236}">
+                <a16:creationId xmlns:a16="http://schemas.microsoft.com/office/drawing/2014/main" id="{8AC8E697-F251-4298-9E93-26FBE2A5DC91}"/>
+              </a:ext>
+            </a:extLst>
+          </p:cNvPr>
+          <p:cNvSpPr>
+            <a:spLocks noGrp="1"/>
+          </p:cNvSpPr>
+          <p:nvPr>
+            <p:ph type="body" sz="quarter" idx="3"/>
+          </p:nvPr>
+        </p:nvSpPr>
+        <p:spPr>
+          <a:xfrm>
+            <a:off x="6172200" y="1681163"/>
+            <a:ext cx="5183188" cy="405821"/>
+          </a:xfrm>
+        </p:spPr>
+        <p:txBody>
+          <a:bodyPr>
+            <a:normAutofit lnSpcReduction="10000"/>
+          </a:bodyPr>
+          <a:lstStyle/>
+          <a:p>
+            <a:r>
+              <a:rPr lang="en-US" dirty="0"/>
+              <a:t>Monitoring Widgets</a:t>
             </a:r>
             <a:endParaRPr lang="LID4096" dirty="0"/>
           </a:p>
         </p:txBody>
       </p:sp>
-      <p:pic>
-        <p:nvPicPr>
-          <p:cNvPr id="18" name="Picture 17">
-            <a:extLst>
-              <a:ext uri="{FF2B5EF4-FFF2-40B4-BE49-F238E27FC236}">
-                <a16:creationId xmlns:a16="http://schemas.microsoft.com/office/drawing/2014/main" id="{E84A51B2-4D91-4021-8309-6E3EBF6BC3AF}"/>
-              </a:ext>
-            </a:extLst>
-          </p:cNvPr>
-          <p:cNvPicPr>
-            <a:picLocks noChangeAspect="1"/>
-          </p:cNvPicPr>
-          <p:nvPr/>
-        </p:nvPicPr>
-        <p:blipFill>
-          <a:blip r:embed="rId2">
-            <a:extLst>
-              <a:ext uri="{28A0092B-C50C-407E-A947-70E740481C1C}">
-                <a14:useLocalDpi xmlns:a14="http://schemas.microsoft.com/office/drawing/2010/main" val="0"/>
-              </a:ext>
-            </a:extLst>
-          </a:blip>
-          <a:stretch>
-            <a:fillRect/>
-          </a:stretch>
-        </p:blipFill>
-        <p:spPr>
-          <a:xfrm>
-            <a:off x="1046480" y="2498161"/>
-            <a:ext cx="9580880" cy="3229510"/>
-          </a:xfrm>
-          <a:prstGeom prst="rect">
-            <a:avLst/>
-          </a:prstGeom>
-        </p:spPr>
-      </p:pic>
+      <p:sp>
+        <p:nvSpPr>
+          <p:cNvPr id="7" name="Content Placeholder 6">
+            <a:extLst>
+              <a:ext uri="{FF2B5EF4-FFF2-40B4-BE49-F238E27FC236}">
+                <a16:creationId xmlns:a16="http://schemas.microsoft.com/office/drawing/2014/main" id="{F2180B55-ED5E-4476-9568-27428783EFE7}"/>
+              </a:ext>
+            </a:extLst>
+          </p:cNvPr>
+          <p:cNvSpPr>
+            <a:spLocks noGrp="1"/>
+          </p:cNvSpPr>
+          <p:nvPr>
+            <p:ph sz="quarter" idx="4"/>
+          </p:nvPr>
+        </p:nvSpPr>
+        <p:spPr>
+          <a:xfrm>
+            <a:off x="6172200" y="2086984"/>
+            <a:ext cx="5183188" cy="4539727"/>
+          </a:xfrm>
+        </p:spPr>
+        <p:txBody>
+          <a:bodyPr>
+            <a:normAutofit fontScale="62500" lnSpcReduction="20000"/>
+          </a:bodyPr>
+          <a:lstStyle/>
+          <a:p>
+            <a:r>
+              <a:rPr lang="en-US" dirty="0"/>
+              <a:t>Dynatrace</a:t>
+            </a:r>
+          </a:p>
+          <a:p>
+            <a:r>
+              <a:rPr lang="en-US" dirty="0"/>
+              <a:t>MySQL</a:t>
+            </a:r>
+          </a:p>
+          <a:p>
+            <a:r>
+              <a:rPr lang="en-US" dirty="0"/>
+              <a:t>MSSQL</a:t>
+            </a:r>
+          </a:p>
+          <a:p>
+            <a:r>
+              <a:rPr lang="en-US" dirty="0"/>
+              <a:t>Oracle</a:t>
+            </a:r>
+          </a:p>
+          <a:p>
+            <a:r>
+              <a:rPr lang="en-US" dirty="0"/>
+              <a:t>Other Databases(JDBC Drivers)</a:t>
+            </a:r>
+          </a:p>
+          <a:p>
+            <a:r>
+              <a:rPr lang="en-US" dirty="0" err="1"/>
+              <a:t>InfluxDB</a:t>
+            </a:r>
+            <a:endParaRPr lang="en-US" dirty="0"/>
+          </a:p>
+          <a:p>
+            <a:r>
+              <a:rPr lang="en-US" dirty="0"/>
+              <a:t>Prometheus</a:t>
+            </a:r>
+          </a:p>
+          <a:p>
+            <a:r>
+              <a:rPr lang="en-US" dirty="0" err="1"/>
+              <a:t>Exense</a:t>
+            </a:r>
+            <a:r>
+              <a:rPr lang="en-US" dirty="0"/>
+              <a:t> Step</a:t>
+            </a:r>
+          </a:p>
+          <a:p>
+            <a:r>
+              <a:rPr lang="en-US" dirty="0"/>
+              <a:t>Silk Performance Manager(SPM)</a:t>
+            </a:r>
+          </a:p>
+          <a:p>
+            <a:r>
+              <a:rPr lang="en-US" dirty="0" err="1"/>
+              <a:t>Webex</a:t>
+            </a:r>
+            <a:endParaRPr lang="en-US" dirty="0"/>
+          </a:p>
+          <a:p>
+            <a:r>
+              <a:rPr lang="en-US" dirty="0"/>
+              <a:t>CA </a:t>
+            </a:r>
+            <a:r>
+              <a:rPr lang="en-US" dirty="0" err="1"/>
+              <a:t>Automic</a:t>
+            </a:r>
+            <a:r>
+              <a:rPr lang="en-US" dirty="0"/>
+              <a:t> Workload Automation(AWA)</a:t>
+            </a:r>
+          </a:p>
+          <a:p>
+            <a:pPr marL="0" indent="0">
+              <a:buNone/>
+            </a:pPr>
+            <a:endParaRPr lang="LID4096" dirty="0"/>
+          </a:p>
+        </p:txBody>
+      </p:sp>
     </p:spTree>
     <p:extLst>
       <p:ext uri="{BB962C8B-B14F-4D97-AF65-F5344CB8AC3E}">
-        <p14:creationId xmlns:p14="http://schemas.microsoft.com/office/powerpoint/2010/main" val="87834105"/>
+        <p14:creationId xmlns:p14="http://schemas.microsoft.com/office/powerpoint/2010/main" val="560022635"/>
       </p:ext>
     </p:extLst>
   </p:cSld>

--- a/EngineeredMonitoringPlatform/docs/EMP_PresentationSlides.pptx
+++ b/EngineeredMonitoringPlatform/docs/EMP_PresentationSlides.pptx
@@ -42,6 +42,7 @@
     <p:sldId id="293" r:id="rId36"/>
     <p:sldId id="295" r:id="rId37"/>
     <p:sldId id="289" r:id="rId38"/>
+    <p:sldId id="296" r:id="rId39"/>
   </p:sldIdLst>
   <p:sldSz cx="12192000" cy="6858000"/>
   <p:notesSz cx="6858000" cy="9144000"/>
@@ -6946,7 +6947,7 @@
               </a:lnSpc>
             </a:pPr>
             <a:r>
-              <a:rPr lang="en-CH" sz="2000" dirty="0"/>
+              <a:rPr lang="de-DE" sz="2000" dirty="0"/>
               <a:t>You have the possibility to show your data in various chart types: Line | Area | Bar | Scatter | Stepped Line | Stepped Area | Spark Line | Spark Bar | Pie | Doughnut | Radar | Polar</a:t>
             </a:r>
             <a:br>
@@ -8018,6 +8019,171 @@
     <p:extLst>
       <p:ext uri="{BB962C8B-B14F-4D97-AF65-F5344CB8AC3E}">
         <p14:creationId xmlns:p14="http://schemas.microsoft.com/office/powerpoint/2010/main" val="2214737594"/>
+      </p:ext>
+    </p:extLst>
+  </p:cSld>
+  <p:clrMapOvr>
+    <a:masterClrMapping/>
+  </p:clrMapOvr>
+</p:sld>
+</file>
+
+<file path=ppt/slides/slide38.xml><?xml version="1.0" encoding="utf-8"?>
+<p:sld xmlns:a="http://schemas.openxmlformats.org/drawingml/2006/main" xmlns:r="http://schemas.openxmlformats.org/officeDocument/2006/relationships" xmlns:p="http://schemas.openxmlformats.org/presentationml/2006/main">
+  <p:cSld>
+    <p:spTree>
+      <p:nvGrpSpPr>
+        <p:cNvPr id="1" name="">
+          <a:extLst>
+            <a:ext uri="{FF2B5EF4-FFF2-40B4-BE49-F238E27FC236}">
+              <a16:creationId xmlns:a16="http://schemas.microsoft.com/office/drawing/2014/main" id="{8068C59A-B73A-83D4-E40E-A040D5FE0EE8}"/>
+            </a:ext>
+          </a:extLst>
+        </p:cNvPr>
+        <p:cNvGrpSpPr/>
+        <p:nvPr/>
+      </p:nvGrpSpPr>
+      <p:grpSpPr>
+        <a:xfrm>
+          <a:off x="0" y="0"/>
+          <a:ext cx="0" cy="0"/>
+          <a:chOff x="0" y="0"/>
+          <a:chExt cx="0" cy="0"/>
+        </a:xfrm>
+      </p:grpSpPr>
+      <p:sp>
+        <p:nvSpPr>
+          <p:cNvPr id="2" name="Title 1">
+            <a:extLst>
+              <a:ext uri="{FF2B5EF4-FFF2-40B4-BE49-F238E27FC236}">
+                <a16:creationId xmlns:a16="http://schemas.microsoft.com/office/drawing/2014/main" id="{D037ED42-2C99-0816-C231-1BABAC5EDF04}"/>
+              </a:ext>
+            </a:extLst>
+          </p:cNvPr>
+          <p:cNvSpPr>
+            <a:spLocks noGrp="1"/>
+          </p:cNvSpPr>
+          <p:nvPr>
+            <p:ph type="title"/>
+          </p:nvPr>
+        </p:nvSpPr>
+        <p:spPr/>
+        <p:txBody>
+          <a:bodyPr/>
+          <a:lstStyle/>
+          <a:p>
+            <a:r>
+              <a:rPr lang="en-CH" dirty="0"/>
+              <a:t>Indexed Moving Average Charts</a:t>
+            </a:r>
+          </a:p>
+        </p:txBody>
+      </p:sp>
+      <p:sp>
+        <p:nvSpPr>
+          <p:cNvPr id="3" name="Content Placeholder 2">
+            <a:extLst>
+              <a:ext uri="{FF2B5EF4-FFF2-40B4-BE49-F238E27FC236}">
+                <a16:creationId xmlns:a16="http://schemas.microsoft.com/office/drawing/2014/main" id="{4365B736-5DF0-9E2A-AC44-C5E75C1F63C0}"/>
+              </a:ext>
+            </a:extLst>
+          </p:cNvPr>
+          <p:cNvSpPr>
+            <a:spLocks noGrp="1"/>
+          </p:cNvSpPr>
+          <p:nvPr>
+            <p:ph idx="1"/>
+          </p:nvPr>
+        </p:nvSpPr>
+        <p:spPr>
+          <a:xfrm>
+            <a:off x="838200" y="1180012"/>
+            <a:ext cx="10515600" cy="752475"/>
+          </a:xfrm>
+        </p:spPr>
+        <p:txBody>
+          <a:bodyPr>
+            <a:normAutofit fontScale="55000" lnSpcReduction="20000"/>
+          </a:bodyPr>
+          <a:lstStyle/>
+          <a:p>
+            <a:pPr>
+              <a:lnSpc>
+                <a:spcPct val="120000"/>
+              </a:lnSpc>
+            </a:pPr>
+            <a:r>
+              <a:rPr lang="en-GB" dirty="0"/>
+              <a:t>Index moving average charts can help to visualize changes in values more clearly when values are high. They show you the change in percentage instead of the absolute value, what makes it easier to understand the amount of change over time.</a:t>
+            </a:r>
+            <a:endParaRPr lang="en-CH" dirty="0"/>
+          </a:p>
+        </p:txBody>
+      </p:sp>
+      <p:pic>
+        <p:nvPicPr>
+          <p:cNvPr id="17" name="Picture 16">
+            <a:extLst>
+              <a:ext uri="{FF2B5EF4-FFF2-40B4-BE49-F238E27FC236}">
+                <a16:creationId xmlns:a16="http://schemas.microsoft.com/office/drawing/2014/main" id="{BA30730C-DDA4-BDE9-0C0C-4A1E776428E5}"/>
+              </a:ext>
+            </a:extLst>
+          </p:cNvPr>
+          <p:cNvPicPr>
+            <a:picLocks noChangeAspect="1"/>
+          </p:cNvPicPr>
+          <p:nvPr/>
+        </p:nvPicPr>
+        <p:blipFill>
+          <a:blip r:embed="rId2"/>
+          <a:stretch>
+            <a:fillRect/>
+          </a:stretch>
+        </p:blipFill>
+        <p:spPr>
+          <a:xfrm>
+            <a:off x="6096000" y="2028471"/>
+            <a:ext cx="3798441" cy="4394370"/>
+          </a:xfrm>
+          <a:prstGeom prst="rect">
+            <a:avLst/>
+          </a:prstGeom>
+        </p:spPr>
+      </p:pic>
+      <p:pic>
+        <p:nvPicPr>
+          <p:cNvPr id="21" name="Picture 20">
+            <a:extLst>
+              <a:ext uri="{FF2B5EF4-FFF2-40B4-BE49-F238E27FC236}">
+                <a16:creationId xmlns:a16="http://schemas.microsoft.com/office/drawing/2014/main" id="{20662E0F-8E56-6E4E-BEDD-C40367D5B269}"/>
+              </a:ext>
+            </a:extLst>
+          </p:cNvPr>
+          <p:cNvPicPr>
+            <a:picLocks noChangeAspect="1"/>
+          </p:cNvPicPr>
+          <p:nvPr/>
+        </p:nvPicPr>
+        <p:blipFill>
+          <a:blip r:embed="rId3"/>
+          <a:stretch>
+            <a:fillRect/>
+          </a:stretch>
+        </p:blipFill>
+        <p:spPr>
+          <a:xfrm>
+            <a:off x="1305547" y="1905099"/>
+            <a:ext cx="4311482" cy="4519683"/>
+          </a:xfrm>
+          <a:prstGeom prst="rect">
+            <a:avLst/>
+          </a:prstGeom>
+        </p:spPr>
+      </p:pic>
+    </p:spTree>
+    <p:extLst>
+      <p:ext uri="{BB962C8B-B14F-4D97-AF65-F5344CB8AC3E}">
+        <p14:creationId xmlns:p14="http://schemas.microsoft.com/office/powerpoint/2010/main" val="1075634210"/>
       </p:ext>
     </p:extLst>
   </p:cSld>
